--- a/Drug_Recommendation_System_Presentation.pptx
+++ b/Drug_Recommendation_System_Presentation.pptx
@@ -4,6 +4,9 @@
   <p:sldMasterIdLst>
     <p:sldMasterId id="2147483648" r:id="rId1"/>
   </p:sldMasterIdLst>
+  <p:notesMasterIdLst>
+    <p:notesMasterId r:id="rId12"/>
+  </p:notesMasterIdLst>
   <p:sldIdLst>
     <p:sldId id="256" r:id="rId2"/>
     <p:sldId id="257" r:id="rId3"/>
@@ -16,9 +19,6 @@
     <p:sldId id="264" r:id="rId10"/>
     <p:sldId id="265" r:id="rId11"/>
   </p:sldIdLst>
-  <p:notesMasterIdLst>
-    <p:notesMasterId r:id="rId12"/>
-  </p:notesMasterIdLst>
   <p:sldSz cx="12192000" cy="6858000"/>
   <p:notesSz cx="6858000" cy="12192000"/>
   <p:defaultTextStyle>
@@ -113,6 +113,11 @@
       </a:defRPr>
     </a:lvl9pPr>
   </p:defaultTextStyle>
+  <p:extLst>
+    <p:ext uri="{EFAFB233-063F-42B5-8137-9DF3F51BA10A}">
+      <p15:sldGuideLst xmlns:p15="http://schemas.microsoft.com/office/powerpoint/2012/main"/>
+    </p:ext>
+  </p:extLst>
 </p:presentation>
 </file>
 
@@ -138,234 +143,10 @@
           <a:chExt cx="0" cy="0"/>
         </a:xfrm>
       </p:grpSpPr>
-      <p:sp>
-        <p:nvSpPr>
-          <p:cNvPr id="2" name="Header Placeholder 1"/>
-          <p:cNvSpPr>
-            <a:spLocks noGrp="1"/>
-          </p:cNvSpPr>
-          <p:nvPr>
-            <p:ph type="hdr" sz="quarter"/>
-          </p:nvPr>
-        </p:nvSpPr>
-        <p:spPr>
-          <a:xfrm>
-            <a:off x="0" y="0"/>
-            <a:ext cx="2971800" cy="458788"/>
-          </a:xfrm>
-          <a:prstGeom prst="rect">
-            <a:avLst/>
-          </a:prstGeom>
-        </p:spPr>
-        <p:txBody>
-          <a:bodyPr vert="horz" lIns="91440" tIns="45720" rIns="91440" bIns="45720" rtlCol="0"/>
-          <a:lstStyle>
-            <a:lvl1pPr algn="l">
-              <a:defRPr sz="1200"/>
-            </a:lvl1pPr>
-          </a:lstStyle>
-          <a:p>
-            <a:endParaRPr lang="en-US"/>
-          </a:p>
-        </p:txBody>
-      </p:sp>
-      <p:sp>
-        <p:nvSpPr>
-          <p:cNvPr id="3" name="Date Placeholder 2"/>
-          <p:cNvSpPr>
-            <a:spLocks noGrp="1"/>
-          </p:cNvSpPr>
-          <p:nvPr>
-            <p:ph type="dt" idx="1"/>
-          </p:nvPr>
-        </p:nvSpPr>
-        <p:spPr>
-          <a:xfrm>
-            <a:off x="3884613" y="0"/>
-            <a:ext cx="2971800" cy="458788"/>
-          </a:xfrm>
-          <a:prstGeom prst="rect">
-            <a:avLst/>
-          </a:prstGeom>
-        </p:spPr>
-        <p:txBody>
-          <a:bodyPr vert="horz" lIns="91440" tIns="45720" rIns="91440" bIns="45720" rtlCol="0"/>
-          <a:lstStyle>
-            <a:lvl1pPr algn="r">
-              <a:defRPr sz="1200"/>
-            </a:lvl1pPr>
-          </a:lstStyle>
-          <a:p>
-            <a:fld id="{5282F153-3F37-0F45-9E97-73ACFA13230C}" type="datetimeFigureOut">
-              <a:rPr lang="en-US"/>
-              <a:t>7/23/19</a:t>
-            </a:fld>
-            <a:endParaRPr lang="en-US"/>
-          </a:p>
-        </p:txBody>
-      </p:sp>
-      <p:sp>
-        <p:nvSpPr>
-          <p:cNvPr id="4" name="Slide Image Placeholder 3"/>
-          <p:cNvSpPr>
-            <a:spLocks noGrp="1" noRot="1" noChangeAspect="1"/>
-          </p:cNvSpPr>
-          <p:nvPr>
-            <p:ph type="sldImg" idx="2"/>
-          </p:nvPr>
-        </p:nvSpPr>
-        <p:spPr>
-          <a:xfrm>
-            <a:off x="685800" y="1143000"/>
-            <a:ext cx="5486400" cy="3086100"/>
-          </a:xfrm>
-          <a:prstGeom prst="rect">
-            <a:avLst/>
-          </a:prstGeom>
-          <a:noFill/>
-          <a:ln w="12700">
-            <a:solidFill>
-              <a:prstClr val="black"/>
-            </a:solidFill>
-          </a:ln>
-        </p:spPr>
-        <p:txBody>
-          <a:bodyPr vert="horz" lIns="91440" tIns="45720" rIns="91440" bIns="45720" rtlCol="0" anchor="ctr"/>
-          <a:lstStyle/>
-          <a:p>
-            <a:endParaRPr lang="en-US"/>
-          </a:p>
-        </p:txBody>
-      </p:sp>
-      <p:sp>
-        <p:nvSpPr>
-          <p:cNvPr id="5" name="Notes Placeholder 4"/>
-          <p:cNvSpPr>
-            <a:spLocks noGrp="1"/>
-          </p:cNvSpPr>
-          <p:nvPr>
-            <p:ph type="body" sz="quarter" idx="3"/>
-          </p:nvPr>
-        </p:nvSpPr>
-        <p:spPr>
-          <a:xfrm>
-            <a:off x="685800" y="4400550"/>
-            <a:ext cx="5486400" cy="3600450"/>
-          </a:xfrm>
-          <a:prstGeom prst="rect">
-            <a:avLst/>
-          </a:prstGeom>
-        </p:spPr>
-        <p:txBody>
-          <a:bodyPr vert="horz" lIns="91440" tIns="45720" rIns="91440" bIns="45720" rtlCol="0"/>
-          <a:lstStyle/>
-          <a:p>
-            <a:pPr lvl="0"/>
-            <a:r>
-              <a:rPr lang="en-US"/>
-              <a:t>Click to edit Master text styles</a:t>
-            </a:r>
-          </a:p>
-          <a:p>
-            <a:pPr lvl="1"/>
-            <a:r>
-              <a:rPr lang="en-US"/>
-              <a:t>Second level</a:t>
-            </a:r>
-          </a:p>
-          <a:p>
-            <a:pPr lvl="2"/>
-            <a:r>
-              <a:rPr lang="en-US"/>
-              <a:t>Third level</a:t>
-            </a:r>
-          </a:p>
-          <a:p>
-            <a:pPr lvl="3"/>
-            <a:r>
-              <a:rPr lang="en-US"/>
-              <a:t>Fourth level</a:t>
-            </a:r>
-          </a:p>
-          <a:p>
-            <a:pPr lvl="4"/>
-            <a:r>
-              <a:rPr lang="en-US"/>
-              <a:t>Fifth level</a:t>
-            </a:r>
-          </a:p>
-        </p:txBody>
-      </p:sp>
-      <p:sp>
-        <p:nvSpPr>
-          <p:cNvPr id="6" name="Footer Placeholder 5"/>
-          <p:cNvSpPr>
-            <a:spLocks noGrp="1"/>
-          </p:cNvSpPr>
-          <p:nvPr>
-            <p:ph type="ftr" sz="quarter" idx="4"/>
-          </p:nvPr>
-        </p:nvSpPr>
-        <p:spPr>
-          <a:xfrm>
-            <a:off x="0" y="8685213"/>
-            <a:ext cx="2971800" cy="458787"/>
-          </a:xfrm>
-          <a:prstGeom prst="rect">
-            <a:avLst/>
-          </a:prstGeom>
-        </p:spPr>
-        <p:txBody>
-          <a:bodyPr vert="horz" lIns="91440" tIns="45720" rIns="91440" bIns="45720" rtlCol="0" anchor="b"/>
-          <a:lstStyle>
-            <a:lvl1pPr algn="l">
-              <a:defRPr sz="1200"/>
-            </a:lvl1pPr>
-          </a:lstStyle>
-          <a:p>
-            <a:endParaRPr lang="en-US"/>
-          </a:p>
-        </p:txBody>
-      </p:sp>
-      <p:sp>
-        <p:nvSpPr>
-          <p:cNvPr id="7" name="Slide Number Placeholder 6"/>
-          <p:cNvSpPr>
-            <a:spLocks noGrp="1"/>
-          </p:cNvSpPr>
-          <p:nvPr>
-            <p:ph type="sldNum" sz="quarter" idx="5"/>
-          </p:nvPr>
-        </p:nvSpPr>
-        <p:spPr>
-          <a:xfrm>
-            <a:off x="3884613" y="8685213"/>
-            <a:ext cx="2971800" cy="458787"/>
-          </a:xfrm>
-          <a:prstGeom prst="rect">
-            <a:avLst/>
-          </a:prstGeom>
-        </p:spPr>
-        <p:txBody>
-          <a:bodyPr vert="horz" lIns="91440" tIns="45720" rIns="91440" bIns="45720" rtlCol="0" anchor="b"/>
-          <a:lstStyle>
-            <a:lvl1pPr algn="r">
-              <a:defRPr sz="1200"/>
-            </a:lvl1pPr>
-          </a:lstStyle>
-          <a:p>
-            <a:fld id="{CE5E9CC1-C706-0F49-92D6-E571CC5EEA8F}" type="slidenum">
-              <a:rPr lang="en-US"/>
-              <a:t>‹#›</a:t>
-            </a:fld>
-            <a:endParaRPr lang="en-US"/>
-          </a:p>
-        </p:txBody>
-      </p:sp>
     </p:spTree>
     <p:extLst>
       <p:ext uri="{BB962C8B-B14F-4D97-AF65-F5344CB8AC3E}">
-        <p14:creationId xmlns:p14="http://schemas.microsoft.com/office/powerpoint/2010/main" val="1024086991"/>
+        <p14:creationId xmlns:p14="http://schemas.microsoft.com/office/powerpoint/2010/main" val="2432086774"/>
       </p:ext>
     </p:extLst>
   </p:cSld>
@@ -509,10 +290,6 @@
           <a:bodyPr/>
           <a:lstStyle/>
           <a:p>
-            <a:r>
-              <a:rPr lang="en-US" dirty="0"/>
-              <a:t/>
-            </a:r>
             <a:endParaRPr lang="en-US" dirty="0"/>
           </a:p>
         </p:txBody>
@@ -597,10 +374,6 @@
           <a:bodyPr/>
           <a:lstStyle/>
           <a:p>
-            <a:r>
-              <a:rPr lang="en-US" dirty="0"/>
-              <a:t/>
-            </a:r>
             <a:endParaRPr lang="en-US" dirty="0"/>
           </a:p>
         </p:txBody>
@@ -685,10 +458,6 @@
           <a:bodyPr/>
           <a:lstStyle/>
           <a:p>
-            <a:r>
-              <a:rPr lang="en-US" dirty="0"/>
-              <a:t/>
-            </a:r>
             <a:endParaRPr lang="en-US" dirty="0"/>
           </a:p>
         </p:txBody>
@@ -773,10 +542,6 @@
           <a:bodyPr/>
           <a:lstStyle/>
           <a:p>
-            <a:r>
-              <a:rPr lang="en-US" dirty="0"/>
-              <a:t/>
-            </a:r>
             <a:endParaRPr lang="en-US" dirty="0"/>
           </a:p>
         </p:txBody>
@@ -861,10 +626,6 @@
           <a:bodyPr/>
           <a:lstStyle/>
           <a:p>
-            <a:r>
-              <a:rPr lang="en-US" dirty="0"/>
-              <a:t/>
-            </a:r>
             <a:endParaRPr lang="en-US" dirty="0"/>
           </a:p>
         </p:txBody>
@@ -949,10 +710,6 @@
           <a:bodyPr/>
           <a:lstStyle/>
           <a:p>
-            <a:r>
-              <a:rPr lang="en-US" dirty="0"/>
-              <a:t/>
-            </a:r>
             <a:endParaRPr lang="en-US" dirty="0"/>
           </a:p>
         </p:txBody>
@@ -1037,10 +794,6 @@
           <a:bodyPr/>
           <a:lstStyle/>
           <a:p>
-            <a:r>
-              <a:rPr lang="en-US" dirty="0"/>
-              <a:t/>
-            </a:r>
             <a:endParaRPr lang="en-US" dirty="0"/>
           </a:p>
         </p:txBody>
@@ -1125,10 +878,6 @@
           <a:bodyPr/>
           <a:lstStyle/>
           <a:p>
-            <a:r>
-              <a:rPr lang="en-US" dirty="0"/>
-              <a:t/>
-            </a:r>
             <a:endParaRPr lang="en-US" dirty="0"/>
           </a:p>
         </p:txBody>
@@ -1213,10 +962,6 @@
           <a:bodyPr/>
           <a:lstStyle/>
           <a:p>
-            <a:r>
-              <a:rPr lang="en-US" dirty="0"/>
-              <a:t/>
-            </a:r>
             <a:endParaRPr lang="en-US" dirty="0"/>
           </a:p>
         </p:txBody>
@@ -1301,10 +1046,6 @@
           <a:bodyPr/>
           <a:lstStyle/>
           <a:p>
-            <a:r>
-              <a:rPr lang="en-US" dirty="0"/>
-              <a:t/>
-            </a:r>
             <a:endParaRPr lang="en-US" dirty="0"/>
           </a:p>
         </p:txBody>
@@ -1383,6 +1124,7 @@
         <a:solidFill>
           <a:srgbClr val="FFFFFF"/>
         </a:solidFill>
+        <a:effectLst/>
       </p:bgPr>
     </p:bg>
     <p:spTree>
@@ -1410,6 +1152,11 @@
 <file path=ppt/slideMasters/slideMaster1.xml><?xml version="1.0" encoding="utf-8"?>
 <p:sldMaster xmlns:a="http://schemas.openxmlformats.org/drawingml/2006/main" xmlns:r="http://schemas.openxmlformats.org/officeDocument/2006/relationships" xmlns:p="http://schemas.openxmlformats.org/presentationml/2006/main">
   <p:cSld>
+    <p:bg>
+      <p:bgRef idx="1001">
+        <a:schemeClr val="bg1"/>
+      </p:bgRef>
+    </p:bg>
     <p:spTree>
       <p:nvGrpSpPr>
         <p:cNvPr id="1" name=""/>
@@ -1693,6 +1440,7 @@
         <a:solidFill>
           <a:srgbClr val="0F2A43"/>
         </a:solidFill>
+        <a:effectLst/>
       </p:bgPr>
     </p:bg>
     <p:spTree>
@@ -1791,14 +1539,14 @@
       </p:sp>
       <p:pic>
         <p:nvPicPr>
-          <p:cNvPr id="6" name="Image 0" descr="C:\Users\liyon\AppData\Local\Temp\claude\C--Users-liyon-Personal-MCA-PROJECT-drug-project--2--drug-project-drugrecomendation\9da8fb70-ea4c-4cf2-953c-5bcd9131f7d4\scratchpad\pptgen\icons\pills.png">    </p:cNvPr>
+          <p:cNvPr id="6" name="Image 0" descr="C:\Users\liyon\AppData\Local\Temp\claude\C--Users-liyon-Personal-MCA-PROJECT-drug-project--2--drug-project-drugrecomendation\9da8fb70-ea4c-4cf2-953c-5bcd9131f7d4\scratchpad\pptgen\icons\pills.png"/>
           <p:cNvPicPr>
             <a:picLocks noChangeAspect="1"/>
           </p:cNvPicPr>
           <p:nvPr/>
         </p:nvPicPr>
         <p:blipFill>
-          <a:blip r:embed="rId1"/>
+          <a:blip r:embed="rId3"/>
           <a:stretch>
             <a:fillRect/>
           </a:stretch>
@@ -1834,11 +1582,11 @@
           <a:bodyPr wrap="square" rtlCol="0" anchor="ctr"/>
           <a:lstStyle/>
           <a:p>
-            <a:pPr indent="0" marL="0">
-              <a:buNone/>
-            </a:pPr>
-            <a:r>
-              <a:rPr lang="en-US" sz="1400" b="1" spc="300" kern="0" dirty="0">
+            <a:pPr marL="0" indent="0">
+              <a:buNone/>
+            </a:pPr>
+            <a:r>
+              <a:rPr lang="en-US" sz="1400" b="1" kern="0" spc="300" dirty="0">
                 <a:solidFill>
                   <a:srgbClr val="F3AF24"/>
                 </a:solidFill>
@@ -1873,7 +1621,7 @@
           <a:bodyPr wrap="square" rtlCol="0" anchor="ctr"/>
           <a:lstStyle/>
           <a:p>
-            <a:pPr indent="0" marL="0">
+            <a:pPr marL="0" indent="0">
               <a:lnSpc>
                 <a:spcPts val="5400"/>
               </a:lnSpc>
@@ -1893,7 +1641,7 @@
             <a:endParaRPr lang="en-US" sz="5000" dirty="0"/>
           </a:p>
           <a:p>
-            <a:pPr indent="0" marL="0">
+            <a:pPr marL="0" indent="0">
               <a:lnSpc>
                 <a:spcPts val="5400"/>
               </a:lnSpc>
@@ -1935,7 +1683,7 @@
           <a:bodyPr wrap="square" rtlCol="0" anchor="ctr"/>
           <a:lstStyle/>
           <a:p>
-            <a:pPr indent="0" marL="0">
+            <a:pPr marL="0" indent="0">
               <a:buNone/>
             </a:pPr>
             <a:r>
@@ -1997,7 +1745,7 @@
           <a:bodyPr wrap="square" rtlCol="0" anchor="ctr"/>
           <a:lstStyle/>
           <a:p>
-            <a:pPr indent="0" marL="0">
+            <a:pPr marL="0" indent="0">
               <a:buNone/>
             </a:pPr>
             <a:r>
@@ -2011,9 +1759,6 @@
               </a:rPr>
               <a:t>Presented by  </a:t>
             </a:r>
-            <a:pPr indent="0" marL="0">
-              <a:buNone/>
-            </a:pPr>
             <a:r>
               <a:rPr lang="en-US" sz="1300" b="1" dirty="0">
                 <a:solidFill>
@@ -2025,9 +1770,6 @@
               </a:rPr>
               <a:t>Liyona Johny</a:t>
             </a:r>
-            <a:pPr indent="0" marL="0">
-              <a:buNone/>
-            </a:pPr>
             <a:r>
               <a:rPr lang="en-US" sz="1300" dirty="0">
                 <a:solidFill>
@@ -2064,7 +1806,7 @@
           <a:bodyPr wrap="square" rtlCol="0" anchor="ctr"/>
           <a:lstStyle/>
           <a:p>
-            <a:pPr indent="0" marL="0">
+            <a:pPr marL="0" indent="0">
               <a:buNone/>
             </a:pPr>
             <a:r>
@@ -2078,9 +1820,6 @@
               </a:rPr>
               <a:t>Guide  </a:t>
             </a:r>
-            <a:pPr indent="0" marL="0">
-              <a:buNone/>
-            </a:pPr>
             <a:r>
               <a:rPr lang="en-US" sz="1300" b="1" dirty="0">
                 <a:solidFill>
@@ -2092,9 +1831,6 @@
               </a:rPr>
               <a:t>Jisha Soman</a:t>
             </a:r>
-            <a:pPr indent="0" marL="0">
-              <a:buNone/>
-            </a:pPr>
             <a:r>
               <a:rPr lang="en-US" sz="1300" dirty="0">
                 <a:solidFill>
@@ -2107,45 +1843,6 @@
               <a:t>, Dept. of Computer Applications</a:t>
             </a:r>
             <a:endParaRPr lang="en-US" sz="1300" dirty="0"/>
-          </a:p>
-        </p:txBody>
-      </p:sp>
-      <p:sp>
-        <p:nvSpPr>
-          <p:cNvPr id="13" name="Text 10"/>
-          <p:cNvSpPr/>
-          <p:nvPr/>
-        </p:nvSpPr>
-        <p:spPr>
-          <a:xfrm>
-            <a:off x="822960" y="5852160"/>
-            <a:ext cx="9144000" cy="274320"/>
-          </a:xfrm>
-          <a:prstGeom prst="rect">
-            <a:avLst/>
-          </a:prstGeom>
-          <a:noFill/>
-          <a:ln/>
-        </p:spPr>
-        <p:txBody>
-          <a:bodyPr wrap="square" rtlCol="0" anchor="ctr"/>
-          <a:lstStyle/>
-          <a:p>
-            <a:pPr indent="0" marL="0">
-              <a:buNone/>
-            </a:pPr>
-            <a:r>
-              <a:rPr lang="en-US" sz="1200" dirty="0">
-                <a:solidFill>
-                  <a:srgbClr val="6E85A0"/>
-                </a:solidFill>
-                <a:latin typeface="Calibri" pitchFamily="34" charset="0"/>
-                <a:ea typeface="Calibri" pitchFamily="34" charset="-122"/>
-                <a:cs typeface="Calibri" pitchFamily="34" charset="-120"/>
-              </a:rPr>
-              <a:t>S.H. College (MCA Programme) · Mahatma Gandhi University</a:t>
-            </a:r>
-            <a:endParaRPr lang="en-US" sz="1200" dirty="0"/>
           </a:p>
         </p:txBody>
       </p:sp>
@@ -2197,7 +1894,7 @@
           <a:bodyPr wrap="square" rtlCol="0" anchor="ctr"/>
           <a:lstStyle/>
           <a:p>
-            <a:pPr algn="ctr" indent="0" marL="0">
+            <a:pPr marL="0" indent="0" algn="ctr">
               <a:buNone/>
             </a:pPr>
             <a:r>
@@ -2263,7 +1960,7 @@
           <a:bodyPr wrap="square" rtlCol="0" anchor="ctr"/>
           <a:lstStyle/>
           <a:p>
-            <a:pPr algn="ctr" indent="0" marL="0">
+            <a:pPr marL="0" indent="0" algn="ctr">
               <a:buNone/>
             </a:pPr>
             <a:r>
@@ -2329,7 +2026,7 @@
           <a:bodyPr wrap="square" rtlCol="0" anchor="ctr"/>
           <a:lstStyle/>
           <a:p>
-            <a:pPr algn="ctr" indent="0" marL="0">
+            <a:pPr marL="0" indent="0" algn="ctr">
               <a:buNone/>
             </a:pPr>
             <a:r>
@@ -2395,7 +2092,7 @@
           <a:bodyPr wrap="square" rtlCol="0" anchor="ctr"/>
           <a:lstStyle/>
           <a:p>
-            <a:pPr algn="ctr" indent="0" marL="0">
+            <a:pPr marL="0" indent="0" algn="ctr">
               <a:buNone/>
             </a:pPr>
             <a:r>
@@ -2429,6 +2126,7 @@
         <a:solidFill>
           <a:srgbClr val="0F2A43"/>
         </a:solidFill>
+        <a:effectLst/>
       </p:bgPr>
     </p:bg>
     <p:spTree>
@@ -2506,11 +2204,11 @@
           <a:bodyPr wrap="square" rtlCol="0" anchor="ctr"/>
           <a:lstStyle/>
           <a:p>
-            <a:pPr indent="0" marL="0">
-              <a:buNone/>
-            </a:pPr>
-            <a:r>
-              <a:rPr lang="en-US" sz="1200" b="1" spc="200" kern="0" dirty="0">
+            <a:pPr marL="0" indent="0">
+              <a:buNone/>
+            </a:pPr>
+            <a:r>
+              <a:rPr lang="en-US" sz="1200" b="1" kern="0" spc="200" dirty="0">
                 <a:solidFill>
                   <a:srgbClr val="F3AF24"/>
                 </a:solidFill>
@@ -2545,7 +2243,7 @@
           <a:bodyPr wrap="square" rtlCol="0" anchor="ctr"/>
           <a:lstStyle/>
           <a:p>
-            <a:pPr indent="0" marL="0">
+            <a:pPr marL="0" indent="0">
               <a:buNone/>
             </a:pPr>
             <a:r>
@@ -2584,11 +2282,11 @@
           <a:bodyPr wrap="square" rtlCol="0" anchor="ctr"/>
           <a:lstStyle/>
           <a:p>
-            <a:pPr indent="0" marL="0">
-              <a:buNone/>
-            </a:pPr>
-            <a:r>
-              <a:rPr lang="en-US" sz="1250" b="1" spc="200" kern="0" dirty="0">
+            <a:pPr marL="0" indent="0">
+              <a:buNone/>
+            </a:pPr>
+            <a:r>
+              <a:rPr lang="en-US" sz="1250" b="1" kern="0" spc="200" dirty="0">
                 <a:solidFill>
                   <a:srgbClr val="F3AF24"/>
                 </a:solidFill>
@@ -2624,257 +2322,7 @@
       </p:sp>
       <p:pic>
         <p:nvPicPr>
-          <p:cNvPr id="8" name="Image 0" descr="C:\Users\liyon\AppData\Local\Temp\claude\C--Users-liyon-Personal-MCA-PROJECT-drug-project--2--drug-project-drugrecomendation\9da8fb70-ea4c-4cf2-953c-5bcd9131f7d4\scratchpad\pptgen\icons\check.png">    </p:cNvPr>
-          <p:cNvPicPr>
-            <a:picLocks noChangeAspect="1"/>
-          </p:cNvPicPr>
-          <p:nvPr/>
-        </p:nvPicPr>
-        <p:blipFill>
-          <a:blip r:embed="rId1"/>
-          <a:stretch>
-            <a:fillRect/>
-          </a:stretch>
-        </p:blipFill>
-        <p:spPr>
-          <a:xfrm>
-            <a:off x="705460" y="2214220"/>
-            <a:ext cx="372161" cy="372161"/>
-          </a:xfrm>
-          <a:prstGeom prst="rect">
-            <a:avLst/>
-          </a:prstGeom>
-        </p:spPr>
-      </p:pic>
-      <p:sp>
-        <p:nvSpPr>
-          <p:cNvPr id="9" name="Text 6"/>
-          <p:cNvSpPr/>
-          <p:nvPr/>
-        </p:nvSpPr>
-        <p:spPr>
-          <a:xfrm>
-            <a:off x="1280160" y="2130552"/>
-            <a:ext cx="4389120" cy="274320"/>
-          </a:xfrm>
-          <a:prstGeom prst="rect">
-            <a:avLst/>
-          </a:prstGeom>
-          <a:noFill/>
-          <a:ln/>
-        </p:spPr>
-        <p:txBody>
-          <a:bodyPr wrap="square" rtlCol="0" anchor="ctr"/>
-          <a:lstStyle/>
-          <a:p>
-            <a:pPr indent="0" marL="0">
-              <a:buNone/>
-            </a:pPr>
-            <a:r>
-              <a:rPr lang="en-US" sz="1300" b="1" dirty="0">
-                <a:solidFill>
-                  <a:srgbClr val="FFFFFF"/>
-                </a:solidFill>
-                <a:latin typeface="Calibri" pitchFamily="34" charset="0"/>
-                <a:ea typeface="Calibri" pitchFamily="34" charset="-122"/>
-                <a:cs typeface="Calibri" pitchFamily="34" charset="-120"/>
-              </a:rPr>
-              <a:t>Unit Testing</a:t>
-            </a:r>
-            <a:endParaRPr lang="en-US" sz="1300" dirty="0"/>
-          </a:p>
-        </p:txBody>
-      </p:sp>
-      <p:sp>
-        <p:nvSpPr>
-          <p:cNvPr id="10" name="Text 7"/>
-          <p:cNvSpPr/>
-          <p:nvPr/>
-        </p:nvSpPr>
-        <p:spPr>
-          <a:xfrm>
-            <a:off x="1280160" y="2395728"/>
-            <a:ext cx="4480560" cy="365760"/>
-          </a:xfrm>
-          <a:prstGeom prst="rect">
-            <a:avLst/>
-          </a:prstGeom>
-          <a:noFill/>
-          <a:ln/>
-        </p:spPr>
-        <p:txBody>
-          <a:bodyPr wrap="square" rtlCol="0" anchor="ctr"/>
-          <a:lstStyle/>
-          <a:p>
-            <a:pPr indent="0" marL="0">
-              <a:lnSpc>
-                <a:spcPts val="1300"/>
-              </a:lnSpc>
-              <a:buNone/>
-            </a:pPr>
-            <a:r>
-              <a:rPr lang="en-US" sz="1050" dirty="0">
-                <a:solidFill>
-                  <a:srgbClr val="9FB3C8"/>
-                </a:solidFill>
-                <a:latin typeface="Calibri" pitchFamily="34" charset="0"/>
-                <a:ea typeface="Calibri" pitchFamily="34" charset="-122"/>
-                <a:cs typeface="Calibri" pitchFamily="34" charset="-120"/>
-              </a:rPr>
-              <a:t>Each view tested in isolation during coding</a:t>
-            </a:r>
-            <a:endParaRPr lang="en-US" sz="1050" dirty="0"/>
-          </a:p>
-        </p:txBody>
-      </p:sp>
-      <p:sp>
-        <p:nvSpPr>
-          <p:cNvPr id="11" name="Shape 8"/>
-          <p:cNvSpPr/>
-          <p:nvPr/>
-        </p:nvSpPr>
-        <p:spPr>
-          <a:xfrm>
-            <a:off x="640080" y="2926080"/>
-            <a:ext cx="502920" cy="502920"/>
-          </a:xfrm>
-          <a:prstGeom prst="ellipse">
-            <a:avLst/>
-          </a:prstGeom>
-          <a:solidFill>
-            <a:srgbClr val="16324C"/>
-          </a:solidFill>
-          <a:ln/>
-        </p:spPr>
-      </p:sp>
-      <p:pic>
-        <p:nvPicPr>
-          <p:cNvPr id="12" name="Image 1" descr="C:\Users\liyon\AppData\Local\Temp\claude\C--Users-liyon-Personal-MCA-PROJECT-drug-project--2--drug-project-drugrecomendation\9da8fb70-ea4c-4cf2-953c-5bcd9131f7d4\scratchpad\pptgen\icons\exchange.png">    </p:cNvPr>
-          <p:cNvPicPr>
-            <a:picLocks noChangeAspect="1"/>
-          </p:cNvPicPr>
-          <p:nvPr/>
-        </p:nvPicPr>
-        <p:blipFill>
-          <a:blip r:embed="rId2"/>
-          <a:stretch>
-            <a:fillRect/>
-          </a:stretch>
-        </p:blipFill>
-        <p:spPr>
-          <a:xfrm>
-            <a:off x="705460" y="2991460"/>
-            <a:ext cx="372161" cy="372161"/>
-          </a:xfrm>
-          <a:prstGeom prst="rect">
-            <a:avLst/>
-          </a:prstGeom>
-        </p:spPr>
-      </p:pic>
-      <p:sp>
-        <p:nvSpPr>
-          <p:cNvPr id="13" name="Text 9"/>
-          <p:cNvSpPr/>
-          <p:nvPr/>
-        </p:nvSpPr>
-        <p:spPr>
-          <a:xfrm>
-            <a:off x="1280160" y="2907792"/>
-            <a:ext cx="4389120" cy="274320"/>
-          </a:xfrm>
-          <a:prstGeom prst="rect">
-            <a:avLst/>
-          </a:prstGeom>
-          <a:noFill/>
-          <a:ln/>
-        </p:spPr>
-        <p:txBody>
-          <a:bodyPr wrap="square" rtlCol="0" anchor="ctr"/>
-          <a:lstStyle/>
-          <a:p>
-            <a:pPr indent="0" marL="0">
-              <a:buNone/>
-            </a:pPr>
-            <a:r>
-              <a:rPr lang="en-US" sz="1300" b="1" dirty="0">
-                <a:solidFill>
-                  <a:srgbClr val="FFFFFF"/>
-                </a:solidFill>
-                <a:latin typeface="Calibri" pitchFamily="34" charset="0"/>
-                <a:ea typeface="Calibri" pitchFamily="34" charset="-122"/>
-                <a:cs typeface="Calibri" pitchFamily="34" charset="-120"/>
-              </a:rPr>
-              <a:t>Integration Testing</a:t>
-            </a:r>
-            <a:endParaRPr lang="en-US" sz="1300" dirty="0"/>
-          </a:p>
-        </p:txBody>
-      </p:sp>
-      <p:sp>
-        <p:nvSpPr>
-          <p:cNvPr id="14" name="Text 10"/>
-          <p:cNvSpPr/>
-          <p:nvPr/>
-        </p:nvSpPr>
-        <p:spPr>
-          <a:xfrm>
-            <a:off x="1280160" y="3172968"/>
-            <a:ext cx="4480560" cy="365760"/>
-          </a:xfrm>
-          <a:prstGeom prst="rect">
-            <a:avLst/>
-          </a:prstGeom>
-          <a:noFill/>
-          <a:ln/>
-        </p:spPr>
-        <p:txBody>
-          <a:bodyPr wrap="square" rtlCol="0" anchor="ctr"/>
-          <a:lstStyle/>
-          <a:p>
-            <a:pPr indent="0" marL="0">
-              <a:lnSpc>
-                <a:spcPts val="1300"/>
-              </a:lnSpc>
-              <a:buNone/>
-            </a:pPr>
-            <a:r>
-              <a:rPr lang="en-US" sz="1050" dirty="0">
-                <a:solidFill>
-                  <a:srgbClr val="9FB3C8"/>
-                </a:solidFill>
-                <a:latin typeface="Calibri" pitchFamily="34" charset="0"/>
-                <a:ea typeface="Calibri" pitchFamily="34" charset="-122"/>
-                <a:cs typeface="Calibri" pitchFamily="34" charset="-120"/>
-              </a:rPr>
-              <a:t>User, admin, company &amp; doctor modules combined</a:t>
-            </a:r>
-            <a:endParaRPr lang="en-US" sz="1050" dirty="0"/>
-          </a:p>
-        </p:txBody>
-      </p:sp>
-      <p:sp>
-        <p:nvSpPr>
-          <p:cNvPr id="15" name="Shape 11"/>
-          <p:cNvSpPr/>
-          <p:nvPr/>
-        </p:nvSpPr>
-        <p:spPr>
-          <a:xfrm>
-            <a:off x="640080" y="3703320"/>
-            <a:ext cx="502920" cy="502920"/>
-          </a:xfrm>
-          <a:prstGeom prst="ellipse">
-            <a:avLst/>
-          </a:prstGeom>
-          <a:solidFill>
-            <a:srgbClr val="16324C"/>
-          </a:solidFill>
-          <a:ln/>
-        </p:spPr>
-      </p:sp>
-      <p:pic>
-        <p:nvPicPr>
-          <p:cNvPr id="16" name="Image 2" descr="C:\Users\liyon\AppData\Local\Temp\claude\C--Users-liyon-Personal-MCA-PROJECT-drug-project--2--drug-project-drugrecomendation\9da8fb70-ea4c-4cf2-953c-5bcd9131f7d4\scratchpad\pptgen\icons\shieldAlt.png">    </p:cNvPr>
+          <p:cNvPr id="8" name="Image 0" descr="C:\Users\liyon\AppData\Local\Temp\claude\C--Users-liyon-Personal-MCA-PROJECT-drug-project--2--drug-project-drugrecomendation\9da8fb70-ea4c-4cf2-953c-5bcd9131f7d4\scratchpad\pptgen\icons\check.png"/>
           <p:cNvPicPr>
             <a:picLocks noChangeAspect="1"/>
           </p:cNvPicPr>
@@ -2888,7 +2336,7 @@
         </p:blipFill>
         <p:spPr>
           <a:xfrm>
-            <a:off x="705460" y="3768700"/>
+            <a:off x="705460" y="2214220"/>
             <a:ext cx="372161" cy="372161"/>
           </a:xfrm>
           <a:prstGeom prst="rect">
@@ -2898,13 +2346,13 @@
       </p:pic>
       <p:sp>
         <p:nvSpPr>
-          <p:cNvPr id="17" name="Text 12"/>
-          <p:cNvSpPr/>
-          <p:nvPr/>
-        </p:nvSpPr>
-        <p:spPr>
-          <a:xfrm>
-            <a:off x="1280160" y="3685032"/>
+          <p:cNvPr id="9" name="Text 6"/>
+          <p:cNvSpPr/>
+          <p:nvPr/>
+        </p:nvSpPr>
+        <p:spPr>
+          <a:xfrm>
+            <a:off x="1280160" y="2130552"/>
             <a:ext cx="4389120" cy="274320"/>
           </a:xfrm>
           <a:prstGeom prst="rect">
@@ -2917,7 +2365,7 @@
           <a:bodyPr wrap="square" rtlCol="0" anchor="ctr"/>
           <a:lstStyle/>
           <a:p>
-            <a:pPr indent="0" marL="0">
+            <a:pPr marL="0" indent="0">
               <a:buNone/>
             </a:pPr>
             <a:r>
@@ -2929,7 +2377,7 @@
                 <a:ea typeface="Calibri" pitchFamily="34" charset="-122"/>
                 <a:cs typeface="Calibri" pitchFamily="34" charset="-120"/>
               </a:rPr>
-              <a:t>Security &amp; Recovery</a:t>
+              <a:t>Unit Testing</a:t>
             </a:r>
             <a:endParaRPr lang="en-US" sz="1300" dirty="0"/>
           </a:p>
@@ -2937,13 +2385,13 @@
       </p:sp>
       <p:sp>
         <p:nvSpPr>
-          <p:cNvPr id="18" name="Text 13"/>
-          <p:cNvSpPr/>
-          <p:nvPr/>
-        </p:nvSpPr>
-        <p:spPr>
-          <a:xfrm>
-            <a:off x="1280160" y="3950208"/>
+          <p:cNvPr id="10" name="Text 7"/>
+          <p:cNvSpPr/>
+          <p:nvPr/>
+        </p:nvSpPr>
+        <p:spPr>
+          <a:xfrm>
+            <a:off x="1280160" y="2395728"/>
             <a:ext cx="4480560" cy="365760"/>
           </a:xfrm>
           <a:prstGeom prst="rect">
@@ -2956,7 +2404,7 @@
           <a:bodyPr wrap="square" rtlCol="0" anchor="ctr"/>
           <a:lstStyle/>
           <a:p>
-            <a:pPr indent="0" marL="0">
+            <a:pPr marL="0" indent="0">
               <a:lnSpc>
                 <a:spcPts val="1300"/>
               </a:lnSpc>
@@ -2971,7 +2419,7 @@
                 <a:ea typeface="Calibri" pitchFamily="34" charset="-122"/>
                 <a:cs typeface="Calibri" pitchFamily="34" charset="-120"/>
               </a:rPr>
-              <a:t>Login, session and failure-recovery checks</a:t>
+              <a:t>Each view tested in isolation during coding</a:t>
             </a:r>
             <a:endParaRPr lang="en-US" sz="1050" dirty="0"/>
           </a:p>
@@ -2979,52 +2427,13 @@
       </p:sp>
       <p:sp>
         <p:nvSpPr>
-          <p:cNvPr id="19" name="Text 14"/>
-          <p:cNvSpPr/>
-          <p:nvPr/>
-        </p:nvSpPr>
-        <p:spPr>
-          <a:xfrm>
-            <a:off x="6263640" y="1691640"/>
-            <a:ext cx="5120640" cy="320040"/>
-          </a:xfrm>
-          <a:prstGeom prst="rect">
-            <a:avLst/>
-          </a:prstGeom>
-          <a:noFill/>
-          <a:ln/>
-        </p:spPr>
-        <p:txBody>
-          <a:bodyPr wrap="square" rtlCol="0" anchor="ctr"/>
-          <a:lstStyle/>
-          <a:p>
-            <a:pPr indent="0" marL="0">
-              <a:buNone/>
-            </a:pPr>
-            <a:r>
-              <a:rPr lang="en-US" sz="1250" b="1" spc="200" kern="0" dirty="0">
-                <a:solidFill>
-                  <a:srgbClr val="F3AF24"/>
-                </a:solidFill>
-                <a:latin typeface="Calibri" pitchFamily="34" charset="0"/>
-                <a:ea typeface="Calibri" pitchFamily="34" charset="-122"/>
-                <a:cs typeface="Calibri" pitchFamily="34" charset="-120"/>
-              </a:rPr>
-              <a:t>FUTURE ENHANCEMENTS</a:t>
-            </a:r>
-            <a:endParaRPr lang="en-US" sz="1250" dirty="0"/>
-          </a:p>
-        </p:txBody>
-      </p:sp>
-      <p:sp>
-        <p:nvSpPr>
-          <p:cNvPr id="20" name="Shape 15"/>
-          <p:cNvSpPr/>
-          <p:nvPr/>
-        </p:nvSpPr>
-        <p:spPr>
-          <a:xfrm>
-            <a:off x="6263640" y="2148840"/>
+          <p:cNvPr id="11" name="Shape 8"/>
+          <p:cNvSpPr/>
+          <p:nvPr/>
+        </p:nvSpPr>
+        <p:spPr>
+          <a:xfrm>
+            <a:off x="640080" y="2926080"/>
             <a:ext cx="502920" cy="502920"/>
           </a:xfrm>
           <a:prstGeom prst="ellipse">
@@ -3038,7 +2447,7 @@
       </p:sp>
       <p:pic>
         <p:nvPicPr>
-          <p:cNvPr id="21" name="Image 3" descr="C:\Users\liyon\AppData\Local\Temp\claude\C--Users-liyon-Personal-MCA-PROJECT-drug-project--2--drug-project-drugrecomendation\9da8fb70-ea4c-4cf2-953c-5bcd9131f7d4\scratchpad\pptgen\icons\ai.png">    </p:cNvPr>
+          <p:cNvPr id="12" name="Image 1" descr="C:\Users\liyon\AppData\Local\Temp\claude\C--Users-liyon-Personal-MCA-PROJECT-drug-project--2--drug-project-drugrecomendation\9da8fb70-ea4c-4cf2-953c-5bcd9131f7d4\scratchpad\pptgen\icons\exchange.png"/>
           <p:cNvPicPr>
             <a:picLocks noChangeAspect="1"/>
           </p:cNvPicPr>
@@ -3052,7 +2461,7 @@
         </p:blipFill>
         <p:spPr>
           <a:xfrm>
-            <a:off x="6329020" y="2214220"/>
+            <a:off x="705460" y="2991460"/>
             <a:ext cx="372161" cy="372161"/>
           </a:xfrm>
           <a:prstGeom prst="rect">
@@ -3062,13 +2471,13 @@
       </p:pic>
       <p:sp>
         <p:nvSpPr>
-          <p:cNvPr id="22" name="Text 16"/>
-          <p:cNvSpPr/>
-          <p:nvPr/>
-        </p:nvSpPr>
-        <p:spPr>
-          <a:xfrm>
-            <a:off x="6903720" y="2130552"/>
+          <p:cNvPr id="13" name="Text 9"/>
+          <p:cNvSpPr/>
+          <p:nvPr/>
+        </p:nvSpPr>
+        <p:spPr>
+          <a:xfrm>
+            <a:off x="1280160" y="2907792"/>
             <a:ext cx="4389120" cy="274320"/>
           </a:xfrm>
           <a:prstGeom prst="rect">
@@ -3081,7 +2490,7 @@
           <a:bodyPr wrap="square" rtlCol="0" anchor="ctr"/>
           <a:lstStyle/>
           <a:p>
-            <a:pPr indent="0" marL="0">
+            <a:pPr marL="0" indent="0">
               <a:buNone/>
             </a:pPr>
             <a:r>
@@ -3093,7 +2502,7 @@
                 <a:ea typeface="Calibri" pitchFamily="34" charset="-122"/>
                 <a:cs typeface="Calibri" pitchFamily="34" charset="-120"/>
               </a:rPr>
-              <a:t>Deeper ML Personalisation</a:t>
+              <a:t>Integration Testing</a:t>
             </a:r>
             <a:endParaRPr lang="en-US" sz="1300" dirty="0"/>
           </a:p>
@@ -3101,13 +2510,13 @@
       </p:sp>
       <p:sp>
         <p:nvSpPr>
-          <p:cNvPr id="23" name="Text 17"/>
-          <p:cNvSpPr/>
-          <p:nvPr/>
-        </p:nvSpPr>
-        <p:spPr>
-          <a:xfrm>
-            <a:off x="6903720" y="2395728"/>
+          <p:cNvPr id="14" name="Text 10"/>
+          <p:cNvSpPr/>
+          <p:nvPr/>
+        </p:nvSpPr>
+        <p:spPr>
+          <a:xfrm>
+            <a:off x="1280160" y="3172968"/>
             <a:ext cx="4480560" cy="365760"/>
           </a:xfrm>
           <a:prstGeom prst="rect">
@@ -3120,7 +2529,7 @@
           <a:bodyPr wrap="square" rtlCol="0" anchor="ctr"/>
           <a:lstStyle/>
           <a:p>
-            <a:pPr indent="0" marL="0">
+            <a:pPr marL="0" indent="0">
               <a:lnSpc>
                 <a:spcPts val="1300"/>
               </a:lnSpc>
@@ -3135,7 +2544,7 @@
                 <a:ea typeface="Calibri" pitchFamily="34" charset="-122"/>
                 <a:cs typeface="Calibri" pitchFamily="34" charset="-120"/>
               </a:rPr>
-              <a:t>Learn individual patient preference over time</a:t>
+              <a:t>User, admin, company &amp; doctor modules combined</a:t>
             </a:r>
             <a:endParaRPr lang="en-US" sz="1050" dirty="0"/>
           </a:p>
@@ -3143,13 +2552,13 @@
       </p:sp>
       <p:sp>
         <p:nvSpPr>
-          <p:cNvPr id="24" name="Shape 18"/>
-          <p:cNvSpPr/>
-          <p:nvPr/>
-        </p:nvSpPr>
-        <p:spPr>
-          <a:xfrm>
-            <a:off x="6263640" y="2926080"/>
+          <p:cNvPr id="15" name="Shape 11"/>
+          <p:cNvSpPr/>
+          <p:nvPr/>
+        </p:nvSpPr>
+        <p:spPr>
+          <a:xfrm>
+            <a:off x="640080" y="3703320"/>
             <a:ext cx="502920" cy="502920"/>
           </a:xfrm>
           <a:prstGeom prst="ellipse">
@@ -3163,7 +2572,7 @@
       </p:sp>
       <p:pic>
         <p:nvPicPr>
-          <p:cNvPr id="25" name="Image 4" descr="C:\Users\liyon\AppData\Local\Temp\claude\C--Users-liyon-Personal-MCA-PROJECT-drug-project--2--drug-project-drugrecomendation\9da8fb70-ea4c-4cf2-953c-5bcd9131f7d4\scratchpad\pptgen\icons\chat.png">    </p:cNvPr>
+          <p:cNvPr id="16" name="Image 2" descr="C:\Users\liyon\AppData\Local\Temp\claude\C--Users-liyon-Personal-MCA-PROJECT-drug-project--2--drug-project-drugrecomendation\9da8fb70-ea4c-4cf2-953c-5bcd9131f7d4\scratchpad\pptgen\icons\shieldAlt.png"/>
           <p:cNvPicPr>
             <a:picLocks noChangeAspect="1"/>
           </p:cNvPicPr>
@@ -3177,7 +2586,7 @@
         </p:blipFill>
         <p:spPr>
           <a:xfrm>
-            <a:off x="6329020" y="2991460"/>
+            <a:off x="705460" y="3768700"/>
             <a:ext cx="372161" cy="372161"/>
           </a:xfrm>
           <a:prstGeom prst="rect">
@@ -3187,13 +2596,13 @@
       </p:pic>
       <p:sp>
         <p:nvSpPr>
-          <p:cNvPr id="26" name="Text 19"/>
-          <p:cNvSpPr/>
-          <p:nvPr/>
-        </p:nvSpPr>
-        <p:spPr>
-          <a:xfrm>
-            <a:off x="6903720" y="2907792"/>
+          <p:cNvPr id="17" name="Text 12"/>
+          <p:cNvSpPr/>
+          <p:nvPr/>
+        </p:nvSpPr>
+        <p:spPr>
+          <a:xfrm>
+            <a:off x="1280160" y="3685032"/>
             <a:ext cx="4389120" cy="274320"/>
           </a:xfrm>
           <a:prstGeom prst="rect">
@@ -3206,7 +2615,7 @@
           <a:bodyPr wrap="square" rtlCol="0" anchor="ctr"/>
           <a:lstStyle/>
           <a:p>
-            <a:pPr indent="0" marL="0">
+            <a:pPr marL="0" indent="0">
               <a:buNone/>
             </a:pPr>
             <a:r>
@@ -3218,7 +2627,7 @@
                 <a:ea typeface="Calibri" pitchFamily="34" charset="-122"/>
                 <a:cs typeface="Calibri" pitchFamily="34" charset="-120"/>
               </a:rPr>
-              <a:t>NLP-Powered Chatbot</a:t>
+              <a:t>Security &amp; Recovery</a:t>
             </a:r>
             <a:endParaRPr lang="en-US" sz="1300" dirty="0"/>
           </a:p>
@@ -3226,13 +2635,13 @@
       </p:sp>
       <p:sp>
         <p:nvSpPr>
-          <p:cNvPr id="27" name="Text 20"/>
-          <p:cNvSpPr/>
-          <p:nvPr/>
-        </p:nvSpPr>
-        <p:spPr>
-          <a:xfrm>
-            <a:off x="6903720" y="3172968"/>
+          <p:cNvPr id="18" name="Text 13"/>
+          <p:cNvSpPr/>
+          <p:nvPr/>
+        </p:nvSpPr>
+        <p:spPr>
+          <a:xfrm>
+            <a:off x="1280160" y="3950208"/>
             <a:ext cx="4480560" cy="365760"/>
           </a:xfrm>
           <a:prstGeom prst="rect">
@@ -3245,7 +2654,7 @@
           <a:bodyPr wrap="square" rtlCol="0" anchor="ctr"/>
           <a:lstStyle/>
           <a:p>
-            <a:pPr indent="0" marL="0">
+            <a:pPr marL="0" indent="0">
               <a:lnSpc>
                 <a:spcPts val="1300"/>
               </a:lnSpc>
@@ -3260,7 +2669,7 @@
                 <a:ea typeface="Calibri" pitchFamily="34" charset="-122"/>
                 <a:cs typeface="Calibri" pitchFamily="34" charset="-120"/>
               </a:rPr>
-              <a:t>Instant automated support alongside live doctors</a:t>
+              <a:t>Login, session and failure-recovery checks</a:t>
             </a:r>
             <a:endParaRPr lang="en-US" sz="1050" dirty="0"/>
           </a:p>
@@ -3268,13 +2677,52 @@
       </p:sp>
       <p:sp>
         <p:nvSpPr>
-          <p:cNvPr id="28" name="Shape 21"/>
-          <p:cNvSpPr/>
-          <p:nvPr/>
-        </p:nvSpPr>
-        <p:spPr>
-          <a:xfrm>
-            <a:off x="6263640" y="3703320"/>
+          <p:cNvPr id="19" name="Text 14"/>
+          <p:cNvSpPr/>
+          <p:nvPr/>
+        </p:nvSpPr>
+        <p:spPr>
+          <a:xfrm>
+            <a:off x="6263640" y="1691640"/>
+            <a:ext cx="5120640" cy="320040"/>
+          </a:xfrm>
+          <a:prstGeom prst="rect">
+            <a:avLst/>
+          </a:prstGeom>
+          <a:noFill/>
+          <a:ln/>
+        </p:spPr>
+        <p:txBody>
+          <a:bodyPr wrap="square" rtlCol="0" anchor="ctr"/>
+          <a:lstStyle/>
+          <a:p>
+            <a:pPr marL="0" indent="0">
+              <a:buNone/>
+            </a:pPr>
+            <a:r>
+              <a:rPr lang="en-US" sz="1250" b="1" kern="0" spc="200" dirty="0">
+                <a:solidFill>
+                  <a:srgbClr val="F3AF24"/>
+                </a:solidFill>
+                <a:latin typeface="Calibri" pitchFamily="34" charset="0"/>
+                <a:ea typeface="Calibri" pitchFamily="34" charset="-122"/>
+                <a:cs typeface="Calibri" pitchFamily="34" charset="-120"/>
+              </a:rPr>
+              <a:t>FUTURE ENHANCEMENTS</a:t>
+            </a:r>
+            <a:endParaRPr lang="en-US" sz="1250" dirty="0"/>
+          </a:p>
+        </p:txBody>
+      </p:sp>
+      <p:sp>
+        <p:nvSpPr>
+          <p:cNvPr id="20" name="Shape 15"/>
+          <p:cNvSpPr/>
+          <p:nvPr/>
+        </p:nvSpPr>
+        <p:spPr>
+          <a:xfrm>
+            <a:off x="6263640" y="2148840"/>
             <a:ext cx="502920" cy="502920"/>
           </a:xfrm>
           <a:prstGeom prst="ellipse">
@@ -3288,7 +2736,7 @@
       </p:sp>
       <p:pic>
         <p:nvPicPr>
-          <p:cNvPr id="29" name="Image 5" descr="C:\Users\liyon\AppData\Local\Temp\claude\C--Users-liyon-Personal-MCA-PROJECT-drug-project--2--drug-project-drugrecomendation\9da8fb70-ea4c-4cf2-953c-5bcd9131f7d4\scratchpad\pptgen\icons\rocket.png">    </p:cNvPr>
+          <p:cNvPr id="21" name="Image 3" descr="C:\Users\liyon\AppData\Local\Temp\claude\C--Users-liyon-Personal-MCA-PROJECT-drug-project--2--drug-project-drugrecomendation\9da8fb70-ea4c-4cf2-953c-5bcd9131f7d4\scratchpad\pptgen\icons\ai.png"/>
           <p:cNvPicPr>
             <a:picLocks noChangeAspect="1"/>
           </p:cNvPicPr>
@@ -3302,6 +2750,256 @@
         </p:blipFill>
         <p:spPr>
           <a:xfrm>
+            <a:off x="6329020" y="2214220"/>
+            <a:ext cx="372161" cy="372161"/>
+          </a:xfrm>
+          <a:prstGeom prst="rect">
+            <a:avLst/>
+          </a:prstGeom>
+        </p:spPr>
+      </p:pic>
+      <p:sp>
+        <p:nvSpPr>
+          <p:cNvPr id="22" name="Text 16"/>
+          <p:cNvSpPr/>
+          <p:nvPr/>
+        </p:nvSpPr>
+        <p:spPr>
+          <a:xfrm>
+            <a:off x="6903720" y="2130552"/>
+            <a:ext cx="4389120" cy="274320"/>
+          </a:xfrm>
+          <a:prstGeom prst="rect">
+            <a:avLst/>
+          </a:prstGeom>
+          <a:noFill/>
+          <a:ln/>
+        </p:spPr>
+        <p:txBody>
+          <a:bodyPr wrap="square" rtlCol="0" anchor="ctr"/>
+          <a:lstStyle/>
+          <a:p>
+            <a:pPr marL="0" indent="0">
+              <a:buNone/>
+            </a:pPr>
+            <a:r>
+              <a:rPr lang="en-US" sz="1300" b="1" dirty="0">
+                <a:solidFill>
+                  <a:srgbClr val="FFFFFF"/>
+                </a:solidFill>
+                <a:latin typeface="Calibri" pitchFamily="34" charset="0"/>
+                <a:ea typeface="Calibri" pitchFamily="34" charset="-122"/>
+                <a:cs typeface="Calibri" pitchFamily="34" charset="-120"/>
+              </a:rPr>
+              <a:t>Deeper ML Personalisation</a:t>
+            </a:r>
+            <a:endParaRPr lang="en-US" sz="1300" dirty="0"/>
+          </a:p>
+        </p:txBody>
+      </p:sp>
+      <p:sp>
+        <p:nvSpPr>
+          <p:cNvPr id="23" name="Text 17"/>
+          <p:cNvSpPr/>
+          <p:nvPr/>
+        </p:nvSpPr>
+        <p:spPr>
+          <a:xfrm>
+            <a:off x="6903720" y="2395728"/>
+            <a:ext cx="4480560" cy="365760"/>
+          </a:xfrm>
+          <a:prstGeom prst="rect">
+            <a:avLst/>
+          </a:prstGeom>
+          <a:noFill/>
+          <a:ln/>
+        </p:spPr>
+        <p:txBody>
+          <a:bodyPr wrap="square" rtlCol="0" anchor="ctr"/>
+          <a:lstStyle/>
+          <a:p>
+            <a:pPr marL="0" indent="0">
+              <a:lnSpc>
+                <a:spcPts val="1300"/>
+              </a:lnSpc>
+              <a:buNone/>
+            </a:pPr>
+            <a:r>
+              <a:rPr lang="en-US" sz="1050" dirty="0">
+                <a:solidFill>
+                  <a:srgbClr val="9FB3C8"/>
+                </a:solidFill>
+                <a:latin typeface="Calibri" pitchFamily="34" charset="0"/>
+                <a:ea typeface="Calibri" pitchFamily="34" charset="-122"/>
+                <a:cs typeface="Calibri" pitchFamily="34" charset="-120"/>
+              </a:rPr>
+              <a:t>Learn individual patient preference over time</a:t>
+            </a:r>
+            <a:endParaRPr lang="en-US" sz="1050" dirty="0"/>
+          </a:p>
+        </p:txBody>
+      </p:sp>
+      <p:sp>
+        <p:nvSpPr>
+          <p:cNvPr id="24" name="Shape 18"/>
+          <p:cNvSpPr/>
+          <p:nvPr/>
+        </p:nvSpPr>
+        <p:spPr>
+          <a:xfrm>
+            <a:off x="6263640" y="2926080"/>
+            <a:ext cx="502920" cy="502920"/>
+          </a:xfrm>
+          <a:prstGeom prst="ellipse">
+            <a:avLst/>
+          </a:prstGeom>
+          <a:solidFill>
+            <a:srgbClr val="16324C"/>
+          </a:solidFill>
+          <a:ln/>
+        </p:spPr>
+      </p:sp>
+      <p:pic>
+        <p:nvPicPr>
+          <p:cNvPr id="25" name="Image 4" descr="C:\Users\liyon\AppData\Local\Temp\claude\C--Users-liyon-Personal-MCA-PROJECT-drug-project--2--drug-project-drugrecomendation\9da8fb70-ea4c-4cf2-953c-5bcd9131f7d4\scratchpad\pptgen\icons\chat.png"/>
+          <p:cNvPicPr>
+            <a:picLocks noChangeAspect="1"/>
+          </p:cNvPicPr>
+          <p:nvPr/>
+        </p:nvPicPr>
+        <p:blipFill>
+          <a:blip r:embed="rId7"/>
+          <a:stretch>
+            <a:fillRect/>
+          </a:stretch>
+        </p:blipFill>
+        <p:spPr>
+          <a:xfrm>
+            <a:off x="6329020" y="2991460"/>
+            <a:ext cx="372161" cy="372161"/>
+          </a:xfrm>
+          <a:prstGeom prst="rect">
+            <a:avLst/>
+          </a:prstGeom>
+        </p:spPr>
+      </p:pic>
+      <p:sp>
+        <p:nvSpPr>
+          <p:cNvPr id="26" name="Text 19"/>
+          <p:cNvSpPr/>
+          <p:nvPr/>
+        </p:nvSpPr>
+        <p:spPr>
+          <a:xfrm>
+            <a:off x="6903720" y="2907792"/>
+            <a:ext cx="4389120" cy="274320"/>
+          </a:xfrm>
+          <a:prstGeom prst="rect">
+            <a:avLst/>
+          </a:prstGeom>
+          <a:noFill/>
+          <a:ln/>
+        </p:spPr>
+        <p:txBody>
+          <a:bodyPr wrap="square" rtlCol="0" anchor="ctr"/>
+          <a:lstStyle/>
+          <a:p>
+            <a:pPr marL="0" indent="0">
+              <a:buNone/>
+            </a:pPr>
+            <a:r>
+              <a:rPr lang="en-US" sz="1300" b="1" dirty="0">
+                <a:solidFill>
+                  <a:srgbClr val="FFFFFF"/>
+                </a:solidFill>
+                <a:latin typeface="Calibri" pitchFamily="34" charset="0"/>
+                <a:ea typeface="Calibri" pitchFamily="34" charset="-122"/>
+                <a:cs typeface="Calibri" pitchFamily="34" charset="-120"/>
+              </a:rPr>
+              <a:t>NLP-Powered Chatbot</a:t>
+            </a:r>
+            <a:endParaRPr lang="en-US" sz="1300" dirty="0"/>
+          </a:p>
+        </p:txBody>
+      </p:sp>
+      <p:sp>
+        <p:nvSpPr>
+          <p:cNvPr id="27" name="Text 20"/>
+          <p:cNvSpPr/>
+          <p:nvPr/>
+        </p:nvSpPr>
+        <p:spPr>
+          <a:xfrm>
+            <a:off x="6903720" y="3172968"/>
+            <a:ext cx="4480560" cy="365760"/>
+          </a:xfrm>
+          <a:prstGeom prst="rect">
+            <a:avLst/>
+          </a:prstGeom>
+          <a:noFill/>
+          <a:ln/>
+        </p:spPr>
+        <p:txBody>
+          <a:bodyPr wrap="square" rtlCol="0" anchor="ctr"/>
+          <a:lstStyle/>
+          <a:p>
+            <a:pPr marL="0" indent="0">
+              <a:lnSpc>
+                <a:spcPts val="1300"/>
+              </a:lnSpc>
+              <a:buNone/>
+            </a:pPr>
+            <a:r>
+              <a:rPr lang="en-US" sz="1050" dirty="0">
+                <a:solidFill>
+                  <a:srgbClr val="9FB3C8"/>
+                </a:solidFill>
+                <a:latin typeface="Calibri" pitchFamily="34" charset="0"/>
+                <a:ea typeface="Calibri" pitchFamily="34" charset="-122"/>
+                <a:cs typeface="Calibri" pitchFamily="34" charset="-120"/>
+              </a:rPr>
+              <a:t>Instant automated support alongside live doctors</a:t>
+            </a:r>
+            <a:endParaRPr lang="en-US" sz="1050" dirty="0"/>
+          </a:p>
+        </p:txBody>
+      </p:sp>
+      <p:sp>
+        <p:nvSpPr>
+          <p:cNvPr id="28" name="Shape 21"/>
+          <p:cNvSpPr/>
+          <p:nvPr/>
+        </p:nvSpPr>
+        <p:spPr>
+          <a:xfrm>
+            <a:off x="6263640" y="3703320"/>
+            <a:ext cx="502920" cy="502920"/>
+          </a:xfrm>
+          <a:prstGeom prst="ellipse">
+            <a:avLst/>
+          </a:prstGeom>
+          <a:solidFill>
+            <a:srgbClr val="16324C"/>
+          </a:solidFill>
+          <a:ln/>
+        </p:spPr>
+      </p:sp>
+      <p:pic>
+        <p:nvPicPr>
+          <p:cNvPr id="29" name="Image 5" descr="C:\Users\liyon\AppData\Local\Temp\claude\C--Users-liyon-Personal-MCA-PROJECT-drug-project--2--drug-project-drugrecomendation\9da8fb70-ea4c-4cf2-953c-5bcd9131f7d4\scratchpad\pptgen\icons\rocket.png"/>
+          <p:cNvPicPr>
+            <a:picLocks noChangeAspect="1"/>
+          </p:cNvPicPr>
+          <p:nvPr/>
+        </p:nvPicPr>
+        <p:blipFill>
+          <a:blip r:embed="rId8"/>
+          <a:stretch>
+            <a:fillRect/>
+          </a:stretch>
+        </p:blipFill>
+        <p:spPr>
+          <a:xfrm>
             <a:off x="6329020" y="3768700"/>
             <a:ext cx="372161" cy="372161"/>
           </a:xfrm>
@@ -3331,7 +3029,7 @@
           <a:bodyPr wrap="square" rtlCol="0" anchor="ctr"/>
           <a:lstStyle/>
           <a:p>
-            <a:pPr indent="0" marL="0">
+            <a:pPr marL="0" indent="0">
               <a:buNone/>
             </a:pPr>
             <a:r>
@@ -3370,7 +3068,7 @@
           <a:bodyPr wrap="square" rtlCol="0" anchor="ctr"/>
           <a:lstStyle/>
           <a:p>
-            <a:pPr indent="0" marL="0">
+            <a:pPr marL="0" indent="0">
               <a:lnSpc>
                 <a:spcPts val="1300"/>
               </a:lnSpc>
@@ -3435,7 +3133,7 @@
           <a:bodyPr wrap="square" rtlCol="0" anchor="ctr"/>
           <a:lstStyle/>
           <a:p>
-            <a:pPr indent="0" marL="0">
+            <a:pPr marL="0" indent="0">
               <a:lnSpc>
                 <a:spcPts val="1900"/>
               </a:lnSpc>
@@ -3477,7 +3175,7 @@
           <a:bodyPr wrap="square" rtlCol="0" anchor="ctr"/>
           <a:lstStyle/>
           <a:p>
-            <a:pPr indent="0" marL="0">
+            <a:pPr marL="0" indent="0">
               <a:buNone/>
             </a:pPr>
             <a:r>
@@ -3492,45 +3190,6 @@
               <a:t>Thank You</a:t>
             </a:r>
             <a:endParaRPr lang="en-US" sz="2400" dirty="0"/>
-          </a:p>
-        </p:txBody>
-      </p:sp>
-      <p:sp>
-        <p:nvSpPr>
-          <p:cNvPr id="35" name="Text 27"/>
-          <p:cNvSpPr/>
-          <p:nvPr/>
-        </p:nvSpPr>
-        <p:spPr>
-          <a:xfrm>
-            <a:off x="640080" y="6144768"/>
-            <a:ext cx="5486400" cy="320040"/>
-          </a:xfrm>
-          <a:prstGeom prst="rect">
-            <a:avLst/>
-          </a:prstGeom>
-          <a:noFill/>
-          <a:ln/>
-        </p:spPr>
-        <p:txBody>
-          <a:bodyPr wrap="square" rtlCol="0" anchor="ctr"/>
-          <a:lstStyle/>
-          <a:p>
-            <a:pPr indent="0" marL="0">
-              <a:buNone/>
-            </a:pPr>
-            <a:r>
-              <a:rPr lang="en-US" sz="1250" dirty="0">
-                <a:solidFill>
-                  <a:srgbClr val="9FB3C8"/>
-                </a:solidFill>
-                <a:latin typeface="Calibri" pitchFamily="34" charset="0"/>
-                <a:ea typeface="Calibri" pitchFamily="34" charset="-122"/>
-                <a:cs typeface="Calibri" pitchFamily="34" charset="-120"/>
-              </a:rPr>
-              <a:t>Questions &amp; Discussion</a:t>
-            </a:r>
-            <a:endParaRPr lang="en-US" sz="1250" dirty="0"/>
           </a:p>
         </p:txBody>
       </p:sp>
@@ -3580,11 +3239,11 @@
           <a:bodyPr wrap="square" rtlCol="0" anchor="ctr"/>
           <a:lstStyle/>
           <a:p>
-            <a:pPr indent="0" marL="0">
-              <a:buNone/>
-            </a:pPr>
-            <a:r>
-              <a:rPr lang="en-US" sz="1200" b="1" spc="200" kern="0" dirty="0">
+            <a:pPr marL="0" indent="0">
+              <a:buNone/>
+            </a:pPr>
+            <a:r>
+              <a:rPr lang="en-US" sz="1200" b="1" kern="0" spc="200" dirty="0">
                 <a:solidFill>
                   <a:srgbClr val="F44749"/>
                 </a:solidFill>
@@ -3619,7 +3278,7 @@
           <a:bodyPr wrap="square" rtlCol="0" anchor="ctr"/>
           <a:lstStyle/>
           <a:p>
-            <a:pPr indent="0" marL="0">
+            <a:pPr marL="0" indent="0">
               <a:buNone/>
             </a:pPr>
             <a:r>
@@ -3680,7 +3339,7 @@
           <a:bodyPr wrap="square" rtlCol="0" anchor="ctr"/>
           <a:lstStyle/>
           <a:p>
-            <a:pPr indent="0" marL="0">
+            <a:pPr marL="0" indent="0">
               <a:buNone/>
             </a:pPr>
             <a:r>
@@ -3719,7 +3378,7 @@
           <a:bodyPr wrap="square" rtlCol="0" anchor="ctr"/>
           <a:lstStyle/>
           <a:p>
-            <a:pPr indent="0" marL="0">
+            <a:pPr marL="0" indent="0">
               <a:lnSpc>
                 <a:spcPts val="1900"/>
               </a:lnSpc>
@@ -3784,7 +3443,7 @@
           <a:bodyPr wrap="square" rtlCol="0" anchor="ctr"/>
           <a:lstStyle/>
           <a:p>
-            <a:pPr indent="0" marL="0">
+            <a:pPr marL="0" indent="0">
               <a:lnSpc>
                 <a:spcPts val="1900"/>
               </a:lnSpc>
@@ -3827,257 +3486,7 @@
       </p:sp>
       <p:pic>
         <p:nvPicPr>
-          <p:cNvPr id="10" name="Image 0" descr="C:\Users\liyon\AppData\Local\Temp\claude\C--Users-liyon-Personal-MCA-PROJECT-drug-project--2--drug-project-drugrecomendation\9da8fb70-ea4c-4cf2-953c-5bcd9131f7d4\scratchpad\pptgen\icons\bullseye.png">    </p:cNvPr>
-          <p:cNvPicPr>
-            <a:picLocks noChangeAspect="1"/>
-          </p:cNvPicPr>
-          <p:nvPr/>
-        </p:nvPicPr>
-        <p:blipFill>
-          <a:blip r:embed="rId1"/>
-          <a:stretch>
-            <a:fillRect/>
-          </a:stretch>
-        </p:blipFill>
-        <p:spPr>
-          <a:xfrm>
-            <a:off x="6243523" y="1671523"/>
-            <a:ext cx="405994" cy="405994"/>
-          </a:xfrm>
-          <a:prstGeom prst="rect">
-            <a:avLst/>
-          </a:prstGeom>
-        </p:spPr>
-      </p:pic>
-      <p:sp>
-        <p:nvSpPr>
-          <p:cNvPr id="11" name="Text 8"/>
-          <p:cNvSpPr/>
-          <p:nvPr/>
-        </p:nvSpPr>
-        <p:spPr>
-          <a:xfrm>
-            <a:off x="6903720" y="1581912"/>
-            <a:ext cx="4663440" cy="320040"/>
-          </a:xfrm>
-          <a:prstGeom prst="rect">
-            <a:avLst/>
-          </a:prstGeom>
-          <a:noFill/>
-          <a:ln/>
-        </p:spPr>
-        <p:txBody>
-          <a:bodyPr wrap="square" rtlCol="0" anchor="ctr"/>
-          <a:lstStyle/>
-          <a:p>
-            <a:pPr indent="0" marL="0">
-              <a:buNone/>
-            </a:pPr>
-            <a:r>
-              <a:rPr lang="en-US" sz="1450" b="1" dirty="0">
-                <a:solidFill>
-                  <a:srgbClr val="0F2A43"/>
-                </a:solidFill>
-                <a:latin typeface="Calibri" pitchFamily="34" charset="0"/>
-                <a:ea typeface="Calibri" pitchFamily="34" charset="-122"/>
-                <a:cs typeface="Calibri" pitchFamily="34" charset="-120"/>
-              </a:rPr>
-              <a:t>Personalised Recommendations</a:t>
-            </a:r>
-            <a:endParaRPr lang="en-US" sz="1450" dirty="0"/>
-          </a:p>
-        </p:txBody>
-      </p:sp>
-      <p:sp>
-        <p:nvSpPr>
-          <p:cNvPr id="12" name="Text 9"/>
-          <p:cNvSpPr/>
-          <p:nvPr/>
-        </p:nvSpPr>
-        <p:spPr>
-          <a:xfrm>
-            <a:off x="6903720" y="1892808"/>
-            <a:ext cx="4663440" cy="640080"/>
-          </a:xfrm>
-          <a:prstGeom prst="rect">
-            <a:avLst/>
-          </a:prstGeom>
-          <a:noFill/>
-          <a:ln/>
-        </p:spPr>
-        <p:txBody>
-          <a:bodyPr wrap="square" rtlCol="0" anchor="ctr"/>
-          <a:lstStyle/>
-          <a:p>
-            <a:pPr indent="0" marL="0">
-              <a:lnSpc>
-                <a:spcPts val="1500"/>
-              </a:lnSpc>
-              <a:buNone/>
-            </a:pPr>
-            <a:r>
-              <a:rPr lang="en-US" sz="1150" dirty="0">
-                <a:solidFill>
-                  <a:srgbClr val="5B6B7A"/>
-                </a:solidFill>
-                <a:latin typeface="Calibri" pitchFamily="34" charset="0"/>
-                <a:ea typeface="Calibri" pitchFamily="34" charset="-122"/>
-                <a:cs typeface="Calibri" pitchFamily="34" charset="-120"/>
-              </a:rPr>
-              <a:t>Tailor drug suggestions to patient-specific symptoms and review sentiment, not generic listings.</a:t>
-            </a:r>
-            <a:endParaRPr lang="en-US" sz="1150" dirty="0"/>
-          </a:p>
-        </p:txBody>
-      </p:sp>
-      <p:sp>
-        <p:nvSpPr>
-          <p:cNvPr id="13" name="Shape 10"/>
-          <p:cNvSpPr/>
-          <p:nvPr/>
-        </p:nvSpPr>
-        <p:spPr>
-          <a:xfrm>
-            <a:off x="6172200" y="2715768"/>
-            <a:ext cx="548640" cy="548640"/>
-          </a:xfrm>
-          <a:prstGeom prst="ellipse">
-            <a:avLst/>
-          </a:prstGeom>
-          <a:solidFill>
-            <a:srgbClr val="F44749"/>
-          </a:solidFill>
-          <a:ln/>
-        </p:spPr>
-      </p:sp>
-      <p:pic>
-        <p:nvPicPr>
-          <p:cNvPr id="14" name="Image 1" descr="C:\Users\liyon\AppData\Local\Temp\claude\C--Users-liyon-Personal-MCA-PROJECT-drug-project--2--drug-project-drugrecomendation\9da8fb70-ea4c-4cf2-953c-5bcd9131f7d4\scratchpad\pptgen\icons\chart.png">    </p:cNvPr>
-          <p:cNvPicPr>
-            <a:picLocks noChangeAspect="1"/>
-          </p:cNvPicPr>
-          <p:nvPr/>
-        </p:nvPicPr>
-        <p:blipFill>
-          <a:blip r:embed="rId2"/>
-          <a:stretch>
-            <a:fillRect/>
-          </a:stretch>
-        </p:blipFill>
-        <p:spPr>
-          <a:xfrm>
-            <a:off x="6243523" y="2787091"/>
-            <a:ext cx="405994" cy="405994"/>
-          </a:xfrm>
-          <a:prstGeom prst="rect">
-            <a:avLst/>
-          </a:prstGeom>
-        </p:spPr>
-      </p:pic>
-      <p:sp>
-        <p:nvSpPr>
-          <p:cNvPr id="15" name="Text 11"/>
-          <p:cNvSpPr/>
-          <p:nvPr/>
-        </p:nvSpPr>
-        <p:spPr>
-          <a:xfrm>
-            <a:off x="6903720" y="2697480"/>
-            <a:ext cx="4663440" cy="320040"/>
-          </a:xfrm>
-          <a:prstGeom prst="rect">
-            <a:avLst/>
-          </a:prstGeom>
-          <a:noFill/>
-          <a:ln/>
-        </p:spPr>
-        <p:txBody>
-          <a:bodyPr wrap="square" rtlCol="0" anchor="ctr"/>
-          <a:lstStyle/>
-          <a:p>
-            <a:pPr indent="0" marL="0">
-              <a:buNone/>
-            </a:pPr>
-            <a:r>
-              <a:rPr lang="en-US" sz="1450" b="1" dirty="0">
-                <a:solidFill>
-                  <a:srgbClr val="0F2A43"/>
-                </a:solidFill>
-                <a:latin typeface="Calibri" pitchFamily="34" charset="0"/>
-                <a:ea typeface="Calibri" pitchFamily="34" charset="-122"/>
-                <a:cs typeface="Calibri" pitchFamily="34" charset="-120"/>
-              </a:rPr>
-              <a:t>Machine-Learning Driven Accuracy</a:t>
-            </a:r>
-            <a:endParaRPr lang="en-US" sz="1450" dirty="0"/>
-          </a:p>
-        </p:txBody>
-      </p:sp>
-      <p:sp>
-        <p:nvSpPr>
-          <p:cNvPr id="16" name="Text 12"/>
-          <p:cNvSpPr/>
-          <p:nvPr/>
-        </p:nvSpPr>
-        <p:spPr>
-          <a:xfrm>
-            <a:off x="6903720" y="3008376"/>
-            <a:ext cx="4663440" cy="640080"/>
-          </a:xfrm>
-          <a:prstGeom prst="rect">
-            <a:avLst/>
-          </a:prstGeom>
-          <a:noFill/>
-          <a:ln/>
-        </p:spPr>
-        <p:txBody>
-          <a:bodyPr wrap="square" rtlCol="0" anchor="ctr"/>
-          <a:lstStyle/>
-          <a:p>
-            <a:pPr indent="0" marL="0">
-              <a:lnSpc>
-                <a:spcPts val="1500"/>
-              </a:lnSpc>
-              <a:buNone/>
-            </a:pPr>
-            <a:r>
-              <a:rPr lang="en-US" sz="1150" dirty="0">
-                <a:solidFill>
-                  <a:srgbClr val="5B6B7A"/>
-                </a:solidFill>
-                <a:latin typeface="Calibri" pitchFamily="34" charset="0"/>
-                <a:ea typeface="Calibri" pitchFamily="34" charset="-122"/>
-                <a:cs typeface="Calibri" pitchFamily="34" charset="-120"/>
-              </a:rPr>
-              <a:t>Score real patient reviews with NLP so higher-rated medicines surface first.</a:t>
-            </a:r>
-            <a:endParaRPr lang="en-US" sz="1150" dirty="0"/>
-          </a:p>
-        </p:txBody>
-      </p:sp>
-      <p:sp>
-        <p:nvSpPr>
-          <p:cNvPr id="17" name="Shape 13"/>
-          <p:cNvSpPr/>
-          <p:nvPr/>
-        </p:nvSpPr>
-        <p:spPr>
-          <a:xfrm>
-            <a:off x="6172200" y="3831336"/>
-            <a:ext cx="548640" cy="548640"/>
-          </a:xfrm>
-          <a:prstGeom prst="ellipse">
-            <a:avLst/>
-          </a:prstGeom>
-          <a:solidFill>
-            <a:srgbClr val="F44749"/>
-          </a:solidFill>
-          <a:ln/>
-        </p:spPr>
-      </p:sp>
-      <p:pic>
-        <p:nvPicPr>
-          <p:cNvPr id="18" name="Image 2" descr="C:\Users\liyon\AppData\Local\Temp\claude\C--Users-liyon-Personal-MCA-PROJECT-drug-project--2--drug-project-drugrecomendation\9da8fb70-ea4c-4cf2-953c-5bcd9131f7d4\scratchpad\pptgen\icons\chat.png">    </p:cNvPr>
+          <p:cNvPr id="10" name="Image 0" descr="C:\Users\liyon\AppData\Local\Temp\claude\C--Users-liyon-Personal-MCA-PROJECT-drug-project--2--drug-project-drugrecomendation\9da8fb70-ea4c-4cf2-953c-5bcd9131f7d4\scratchpad\pptgen\icons\bullseye.png"/>
           <p:cNvPicPr>
             <a:picLocks noChangeAspect="1"/>
           </p:cNvPicPr>
@@ -4091,7 +3500,7 @@
         </p:blipFill>
         <p:spPr>
           <a:xfrm>
-            <a:off x="6243523" y="3902659"/>
+            <a:off x="6243523" y="1671523"/>
             <a:ext cx="405994" cy="405994"/>
           </a:xfrm>
           <a:prstGeom prst="rect">
@@ -4101,13 +3510,13 @@
       </p:pic>
       <p:sp>
         <p:nvSpPr>
-          <p:cNvPr id="19" name="Text 14"/>
-          <p:cNvSpPr/>
-          <p:nvPr/>
-        </p:nvSpPr>
-        <p:spPr>
-          <a:xfrm>
-            <a:off x="6903720" y="3813048"/>
+          <p:cNvPr id="11" name="Text 8"/>
+          <p:cNvSpPr/>
+          <p:nvPr/>
+        </p:nvSpPr>
+        <p:spPr>
+          <a:xfrm>
+            <a:off x="6903720" y="1581912"/>
             <a:ext cx="4663440" cy="320040"/>
           </a:xfrm>
           <a:prstGeom prst="rect">
@@ -4120,7 +3529,7 @@
           <a:bodyPr wrap="square" rtlCol="0" anchor="ctr"/>
           <a:lstStyle/>
           <a:p>
-            <a:pPr indent="0" marL="0">
+            <a:pPr marL="0" indent="0">
               <a:buNone/>
             </a:pPr>
             <a:r>
@@ -4132,7 +3541,7 @@
                 <a:ea typeface="Calibri" pitchFamily="34" charset="-122"/>
                 <a:cs typeface="Calibri" pitchFamily="34" charset="-120"/>
               </a:rPr>
-              <a:t>Telemedicine Support</a:t>
+              <a:t>Personalised Recommendations</a:t>
             </a:r>
             <a:endParaRPr lang="en-US" sz="1450" dirty="0"/>
           </a:p>
@@ -4140,13 +3549,13 @@
       </p:sp>
       <p:sp>
         <p:nvSpPr>
-          <p:cNvPr id="20" name="Text 15"/>
-          <p:cNvSpPr/>
-          <p:nvPr/>
-        </p:nvSpPr>
-        <p:spPr>
-          <a:xfrm>
-            <a:off x="6903720" y="4123944"/>
+          <p:cNvPr id="12" name="Text 9"/>
+          <p:cNvSpPr/>
+          <p:nvPr/>
+        </p:nvSpPr>
+        <p:spPr>
+          <a:xfrm>
+            <a:off x="6903720" y="1892808"/>
             <a:ext cx="4663440" cy="640080"/>
           </a:xfrm>
           <a:prstGeom prst="rect">
@@ -4159,7 +3568,7 @@
           <a:bodyPr wrap="square" rtlCol="0" anchor="ctr"/>
           <a:lstStyle/>
           <a:p>
-            <a:pPr indent="0" marL="0">
+            <a:pPr marL="0" indent="0">
               <a:lnSpc>
                 <a:spcPts val="1500"/>
               </a:lnSpc>
@@ -4174,7 +3583,7 @@
                 <a:ea typeface="Calibri" pitchFamily="34" charset="-122"/>
                 <a:cs typeface="Calibri" pitchFamily="34" charset="-120"/>
               </a:rPr>
-              <a:t>Let patients consult specialised doctors in real time through built-in chat.</a:t>
+              <a:t>Tailor drug suggestions to patient-specific symptoms and review sentiment, not generic listings.</a:t>
             </a:r>
             <a:endParaRPr lang="en-US" sz="1150" dirty="0"/>
           </a:p>
@@ -4182,13 +3591,13 @@
       </p:sp>
       <p:sp>
         <p:nvSpPr>
-          <p:cNvPr id="21" name="Shape 16"/>
-          <p:cNvSpPr/>
-          <p:nvPr/>
-        </p:nvSpPr>
-        <p:spPr>
-          <a:xfrm>
-            <a:off x="6172200" y="4946904"/>
+          <p:cNvPr id="13" name="Shape 10"/>
+          <p:cNvSpPr/>
+          <p:nvPr/>
+        </p:nvSpPr>
+        <p:spPr>
+          <a:xfrm>
+            <a:off x="6172200" y="2715768"/>
             <a:ext cx="548640" cy="548640"/>
           </a:xfrm>
           <a:prstGeom prst="ellipse">
@@ -4202,7 +3611,7 @@
       </p:sp>
       <p:pic>
         <p:nvPicPr>
-          <p:cNvPr id="22" name="Image 3" descr="C:\Users\liyon\AppData\Local\Temp\claude\C--Users-liyon-Personal-MCA-PROJECT-drug-project--2--drug-project-drugrecomendation\9da8fb70-ea4c-4cf2-953c-5bcd9131f7d4\scratchpad\pptgen\icons\lock.png">    </p:cNvPr>
+          <p:cNvPr id="14" name="Image 1" descr="C:\Users\liyon\AppData\Local\Temp\claude\C--Users-liyon-Personal-MCA-PROJECT-drug-project--2--drug-project-drugrecomendation\9da8fb70-ea4c-4cf2-953c-5bcd9131f7d4\scratchpad\pptgen\icons\chart.png"/>
           <p:cNvPicPr>
             <a:picLocks noChangeAspect="1"/>
           </p:cNvPicPr>
@@ -4216,7 +3625,7 @@
         </p:blipFill>
         <p:spPr>
           <a:xfrm>
-            <a:off x="6243523" y="5018227"/>
+            <a:off x="6243523" y="2787091"/>
             <a:ext cx="405994" cy="405994"/>
           </a:xfrm>
           <a:prstGeom prst="rect">
@@ -4226,13 +3635,13 @@
       </p:pic>
       <p:sp>
         <p:nvSpPr>
-          <p:cNvPr id="23" name="Text 17"/>
-          <p:cNvSpPr/>
-          <p:nvPr/>
-        </p:nvSpPr>
-        <p:spPr>
-          <a:xfrm>
-            <a:off x="6903720" y="4928616"/>
+          <p:cNvPr id="15" name="Text 11"/>
+          <p:cNvSpPr/>
+          <p:nvPr/>
+        </p:nvSpPr>
+        <p:spPr>
+          <a:xfrm>
+            <a:off x="6903720" y="2697480"/>
             <a:ext cx="4663440" cy="320040"/>
           </a:xfrm>
           <a:prstGeom prst="rect">
@@ -4245,7 +3654,7 @@
           <a:bodyPr wrap="square" rtlCol="0" anchor="ctr"/>
           <a:lstStyle/>
           <a:p>
-            <a:pPr indent="0" marL="0">
+            <a:pPr marL="0" indent="0">
               <a:buNone/>
             </a:pPr>
             <a:r>
@@ -4257,7 +3666,7 @@
                 <a:ea typeface="Calibri" pitchFamily="34" charset="-122"/>
                 <a:cs typeface="Calibri" pitchFamily="34" charset="-120"/>
               </a:rPr>
-              <a:t>Data Integrity &amp; Security</a:t>
+              <a:t>Machine-Learning Driven Accuracy</a:t>
             </a:r>
             <a:endParaRPr lang="en-US" sz="1450" dirty="0"/>
           </a:p>
@@ -4265,13 +3674,13 @@
       </p:sp>
       <p:sp>
         <p:nvSpPr>
-          <p:cNvPr id="24" name="Text 18"/>
-          <p:cNvSpPr/>
-          <p:nvPr/>
-        </p:nvSpPr>
-        <p:spPr>
-          <a:xfrm>
-            <a:off x="6903720" y="5239512"/>
+          <p:cNvPr id="16" name="Text 12"/>
+          <p:cNvSpPr/>
+          <p:nvPr/>
+        </p:nvSpPr>
+        <p:spPr>
+          <a:xfrm>
+            <a:off x="6903720" y="3008376"/>
             <a:ext cx="4663440" cy="640080"/>
           </a:xfrm>
           <a:prstGeom prst="rect">
@@ -4284,7 +3693,7 @@
           <a:bodyPr wrap="square" rtlCol="0" anchor="ctr"/>
           <a:lstStyle/>
           <a:p>
-            <a:pPr indent="0" marL="0">
+            <a:pPr marL="0" indent="0">
               <a:lnSpc>
                 <a:spcPts val="1500"/>
               </a:lnSpc>
@@ -4299,6 +3708,256 @@
                 <a:ea typeface="Calibri" pitchFamily="34" charset="-122"/>
                 <a:cs typeface="Calibri" pitchFamily="34" charset="-120"/>
               </a:rPr>
+              <a:t>Score real patient reviews with NLP so higher-rated medicines surface first.</a:t>
+            </a:r>
+            <a:endParaRPr lang="en-US" sz="1150" dirty="0"/>
+          </a:p>
+        </p:txBody>
+      </p:sp>
+      <p:sp>
+        <p:nvSpPr>
+          <p:cNvPr id="17" name="Shape 13"/>
+          <p:cNvSpPr/>
+          <p:nvPr/>
+        </p:nvSpPr>
+        <p:spPr>
+          <a:xfrm>
+            <a:off x="6172200" y="3831336"/>
+            <a:ext cx="548640" cy="548640"/>
+          </a:xfrm>
+          <a:prstGeom prst="ellipse">
+            <a:avLst/>
+          </a:prstGeom>
+          <a:solidFill>
+            <a:srgbClr val="F44749"/>
+          </a:solidFill>
+          <a:ln/>
+        </p:spPr>
+      </p:sp>
+      <p:pic>
+        <p:nvPicPr>
+          <p:cNvPr id="18" name="Image 2" descr="C:\Users\liyon\AppData\Local\Temp\claude\C--Users-liyon-Personal-MCA-PROJECT-drug-project--2--drug-project-drugrecomendation\9da8fb70-ea4c-4cf2-953c-5bcd9131f7d4\scratchpad\pptgen\icons\chat.png"/>
+          <p:cNvPicPr>
+            <a:picLocks noChangeAspect="1"/>
+          </p:cNvPicPr>
+          <p:nvPr/>
+        </p:nvPicPr>
+        <p:blipFill>
+          <a:blip r:embed="rId5"/>
+          <a:stretch>
+            <a:fillRect/>
+          </a:stretch>
+        </p:blipFill>
+        <p:spPr>
+          <a:xfrm>
+            <a:off x="6243523" y="3902659"/>
+            <a:ext cx="405994" cy="405994"/>
+          </a:xfrm>
+          <a:prstGeom prst="rect">
+            <a:avLst/>
+          </a:prstGeom>
+        </p:spPr>
+      </p:pic>
+      <p:sp>
+        <p:nvSpPr>
+          <p:cNvPr id="19" name="Text 14"/>
+          <p:cNvSpPr/>
+          <p:nvPr/>
+        </p:nvSpPr>
+        <p:spPr>
+          <a:xfrm>
+            <a:off x="6903720" y="3813048"/>
+            <a:ext cx="4663440" cy="320040"/>
+          </a:xfrm>
+          <a:prstGeom prst="rect">
+            <a:avLst/>
+          </a:prstGeom>
+          <a:noFill/>
+          <a:ln/>
+        </p:spPr>
+        <p:txBody>
+          <a:bodyPr wrap="square" rtlCol="0" anchor="ctr"/>
+          <a:lstStyle/>
+          <a:p>
+            <a:pPr marL="0" indent="0">
+              <a:buNone/>
+            </a:pPr>
+            <a:r>
+              <a:rPr lang="en-US" sz="1450" b="1" dirty="0">
+                <a:solidFill>
+                  <a:srgbClr val="0F2A43"/>
+                </a:solidFill>
+                <a:latin typeface="Calibri" pitchFamily="34" charset="0"/>
+                <a:ea typeface="Calibri" pitchFamily="34" charset="-122"/>
+                <a:cs typeface="Calibri" pitchFamily="34" charset="-120"/>
+              </a:rPr>
+              <a:t>Telemedicine Support</a:t>
+            </a:r>
+            <a:endParaRPr lang="en-US" sz="1450" dirty="0"/>
+          </a:p>
+        </p:txBody>
+      </p:sp>
+      <p:sp>
+        <p:nvSpPr>
+          <p:cNvPr id="20" name="Text 15"/>
+          <p:cNvSpPr/>
+          <p:nvPr/>
+        </p:nvSpPr>
+        <p:spPr>
+          <a:xfrm>
+            <a:off x="6903720" y="4123944"/>
+            <a:ext cx="4663440" cy="640080"/>
+          </a:xfrm>
+          <a:prstGeom prst="rect">
+            <a:avLst/>
+          </a:prstGeom>
+          <a:noFill/>
+          <a:ln/>
+        </p:spPr>
+        <p:txBody>
+          <a:bodyPr wrap="square" rtlCol="0" anchor="ctr"/>
+          <a:lstStyle/>
+          <a:p>
+            <a:pPr marL="0" indent="0">
+              <a:lnSpc>
+                <a:spcPts val="1500"/>
+              </a:lnSpc>
+              <a:buNone/>
+            </a:pPr>
+            <a:r>
+              <a:rPr lang="en-US" sz="1150" dirty="0">
+                <a:solidFill>
+                  <a:srgbClr val="5B6B7A"/>
+                </a:solidFill>
+                <a:latin typeface="Calibri" pitchFamily="34" charset="0"/>
+                <a:ea typeface="Calibri" pitchFamily="34" charset="-122"/>
+                <a:cs typeface="Calibri" pitchFamily="34" charset="-120"/>
+              </a:rPr>
+              <a:t>Let patients consult specialised doctors in real time through built-in chat.</a:t>
+            </a:r>
+            <a:endParaRPr lang="en-US" sz="1150" dirty="0"/>
+          </a:p>
+        </p:txBody>
+      </p:sp>
+      <p:sp>
+        <p:nvSpPr>
+          <p:cNvPr id="21" name="Shape 16"/>
+          <p:cNvSpPr/>
+          <p:nvPr/>
+        </p:nvSpPr>
+        <p:spPr>
+          <a:xfrm>
+            <a:off x="6172200" y="4946904"/>
+            <a:ext cx="548640" cy="548640"/>
+          </a:xfrm>
+          <a:prstGeom prst="ellipse">
+            <a:avLst/>
+          </a:prstGeom>
+          <a:solidFill>
+            <a:srgbClr val="F44749"/>
+          </a:solidFill>
+          <a:ln/>
+        </p:spPr>
+      </p:sp>
+      <p:pic>
+        <p:nvPicPr>
+          <p:cNvPr id="22" name="Image 3" descr="C:\Users\liyon\AppData\Local\Temp\claude\C--Users-liyon-Personal-MCA-PROJECT-drug-project--2--drug-project-drugrecomendation\9da8fb70-ea4c-4cf2-953c-5bcd9131f7d4\scratchpad\pptgen\icons\lock.png"/>
+          <p:cNvPicPr>
+            <a:picLocks noChangeAspect="1"/>
+          </p:cNvPicPr>
+          <p:nvPr/>
+        </p:nvPicPr>
+        <p:blipFill>
+          <a:blip r:embed="rId6"/>
+          <a:stretch>
+            <a:fillRect/>
+          </a:stretch>
+        </p:blipFill>
+        <p:spPr>
+          <a:xfrm>
+            <a:off x="6243523" y="5018227"/>
+            <a:ext cx="405994" cy="405994"/>
+          </a:xfrm>
+          <a:prstGeom prst="rect">
+            <a:avLst/>
+          </a:prstGeom>
+        </p:spPr>
+      </p:pic>
+      <p:sp>
+        <p:nvSpPr>
+          <p:cNvPr id="23" name="Text 17"/>
+          <p:cNvSpPr/>
+          <p:nvPr/>
+        </p:nvSpPr>
+        <p:spPr>
+          <a:xfrm>
+            <a:off x="6903720" y="4928616"/>
+            <a:ext cx="4663440" cy="320040"/>
+          </a:xfrm>
+          <a:prstGeom prst="rect">
+            <a:avLst/>
+          </a:prstGeom>
+          <a:noFill/>
+          <a:ln/>
+        </p:spPr>
+        <p:txBody>
+          <a:bodyPr wrap="square" rtlCol="0" anchor="ctr"/>
+          <a:lstStyle/>
+          <a:p>
+            <a:pPr marL="0" indent="0">
+              <a:buNone/>
+            </a:pPr>
+            <a:r>
+              <a:rPr lang="en-US" sz="1450" b="1" dirty="0">
+                <a:solidFill>
+                  <a:srgbClr val="0F2A43"/>
+                </a:solidFill>
+                <a:latin typeface="Calibri" pitchFamily="34" charset="0"/>
+                <a:ea typeface="Calibri" pitchFamily="34" charset="-122"/>
+                <a:cs typeface="Calibri" pitchFamily="34" charset="-120"/>
+              </a:rPr>
+              <a:t>Data Integrity &amp; Security</a:t>
+            </a:r>
+            <a:endParaRPr lang="en-US" sz="1450" dirty="0"/>
+          </a:p>
+        </p:txBody>
+      </p:sp>
+      <p:sp>
+        <p:nvSpPr>
+          <p:cNvPr id="24" name="Text 18"/>
+          <p:cNvSpPr/>
+          <p:nvPr/>
+        </p:nvSpPr>
+        <p:spPr>
+          <a:xfrm>
+            <a:off x="6903720" y="5239512"/>
+            <a:ext cx="4663440" cy="640080"/>
+          </a:xfrm>
+          <a:prstGeom prst="rect">
+            <a:avLst/>
+          </a:prstGeom>
+          <a:noFill/>
+          <a:ln/>
+        </p:spPr>
+        <p:txBody>
+          <a:bodyPr wrap="square" rtlCol="0" anchor="ctr"/>
+          <a:lstStyle/>
+          <a:p>
+            <a:pPr marL="0" indent="0">
+              <a:lnSpc>
+                <a:spcPts val="1500"/>
+              </a:lnSpc>
+              <a:buNone/>
+            </a:pPr>
+            <a:r>
+              <a:rPr lang="en-US" sz="1150" dirty="0">
+                <a:solidFill>
+                  <a:srgbClr val="5B6B7A"/>
+                </a:solidFill>
+                <a:latin typeface="Calibri" pitchFamily="34" charset="0"/>
+                <a:ea typeface="Calibri" pitchFamily="34" charset="-122"/>
+                <a:cs typeface="Calibri" pitchFamily="34" charset="-120"/>
+              </a:rPr>
               <a:t>Keep patient, doctor and company records reliable and access-controlled.</a:t>
             </a:r>
             <a:endParaRPr lang="en-US" sz="1150" dirty="0"/>
@@ -4326,7 +3985,7 @@
           <a:bodyPr wrap="square" rtlCol="0" anchor="ctr"/>
           <a:lstStyle/>
           <a:p>
-            <a:pPr algn="l" indent="0" marL="0">
+            <a:pPr marL="0" indent="0" algn="l">
               <a:buNone/>
             </a:pPr>
             <a:r>
@@ -4365,7 +4024,7 @@
           <a:bodyPr wrap="square" rtlCol="0" anchor="ctr"/>
           <a:lstStyle/>
           <a:p>
-            <a:pPr algn="r" indent="0" marL="0">
+            <a:pPr marL="0" indent="0" algn="r">
               <a:buNone/>
             </a:pPr>
             <a:r>
@@ -4429,11 +4088,11 @@
           <a:bodyPr wrap="square" rtlCol="0" anchor="ctr"/>
           <a:lstStyle/>
           <a:p>
-            <a:pPr indent="0" marL="0">
-              <a:buNone/>
-            </a:pPr>
-            <a:r>
-              <a:rPr lang="en-US" sz="1200" b="1" spc="200" kern="0" dirty="0">
+            <a:pPr marL="0" indent="0">
+              <a:buNone/>
+            </a:pPr>
+            <a:r>
+              <a:rPr lang="en-US" sz="1200" b="1" kern="0" spc="200" dirty="0">
                 <a:solidFill>
                   <a:srgbClr val="F44749"/>
                 </a:solidFill>
@@ -4468,7 +4127,7 @@
           <a:bodyPr wrap="square" rtlCol="0" anchor="ctr"/>
           <a:lstStyle/>
           <a:p>
-            <a:pPr indent="0" marL="0">
+            <a:pPr marL="0" indent="0">
               <a:buNone/>
             </a:pPr>
             <a:r>
@@ -4534,11 +4193,11 @@
           <a:bodyPr wrap="square" rtlCol="0" anchor="ctr"/>
           <a:lstStyle/>
           <a:p>
-            <a:pPr indent="0" marL="0">
-              <a:buNone/>
-            </a:pPr>
-            <a:r>
-              <a:rPr lang="en-US" sz="1300" b="1" spc="200" kern="0" dirty="0">
+            <a:pPr marL="0" indent="0">
+              <a:buNone/>
+            </a:pPr>
+            <a:r>
+              <a:rPr lang="en-US" sz="1300" b="1" kern="0" spc="200" dirty="0">
                 <a:solidFill>
                   <a:srgbClr val="5B6B7A"/>
                 </a:solidFill>
@@ -4593,7 +4252,7 @@
           <a:bodyPr wrap="square" rtlCol="0" anchor="ctr"/>
           <a:lstStyle/>
           <a:p>
-            <a:pPr indent="0" marL="0">
+            <a:pPr marL="0" indent="0">
               <a:buNone/>
             </a:pPr>
             <a:r>
@@ -4632,7 +4291,7 @@
           <a:bodyPr wrap="square" rtlCol="0" anchor="ctr"/>
           <a:lstStyle/>
           <a:p>
-            <a:pPr indent="0" marL="0">
+            <a:pPr marL="0" indent="0">
               <a:lnSpc>
                 <a:spcPts val="1400"/>
               </a:lnSpc>
@@ -4694,7 +4353,7 @@
           <a:bodyPr wrap="square" rtlCol="0" anchor="ctr"/>
           <a:lstStyle/>
           <a:p>
-            <a:pPr indent="0" marL="0">
+            <a:pPr marL="0" indent="0">
               <a:buNone/>
             </a:pPr>
             <a:r>
@@ -4733,7 +4392,7 @@
           <a:bodyPr wrap="square" rtlCol="0" anchor="ctr"/>
           <a:lstStyle/>
           <a:p>
-            <a:pPr indent="0" marL="0">
+            <a:pPr marL="0" indent="0">
               <a:lnSpc>
                 <a:spcPts val="1400"/>
               </a:lnSpc>
@@ -4795,7 +4454,7 @@
           <a:bodyPr wrap="square" rtlCol="0" anchor="ctr"/>
           <a:lstStyle/>
           <a:p>
-            <a:pPr indent="0" marL="0">
+            <a:pPr marL="0" indent="0">
               <a:buNone/>
             </a:pPr>
             <a:r>
@@ -4834,7 +4493,7 @@
           <a:bodyPr wrap="square" rtlCol="0" anchor="ctr"/>
           <a:lstStyle/>
           <a:p>
-            <a:pPr indent="0" marL="0">
+            <a:pPr marL="0" indent="0">
               <a:lnSpc>
                 <a:spcPts val="1400"/>
               </a:lnSpc>
@@ -4896,7 +4555,7 @@
           <a:bodyPr wrap="square" rtlCol="0" anchor="ctr"/>
           <a:lstStyle/>
           <a:p>
-            <a:pPr indent="0" marL="0">
+            <a:pPr marL="0" indent="0">
               <a:buNone/>
             </a:pPr>
             <a:r>
@@ -4935,7 +4594,7 @@
           <a:bodyPr wrap="square" rtlCol="0" anchor="ctr"/>
           <a:lstStyle/>
           <a:p>
-            <a:pPr indent="0" marL="0">
+            <a:pPr marL="0" indent="0">
               <a:lnSpc>
                 <a:spcPts val="1400"/>
               </a:lnSpc>
@@ -4999,11 +4658,11 @@
           <a:bodyPr wrap="square" rtlCol="0" anchor="ctr"/>
           <a:lstStyle/>
           <a:p>
-            <a:pPr indent="0" marL="0">
-              <a:buNone/>
-            </a:pPr>
-            <a:r>
-              <a:rPr lang="en-US" sz="1300" b="1" spc="200" kern="0" dirty="0">
+            <a:pPr marL="0" indent="0">
+              <a:buNone/>
+            </a:pPr>
+            <a:r>
+              <a:rPr lang="en-US" sz="1300" b="1" kern="0" spc="200" dirty="0">
                 <a:solidFill>
                   <a:srgbClr val="F3AF24"/>
                 </a:solidFill>
@@ -5058,7 +4717,7 @@
           <a:bodyPr wrap="square" rtlCol="0" anchor="ctr"/>
           <a:lstStyle/>
           <a:p>
-            <a:pPr indent="0" marL="0">
+            <a:pPr marL="0" indent="0">
               <a:buNone/>
             </a:pPr>
             <a:r>
@@ -5097,7 +4756,7 @@
           <a:bodyPr wrap="square" rtlCol="0" anchor="ctr"/>
           <a:lstStyle/>
           <a:p>
-            <a:pPr indent="0" marL="0">
+            <a:pPr marL="0" indent="0">
               <a:lnSpc>
                 <a:spcPts val="1400"/>
               </a:lnSpc>
@@ -5159,7 +4818,7 @@
           <a:bodyPr wrap="square" rtlCol="0" anchor="ctr"/>
           <a:lstStyle/>
           <a:p>
-            <a:pPr indent="0" marL="0">
+            <a:pPr marL="0" indent="0">
               <a:buNone/>
             </a:pPr>
             <a:r>
@@ -5198,7 +4857,7 @@
           <a:bodyPr wrap="square" rtlCol="0" anchor="ctr"/>
           <a:lstStyle/>
           <a:p>
-            <a:pPr indent="0" marL="0">
+            <a:pPr marL="0" indent="0">
               <a:lnSpc>
                 <a:spcPts val="1400"/>
               </a:lnSpc>
@@ -5260,7 +4919,7 @@
           <a:bodyPr wrap="square" rtlCol="0" anchor="ctr"/>
           <a:lstStyle/>
           <a:p>
-            <a:pPr indent="0" marL="0">
+            <a:pPr marL="0" indent="0">
               <a:buNone/>
             </a:pPr>
             <a:r>
@@ -5299,7 +4958,7 @@
           <a:bodyPr wrap="square" rtlCol="0" anchor="ctr"/>
           <a:lstStyle/>
           <a:p>
-            <a:pPr indent="0" marL="0">
+            <a:pPr marL="0" indent="0">
               <a:lnSpc>
                 <a:spcPts val="1400"/>
               </a:lnSpc>
@@ -5361,7 +5020,7 @@
           <a:bodyPr wrap="square" rtlCol="0" anchor="ctr"/>
           <a:lstStyle/>
           <a:p>
-            <a:pPr indent="0" marL="0">
+            <a:pPr marL="0" indent="0">
               <a:buNone/>
             </a:pPr>
             <a:r>
@@ -5400,7 +5059,7 @@
           <a:bodyPr wrap="square" rtlCol="0" anchor="ctr"/>
           <a:lstStyle/>
           <a:p>
-            <a:pPr indent="0" marL="0">
+            <a:pPr marL="0" indent="0">
               <a:lnSpc>
                 <a:spcPts val="1400"/>
               </a:lnSpc>
@@ -5442,7 +5101,7 @@
           <a:bodyPr wrap="square" rtlCol="0" anchor="ctr"/>
           <a:lstStyle/>
           <a:p>
-            <a:pPr algn="l" indent="0" marL="0">
+            <a:pPr marL="0" indent="0" algn="l">
               <a:buNone/>
             </a:pPr>
             <a:r>
@@ -5481,7 +5140,7 @@
           <a:bodyPr wrap="square" rtlCol="0" anchor="ctr"/>
           <a:lstStyle/>
           <a:p>
-            <a:pPr algn="r" indent="0" marL="0">
+            <a:pPr marL="0" indent="0" algn="r">
               <a:buNone/>
             </a:pPr>
             <a:r>
@@ -5545,11 +5204,11 @@
           <a:bodyPr wrap="square" rtlCol="0" anchor="ctr"/>
           <a:lstStyle/>
           <a:p>
-            <a:pPr indent="0" marL="0">
-              <a:buNone/>
-            </a:pPr>
-            <a:r>
-              <a:rPr lang="en-US" sz="1200" b="1" spc="200" kern="0" dirty="0">
+            <a:pPr marL="0" indent="0">
+              <a:buNone/>
+            </a:pPr>
+            <a:r>
+              <a:rPr lang="en-US" sz="1200" b="1" kern="0" spc="200" dirty="0">
                 <a:solidFill>
                   <a:srgbClr val="F44749"/>
                 </a:solidFill>
@@ -5584,7 +5243,7 @@
           <a:bodyPr wrap="square" rtlCol="0" anchor="ctr"/>
           <a:lstStyle/>
           <a:p>
-            <a:pPr indent="0" marL="0">
+            <a:pPr marL="0" indent="0">
               <a:buNone/>
             </a:pPr>
             <a:r>
@@ -5651,389 +5310,7 @@
       </p:sp>
       <p:pic>
         <p:nvPicPr>
-          <p:cNvPr id="6" name="Image 0" descr="C:\Users\liyon\AppData\Local\Temp\claude\C--Users-liyon-Personal-MCA-PROJECT-drug-project--2--drug-project-drugrecomendation\9da8fb70-ea4c-4cf2-953c-5bcd9131f7d4\scratchpad\pptgen\icons\layer.png">    </p:cNvPr>
-          <p:cNvPicPr>
-            <a:picLocks noChangeAspect="1"/>
-          </p:cNvPicPr>
-          <p:nvPr/>
-        </p:nvPicPr>
-        <p:blipFill>
-          <a:blip r:embed="rId1"/>
-          <a:stretch>
-            <a:fillRect/>
-          </a:stretch>
-        </p:blipFill>
-        <p:spPr>
-          <a:xfrm>
-            <a:off x="942381" y="1961937"/>
-            <a:ext cx="419527" cy="419527"/>
-          </a:xfrm>
-          <a:prstGeom prst="rect">
-            <a:avLst/>
-          </a:prstGeom>
-        </p:spPr>
-      </p:pic>
-      <p:sp>
-        <p:nvSpPr>
-          <p:cNvPr id="7" name="Text 4"/>
-          <p:cNvSpPr/>
-          <p:nvPr/>
-        </p:nvSpPr>
-        <p:spPr>
-          <a:xfrm>
-            <a:off x="1691640" y="1810512"/>
-            <a:ext cx="3017520" cy="320040"/>
-          </a:xfrm>
-          <a:prstGeom prst="rect">
-            <a:avLst/>
-          </a:prstGeom>
-          <a:noFill/>
-          <a:ln/>
-        </p:spPr>
-        <p:txBody>
-          <a:bodyPr wrap="square" rtlCol="0" anchor="ctr"/>
-          <a:lstStyle/>
-          <a:p>
-            <a:pPr indent="0" marL="0">
-              <a:buNone/>
-            </a:pPr>
-            <a:r>
-              <a:rPr lang="en-US" sz="1450" b="1" dirty="0">
-                <a:solidFill>
-                  <a:srgbClr val="0F2A43"/>
-                </a:solidFill>
-                <a:latin typeface="Calibri" pitchFamily="34" charset="0"/>
-                <a:ea typeface="Calibri" pitchFamily="34" charset="-122"/>
-                <a:cs typeface="Calibri" pitchFamily="34" charset="-120"/>
-              </a:rPr>
-              <a:t>Presentation Layer</a:t>
-            </a:r>
-            <a:endParaRPr lang="en-US" sz="1450" dirty="0"/>
-          </a:p>
-        </p:txBody>
-      </p:sp>
-      <p:sp>
-        <p:nvSpPr>
-          <p:cNvPr id="8" name="Text 5"/>
-          <p:cNvSpPr/>
-          <p:nvPr/>
-        </p:nvSpPr>
-        <p:spPr>
-          <a:xfrm>
-            <a:off x="1691640" y="2148840"/>
-            <a:ext cx="3017520" cy="365760"/>
-          </a:xfrm>
-          <a:prstGeom prst="rect">
-            <a:avLst/>
-          </a:prstGeom>
-          <a:noFill/>
-          <a:ln/>
-        </p:spPr>
-        <p:txBody>
-          <a:bodyPr wrap="square" rtlCol="0" anchor="ctr"/>
-          <a:lstStyle/>
-          <a:p>
-            <a:pPr indent="0" marL="0">
-              <a:buNone/>
-            </a:pPr>
-            <a:r>
-              <a:rPr lang="en-US" sz="1100" b="1" dirty="0">
-                <a:solidFill>
-                  <a:srgbClr val="2F6E71"/>
-                </a:solidFill>
-                <a:latin typeface="Calibri" pitchFamily="34" charset="0"/>
-                <a:ea typeface="Calibri" pitchFamily="34" charset="-122"/>
-                <a:cs typeface="Calibri" pitchFamily="34" charset="-120"/>
-              </a:rPr>
-              <a:t>Django Templates + Bootstrap 5</a:t>
-            </a:r>
-            <a:endParaRPr lang="en-US" sz="1100" dirty="0"/>
-          </a:p>
-        </p:txBody>
-      </p:sp>
-      <p:sp>
-        <p:nvSpPr>
-          <p:cNvPr id="9" name="Text 6"/>
-          <p:cNvSpPr/>
-          <p:nvPr/>
-        </p:nvSpPr>
-        <p:spPr>
-          <a:xfrm>
-            <a:off x="4892040" y="1691640"/>
-            <a:ext cx="6446520" cy="960120"/>
-          </a:xfrm>
-          <a:prstGeom prst="rect">
-            <a:avLst/>
-          </a:prstGeom>
-          <a:noFill/>
-          <a:ln/>
-        </p:spPr>
-        <p:txBody>
-          <a:bodyPr wrap="square" rtlCol="0" anchor="ctr"/>
-          <a:lstStyle/>
-          <a:p>
-            <a:pPr indent="0" marL="0">
-              <a:lnSpc>
-                <a:spcPts val="1600"/>
-              </a:lnSpc>
-              <a:buNone/>
-            </a:pPr>
-            <a:r>
-              <a:rPr lang="en-US" sz="1250" dirty="0">
-                <a:solidFill>
-                  <a:srgbClr val="5B6B7A"/>
-                </a:solidFill>
-                <a:latin typeface="Calibri" pitchFamily="34" charset="0"/>
-                <a:ea typeface="Calibri" pitchFamily="34" charset="-122"/>
-                <a:cs typeface="Calibri" pitchFamily="34" charset="-120"/>
-              </a:rPr>
-              <a:t>Role-specific dashboards for Admin, User, Company &amp; Doctor</a:t>
-            </a:r>
-            <a:endParaRPr lang="en-US" sz="1250" dirty="0"/>
-          </a:p>
-        </p:txBody>
-      </p:sp>
-      <p:sp>
-        <p:nvSpPr>
-          <p:cNvPr id="10" name="Shape 7"/>
-          <p:cNvSpPr/>
-          <p:nvPr/>
-        </p:nvSpPr>
-        <p:spPr>
-          <a:xfrm>
-            <a:off x="640080" y="2816352"/>
-            <a:ext cx="10881360" cy="960120"/>
-          </a:xfrm>
-          <a:prstGeom prst="roundRect">
-            <a:avLst>
-              <a:gd name="adj" fmla="val 6667"/>
-            </a:avLst>
-          </a:prstGeom>
-          <a:solidFill>
-            <a:srgbClr val="FFFFFF"/>
-          </a:solidFill>
-          <a:ln w="12700">
-            <a:solidFill>
-              <a:srgbClr val="E3E8ED"/>
-            </a:solidFill>
-            <a:prstDash val="solid"/>
-          </a:ln>
-        </p:spPr>
-      </p:sp>
-      <p:sp>
-        <p:nvSpPr>
-          <p:cNvPr id="11" name="Shape 8"/>
-          <p:cNvSpPr/>
-          <p:nvPr/>
-        </p:nvSpPr>
-        <p:spPr>
-          <a:xfrm>
-            <a:off x="868680" y="3012948"/>
-            <a:ext cx="566928" cy="566928"/>
-          </a:xfrm>
-          <a:prstGeom prst="ellipse">
-            <a:avLst/>
-          </a:prstGeom>
-          <a:solidFill>
-            <a:srgbClr val="0F2A43"/>
-          </a:solidFill>
-          <a:ln/>
-        </p:spPr>
-      </p:sp>
-      <p:pic>
-        <p:nvPicPr>
-          <p:cNvPr id="12" name="Image 1" descr="C:\Users\liyon\AppData\Local\Temp\claude\C--Users-liyon-Personal-MCA-PROJECT-drug-project--2--drug-project-drugrecomendation\9da8fb70-ea4c-4cf2-953c-5bcd9131f7d4\scratchpad\pptgen\icons\cogs.png">    </p:cNvPr>
-          <p:cNvPicPr>
-            <a:picLocks noChangeAspect="1"/>
-          </p:cNvPicPr>
-          <p:nvPr/>
-        </p:nvPicPr>
-        <p:blipFill>
-          <a:blip r:embed="rId2"/>
-          <a:stretch>
-            <a:fillRect/>
-          </a:stretch>
-        </p:blipFill>
-        <p:spPr>
-          <a:xfrm>
-            <a:off x="942381" y="3086649"/>
-            <a:ext cx="419527" cy="419527"/>
-          </a:xfrm>
-          <a:prstGeom prst="rect">
-            <a:avLst/>
-          </a:prstGeom>
-        </p:spPr>
-      </p:pic>
-      <p:sp>
-        <p:nvSpPr>
-          <p:cNvPr id="13" name="Text 9"/>
-          <p:cNvSpPr/>
-          <p:nvPr/>
-        </p:nvSpPr>
-        <p:spPr>
-          <a:xfrm>
-            <a:off x="1691640" y="2935224"/>
-            <a:ext cx="3017520" cy="320040"/>
-          </a:xfrm>
-          <a:prstGeom prst="rect">
-            <a:avLst/>
-          </a:prstGeom>
-          <a:noFill/>
-          <a:ln/>
-        </p:spPr>
-        <p:txBody>
-          <a:bodyPr wrap="square" rtlCol="0" anchor="ctr"/>
-          <a:lstStyle/>
-          <a:p>
-            <a:pPr indent="0" marL="0">
-              <a:buNone/>
-            </a:pPr>
-            <a:r>
-              <a:rPr lang="en-US" sz="1450" b="1" dirty="0">
-                <a:solidFill>
-                  <a:srgbClr val="0F2A43"/>
-                </a:solidFill>
-                <a:latin typeface="Calibri" pitchFamily="34" charset="0"/>
-                <a:ea typeface="Calibri" pitchFamily="34" charset="-122"/>
-                <a:cs typeface="Calibri" pitchFamily="34" charset="-120"/>
-              </a:rPr>
-              <a:t>Application Layer</a:t>
-            </a:r>
-            <a:endParaRPr lang="en-US" sz="1450" dirty="0"/>
-          </a:p>
-        </p:txBody>
-      </p:sp>
-      <p:sp>
-        <p:nvSpPr>
-          <p:cNvPr id="14" name="Text 10"/>
-          <p:cNvSpPr/>
-          <p:nvPr/>
-        </p:nvSpPr>
-        <p:spPr>
-          <a:xfrm>
-            <a:off x="1691640" y="3273552"/>
-            <a:ext cx="3017520" cy="365760"/>
-          </a:xfrm>
-          <a:prstGeom prst="rect">
-            <a:avLst/>
-          </a:prstGeom>
-          <a:noFill/>
-          <a:ln/>
-        </p:spPr>
-        <p:txBody>
-          <a:bodyPr wrap="square" rtlCol="0" anchor="ctr"/>
-          <a:lstStyle/>
-          <a:p>
-            <a:pPr indent="0" marL="0">
-              <a:buNone/>
-            </a:pPr>
-            <a:r>
-              <a:rPr lang="en-US" sz="1100" b="1" dirty="0">
-                <a:solidFill>
-                  <a:srgbClr val="2F6E71"/>
-                </a:solidFill>
-                <a:latin typeface="Calibri" pitchFamily="34" charset="0"/>
-                <a:ea typeface="Calibri" pitchFamily="34" charset="-122"/>
-                <a:cs typeface="Calibri" pitchFamily="34" charset="-120"/>
-              </a:rPr>
-              <a:t>Django 4.0.4 Views (Python 3.9)</a:t>
-            </a:r>
-            <a:endParaRPr lang="en-US" sz="1100" dirty="0"/>
-          </a:p>
-        </p:txBody>
-      </p:sp>
-      <p:sp>
-        <p:nvSpPr>
-          <p:cNvPr id="15" name="Text 11"/>
-          <p:cNvSpPr/>
-          <p:nvPr/>
-        </p:nvSpPr>
-        <p:spPr>
-          <a:xfrm>
-            <a:off x="4892040" y="2816352"/>
-            <a:ext cx="6446520" cy="960120"/>
-          </a:xfrm>
-          <a:prstGeom prst="rect">
-            <a:avLst/>
-          </a:prstGeom>
-          <a:noFill/>
-          <a:ln/>
-        </p:spPr>
-        <p:txBody>
-          <a:bodyPr wrap="square" rtlCol="0" anchor="ctr"/>
-          <a:lstStyle/>
-          <a:p>
-            <a:pPr indent="0" marL="0">
-              <a:lnSpc>
-                <a:spcPts val="1600"/>
-              </a:lnSpc>
-              <a:buNone/>
-            </a:pPr>
-            <a:r>
-              <a:rPr lang="en-US" sz="1250" dirty="0">
-                <a:solidFill>
-                  <a:srgbClr val="5B6B7A"/>
-                </a:solidFill>
-                <a:latin typeface="Calibri" pitchFamily="34" charset="0"/>
-                <a:ea typeface="Calibri" pitchFamily="34" charset="-122"/>
-                <a:cs typeface="Calibri" pitchFamily="34" charset="-120"/>
-              </a:rPr>
-              <a:t>Routing, session-based auth, business logic per actor</a:t>
-            </a:r>
-            <a:endParaRPr lang="en-US" sz="1250" dirty="0"/>
-          </a:p>
-        </p:txBody>
-      </p:sp>
-      <p:sp>
-        <p:nvSpPr>
-          <p:cNvPr id="16" name="Shape 12"/>
-          <p:cNvSpPr/>
-          <p:nvPr/>
-        </p:nvSpPr>
-        <p:spPr>
-          <a:xfrm>
-            <a:off x="640080" y="3941064"/>
-            <a:ext cx="10881360" cy="960120"/>
-          </a:xfrm>
-          <a:prstGeom prst="roundRect">
-            <a:avLst>
-              <a:gd name="adj" fmla="val 6667"/>
-            </a:avLst>
-          </a:prstGeom>
-          <a:solidFill>
-            <a:srgbClr val="F5F7FA"/>
-          </a:solidFill>
-          <a:ln w="12700">
-            <a:solidFill>
-              <a:srgbClr val="E3E8ED"/>
-            </a:solidFill>
-            <a:prstDash val="solid"/>
-          </a:ln>
-        </p:spPr>
-      </p:sp>
-      <p:sp>
-        <p:nvSpPr>
-          <p:cNvPr id="17" name="Shape 13"/>
-          <p:cNvSpPr/>
-          <p:nvPr/>
-        </p:nvSpPr>
-        <p:spPr>
-          <a:xfrm>
-            <a:off x="868680" y="4137660"/>
-            <a:ext cx="566928" cy="566928"/>
-          </a:xfrm>
-          <a:prstGeom prst="ellipse">
-            <a:avLst/>
-          </a:prstGeom>
-          <a:solidFill>
-            <a:srgbClr val="F44749"/>
-          </a:solidFill>
-          <a:ln/>
-        </p:spPr>
-      </p:sp>
-      <p:pic>
-        <p:nvPicPr>
-          <p:cNvPr id="18" name="Image 2" descr="C:\Users\liyon\AppData\Local\Temp\claude\C--Users-liyon-Personal-MCA-PROJECT-drug-project--2--drug-project-drugrecomendation\9da8fb70-ea4c-4cf2-953c-5bcd9131f7d4\scratchpad\pptgen\icons\flask.png">    </p:cNvPr>
+          <p:cNvPr id="6" name="Image 0" descr="C:\Users\liyon\AppData\Local\Temp\claude\C--Users-liyon-Personal-MCA-PROJECT-drug-project--2--drug-project-drugrecomendation\9da8fb70-ea4c-4cf2-953c-5bcd9131f7d4\scratchpad\pptgen\icons\layer.png"/>
           <p:cNvPicPr>
             <a:picLocks noChangeAspect="1"/>
           </p:cNvPicPr>
@@ -6047,7 +5324,7 @@
         </p:blipFill>
         <p:spPr>
           <a:xfrm>
-            <a:off x="942381" y="4211361"/>
+            <a:off x="942381" y="1961937"/>
             <a:ext cx="419527" cy="419527"/>
           </a:xfrm>
           <a:prstGeom prst="rect">
@@ -6057,13 +5334,13 @@
       </p:pic>
       <p:sp>
         <p:nvSpPr>
-          <p:cNvPr id="19" name="Text 14"/>
-          <p:cNvSpPr/>
-          <p:nvPr/>
-        </p:nvSpPr>
-        <p:spPr>
-          <a:xfrm>
-            <a:off x="1691640" y="4059936"/>
+          <p:cNvPr id="7" name="Text 4"/>
+          <p:cNvSpPr/>
+          <p:nvPr/>
+        </p:nvSpPr>
+        <p:spPr>
+          <a:xfrm>
+            <a:off x="1691640" y="1810512"/>
             <a:ext cx="3017520" cy="320040"/>
           </a:xfrm>
           <a:prstGeom prst="rect">
@@ -6076,7 +5353,7 @@
           <a:bodyPr wrap="square" rtlCol="0" anchor="ctr"/>
           <a:lstStyle/>
           <a:p>
-            <a:pPr indent="0" marL="0">
+            <a:pPr marL="0" indent="0">
               <a:buNone/>
             </a:pPr>
             <a:r>
@@ -6088,7 +5365,7 @@
                 <a:ea typeface="Calibri" pitchFamily="34" charset="-122"/>
                 <a:cs typeface="Calibri" pitchFamily="34" charset="-120"/>
               </a:rPr>
-              <a:t>Intelligence Layer</a:t>
+              <a:t>Presentation Layer</a:t>
             </a:r>
             <a:endParaRPr lang="en-US" sz="1450" dirty="0"/>
           </a:p>
@@ -6096,13 +5373,13 @@
       </p:sp>
       <p:sp>
         <p:nvSpPr>
-          <p:cNvPr id="20" name="Text 15"/>
-          <p:cNvSpPr/>
-          <p:nvPr/>
-        </p:nvSpPr>
-        <p:spPr>
-          <a:xfrm>
-            <a:off x="1691640" y="4398264"/>
+          <p:cNvPr id="8" name="Text 5"/>
+          <p:cNvSpPr/>
+          <p:nvPr/>
+        </p:nvSpPr>
+        <p:spPr>
+          <a:xfrm>
+            <a:off x="1691640" y="2148840"/>
             <a:ext cx="3017520" cy="365760"/>
           </a:xfrm>
           <a:prstGeom prst="rect">
@@ -6115,7 +5392,7 @@
           <a:bodyPr wrap="square" rtlCol="0" anchor="ctr"/>
           <a:lstStyle/>
           <a:p>
-            <a:pPr indent="0" marL="0">
+            <a:pPr marL="0" indent="0">
               <a:buNone/>
             </a:pPr>
             <a:r>
@@ -6127,7 +5404,7 @@
                 <a:ea typeface="Calibri" pitchFamily="34" charset="-122"/>
                 <a:cs typeface="Calibri" pitchFamily="34" charset="-120"/>
               </a:rPr>
-              <a:t>NLTK — tokenising, POS-tagging, stemming</a:t>
+              <a:t>Django Templates + Bootstrap 5</a:t>
             </a:r>
             <a:endParaRPr lang="en-US" sz="1100" dirty="0"/>
           </a:p>
@@ -6135,13 +5412,13 @@
       </p:sp>
       <p:sp>
         <p:nvSpPr>
-          <p:cNvPr id="21" name="Text 16"/>
-          <p:cNvSpPr/>
-          <p:nvPr/>
-        </p:nvSpPr>
-        <p:spPr>
-          <a:xfrm>
-            <a:off x="4892040" y="3941064"/>
+          <p:cNvPr id="9" name="Text 6"/>
+          <p:cNvSpPr/>
+          <p:nvPr/>
+        </p:nvSpPr>
+        <p:spPr>
+          <a:xfrm>
+            <a:off x="4892040" y="1691640"/>
             <a:ext cx="6446520" cy="960120"/>
           </a:xfrm>
           <a:prstGeom prst="rect">
@@ -6154,7 +5431,7 @@
           <a:bodyPr wrap="square" rtlCol="0" anchor="ctr"/>
           <a:lstStyle/>
           <a:p>
-            <a:pPr indent="0" marL="0">
+            <a:pPr marL="0" indent="0">
               <a:lnSpc>
                 <a:spcPts val="1600"/>
               </a:lnSpc>
@@ -6169,7 +5446,7 @@
                 <a:ea typeface="Calibri" pitchFamily="34" charset="-122"/>
                 <a:cs typeface="Calibri" pitchFamily="34" charset="-120"/>
               </a:rPr>
-              <a:t>Converts free-text reviews into a sentiment-based star rating</a:t>
+              <a:t>Role-specific dashboards for Admin, User, Company &amp; Doctor</a:t>
             </a:r>
             <a:endParaRPr lang="en-US" sz="1250" dirty="0"/>
           </a:p>
@@ -6177,13 +5454,13 @@
       </p:sp>
       <p:sp>
         <p:nvSpPr>
-          <p:cNvPr id="22" name="Shape 17"/>
-          <p:cNvSpPr/>
-          <p:nvPr/>
-        </p:nvSpPr>
-        <p:spPr>
-          <a:xfrm>
-            <a:off x="640080" y="5065776"/>
+          <p:cNvPr id="10" name="Shape 7"/>
+          <p:cNvSpPr/>
+          <p:nvPr/>
+        </p:nvSpPr>
+        <p:spPr>
+          <a:xfrm>
+            <a:off x="640080" y="2816352"/>
             <a:ext cx="10881360" cy="960120"/>
           </a:xfrm>
           <a:prstGeom prst="roundRect">
@@ -6204,13 +5481,13 @@
       </p:sp>
       <p:sp>
         <p:nvSpPr>
-          <p:cNvPr id="23" name="Shape 18"/>
-          <p:cNvSpPr/>
-          <p:nvPr/>
-        </p:nvSpPr>
-        <p:spPr>
-          <a:xfrm>
-            <a:off x="868680" y="5262372"/>
+          <p:cNvPr id="11" name="Shape 8"/>
+          <p:cNvSpPr/>
+          <p:nvPr/>
+        </p:nvSpPr>
+        <p:spPr>
+          <a:xfrm>
+            <a:off x="868680" y="3012948"/>
             <a:ext cx="566928" cy="566928"/>
           </a:xfrm>
           <a:prstGeom prst="ellipse">
@@ -6224,7 +5501,7 @@
       </p:sp>
       <p:pic>
         <p:nvPicPr>
-          <p:cNvPr id="24" name="Image 3" descr="C:\Users\liyon\AppData\Local\Temp\claude\C--Users-liyon-Personal-MCA-PROJECT-drug-project--2--drug-project-drugrecomendation\9da8fb70-ea4c-4cf2-953c-5bcd9131f7d4\scratchpad\pptgen\icons\database.png">    </p:cNvPr>
+          <p:cNvPr id="12" name="Image 1" descr="C:\Users\liyon\AppData\Local\Temp\claude\C--Users-liyon-Personal-MCA-PROJECT-drug-project--2--drug-project-drugrecomendation\9da8fb70-ea4c-4cf2-953c-5bcd9131f7d4\scratchpad\pptgen\icons\cogs.png"/>
           <p:cNvPicPr>
             <a:picLocks noChangeAspect="1"/>
           </p:cNvPicPr>
@@ -6238,7 +5515,7 @@
         </p:blipFill>
         <p:spPr>
           <a:xfrm>
-            <a:off x="942381" y="5336073"/>
+            <a:off x="942381" y="3086649"/>
             <a:ext cx="419527" cy="419527"/>
           </a:xfrm>
           <a:prstGeom prst="rect">
@@ -6248,13 +5525,13 @@
       </p:pic>
       <p:sp>
         <p:nvSpPr>
-          <p:cNvPr id="25" name="Text 19"/>
-          <p:cNvSpPr/>
-          <p:nvPr/>
-        </p:nvSpPr>
-        <p:spPr>
-          <a:xfrm>
-            <a:off x="1691640" y="5184648"/>
+          <p:cNvPr id="13" name="Text 9"/>
+          <p:cNvSpPr/>
+          <p:nvPr/>
+        </p:nvSpPr>
+        <p:spPr>
+          <a:xfrm>
+            <a:off x="1691640" y="2935224"/>
             <a:ext cx="3017520" cy="320040"/>
           </a:xfrm>
           <a:prstGeom prst="rect">
@@ -6267,7 +5544,7 @@
           <a:bodyPr wrap="square" rtlCol="0" anchor="ctr"/>
           <a:lstStyle/>
           <a:p>
-            <a:pPr indent="0" marL="0">
+            <a:pPr marL="0" indent="0">
               <a:buNone/>
             </a:pPr>
             <a:r>
@@ -6279,7 +5556,7 @@
                 <a:ea typeface="Calibri" pitchFamily="34" charset="-122"/>
                 <a:cs typeface="Calibri" pitchFamily="34" charset="-120"/>
               </a:rPr>
-              <a:t>Data Layer</a:t>
+              <a:t>Application Layer</a:t>
             </a:r>
             <a:endParaRPr lang="en-US" sz="1450" dirty="0"/>
           </a:p>
@@ -6287,13 +5564,13 @@
       </p:sp>
       <p:sp>
         <p:nvSpPr>
-          <p:cNvPr id="26" name="Text 20"/>
-          <p:cNvSpPr/>
-          <p:nvPr/>
-        </p:nvSpPr>
-        <p:spPr>
-          <a:xfrm>
-            <a:off x="1691640" y="5522976"/>
+          <p:cNvPr id="14" name="Text 10"/>
+          <p:cNvSpPr/>
+          <p:nvPr/>
+        </p:nvSpPr>
+        <p:spPr>
+          <a:xfrm>
+            <a:off x="1691640" y="3273552"/>
             <a:ext cx="3017520" cy="365760"/>
           </a:xfrm>
           <a:prstGeom prst="rect">
@@ -6306,7 +5583,7 @@
           <a:bodyPr wrap="square" rtlCol="0" anchor="ctr"/>
           <a:lstStyle/>
           <a:p>
-            <a:pPr indent="0" marL="0">
+            <a:pPr marL="0" indent="0">
               <a:buNone/>
             </a:pPr>
             <a:r>
@@ -6318,7 +5595,7 @@
                 <a:ea typeface="Calibri" pitchFamily="34" charset="-122"/>
                 <a:cs typeface="Calibri" pitchFamily="34" charset="-120"/>
               </a:rPr>
-              <a:t>MySQL</a:t>
+              <a:t>Django 4.0.4 Views (Python 3.9)</a:t>
             </a:r>
             <a:endParaRPr lang="en-US" sz="1100" dirty="0"/>
           </a:p>
@@ -6326,13 +5603,13 @@
       </p:sp>
       <p:sp>
         <p:nvSpPr>
-          <p:cNvPr id="27" name="Text 21"/>
-          <p:cNvSpPr/>
-          <p:nvPr/>
-        </p:nvSpPr>
-        <p:spPr>
-          <a:xfrm>
-            <a:off x="4892040" y="5065776"/>
+          <p:cNvPr id="15" name="Text 11"/>
+          <p:cNvSpPr/>
+          <p:nvPr/>
+        </p:nvSpPr>
+        <p:spPr>
+          <a:xfrm>
+            <a:off x="4892040" y="2816352"/>
             <a:ext cx="6446520" cy="960120"/>
           </a:xfrm>
           <a:prstGeom prst="rect">
@@ -6345,7 +5622,7 @@
           <a:bodyPr wrap="square" rtlCol="0" anchor="ctr"/>
           <a:lstStyle/>
           <a:p>
-            <a:pPr indent="0" marL="0">
+            <a:pPr marL="0" indent="0">
               <a:lnSpc>
                 <a:spcPts val="1600"/>
               </a:lnSpc>
@@ -6360,6 +5637,388 @@
                 <a:ea typeface="Calibri" pitchFamily="34" charset="-122"/>
                 <a:cs typeface="Calibri" pitchFamily="34" charset="-120"/>
               </a:rPr>
+              <a:t>Routing, session-based auth, business logic per actor</a:t>
+            </a:r>
+            <a:endParaRPr lang="en-US" sz="1250" dirty="0"/>
+          </a:p>
+        </p:txBody>
+      </p:sp>
+      <p:sp>
+        <p:nvSpPr>
+          <p:cNvPr id="16" name="Shape 12"/>
+          <p:cNvSpPr/>
+          <p:nvPr/>
+        </p:nvSpPr>
+        <p:spPr>
+          <a:xfrm>
+            <a:off x="640080" y="3941064"/>
+            <a:ext cx="10881360" cy="960120"/>
+          </a:xfrm>
+          <a:prstGeom prst="roundRect">
+            <a:avLst>
+              <a:gd name="adj" fmla="val 6667"/>
+            </a:avLst>
+          </a:prstGeom>
+          <a:solidFill>
+            <a:srgbClr val="F5F7FA"/>
+          </a:solidFill>
+          <a:ln w="12700">
+            <a:solidFill>
+              <a:srgbClr val="E3E8ED"/>
+            </a:solidFill>
+            <a:prstDash val="solid"/>
+          </a:ln>
+        </p:spPr>
+      </p:sp>
+      <p:sp>
+        <p:nvSpPr>
+          <p:cNvPr id="17" name="Shape 13"/>
+          <p:cNvSpPr/>
+          <p:nvPr/>
+        </p:nvSpPr>
+        <p:spPr>
+          <a:xfrm>
+            <a:off x="868680" y="4137660"/>
+            <a:ext cx="566928" cy="566928"/>
+          </a:xfrm>
+          <a:prstGeom prst="ellipse">
+            <a:avLst/>
+          </a:prstGeom>
+          <a:solidFill>
+            <a:srgbClr val="F44749"/>
+          </a:solidFill>
+          <a:ln/>
+        </p:spPr>
+      </p:sp>
+      <p:pic>
+        <p:nvPicPr>
+          <p:cNvPr id="18" name="Image 2" descr="C:\Users\liyon\AppData\Local\Temp\claude\C--Users-liyon-Personal-MCA-PROJECT-drug-project--2--drug-project-drugrecomendation\9da8fb70-ea4c-4cf2-953c-5bcd9131f7d4\scratchpad\pptgen\icons\flask.png"/>
+          <p:cNvPicPr>
+            <a:picLocks noChangeAspect="1"/>
+          </p:cNvPicPr>
+          <p:nvPr/>
+        </p:nvPicPr>
+        <p:blipFill>
+          <a:blip r:embed="rId5"/>
+          <a:stretch>
+            <a:fillRect/>
+          </a:stretch>
+        </p:blipFill>
+        <p:spPr>
+          <a:xfrm>
+            <a:off x="942381" y="4211361"/>
+            <a:ext cx="419527" cy="419527"/>
+          </a:xfrm>
+          <a:prstGeom prst="rect">
+            <a:avLst/>
+          </a:prstGeom>
+        </p:spPr>
+      </p:pic>
+      <p:sp>
+        <p:nvSpPr>
+          <p:cNvPr id="19" name="Text 14"/>
+          <p:cNvSpPr/>
+          <p:nvPr/>
+        </p:nvSpPr>
+        <p:spPr>
+          <a:xfrm>
+            <a:off x="1691640" y="4059936"/>
+            <a:ext cx="3017520" cy="320040"/>
+          </a:xfrm>
+          <a:prstGeom prst="rect">
+            <a:avLst/>
+          </a:prstGeom>
+          <a:noFill/>
+          <a:ln/>
+        </p:spPr>
+        <p:txBody>
+          <a:bodyPr wrap="square" rtlCol="0" anchor="ctr"/>
+          <a:lstStyle/>
+          <a:p>
+            <a:pPr marL="0" indent="0">
+              <a:buNone/>
+            </a:pPr>
+            <a:r>
+              <a:rPr lang="en-US" sz="1450" b="1" dirty="0">
+                <a:solidFill>
+                  <a:srgbClr val="0F2A43"/>
+                </a:solidFill>
+                <a:latin typeface="Calibri" pitchFamily="34" charset="0"/>
+                <a:ea typeface="Calibri" pitchFamily="34" charset="-122"/>
+                <a:cs typeface="Calibri" pitchFamily="34" charset="-120"/>
+              </a:rPr>
+              <a:t>Intelligence Layer</a:t>
+            </a:r>
+            <a:endParaRPr lang="en-US" sz="1450" dirty="0"/>
+          </a:p>
+        </p:txBody>
+      </p:sp>
+      <p:sp>
+        <p:nvSpPr>
+          <p:cNvPr id="20" name="Text 15"/>
+          <p:cNvSpPr/>
+          <p:nvPr/>
+        </p:nvSpPr>
+        <p:spPr>
+          <a:xfrm>
+            <a:off x="1691640" y="4398264"/>
+            <a:ext cx="3017520" cy="365760"/>
+          </a:xfrm>
+          <a:prstGeom prst="rect">
+            <a:avLst/>
+          </a:prstGeom>
+          <a:noFill/>
+          <a:ln/>
+        </p:spPr>
+        <p:txBody>
+          <a:bodyPr wrap="square" rtlCol="0" anchor="ctr"/>
+          <a:lstStyle/>
+          <a:p>
+            <a:pPr marL="0" indent="0">
+              <a:buNone/>
+            </a:pPr>
+            <a:r>
+              <a:rPr lang="en-US" sz="1100" b="1" dirty="0">
+                <a:solidFill>
+                  <a:srgbClr val="2F6E71"/>
+                </a:solidFill>
+                <a:latin typeface="Calibri" pitchFamily="34" charset="0"/>
+                <a:ea typeface="Calibri" pitchFamily="34" charset="-122"/>
+                <a:cs typeface="Calibri" pitchFamily="34" charset="-120"/>
+              </a:rPr>
+              <a:t>NLTK — tokenising, POS-tagging, stemming</a:t>
+            </a:r>
+            <a:endParaRPr lang="en-US" sz="1100" dirty="0"/>
+          </a:p>
+        </p:txBody>
+      </p:sp>
+      <p:sp>
+        <p:nvSpPr>
+          <p:cNvPr id="21" name="Text 16"/>
+          <p:cNvSpPr/>
+          <p:nvPr/>
+        </p:nvSpPr>
+        <p:spPr>
+          <a:xfrm>
+            <a:off x="4892040" y="3941064"/>
+            <a:ext cx="6446520" cy="960120"/>
+          </a:xfrm>
+          <a:prstGeom prst="rect">
+            <a:avLst/>
+          </a:prstGeom>
+          <a:noFill/>
+          <a:ln/>
+        </p:spPr>
+        <p:txBody>
+          <a:bodyPr wrap="square" rtlCol="0" anchor="ctr"/>
+          <a:lstStyle/>
+          <a:p>
+            <a:pPr marL="0" indent="0">
+              <a:lnSpc>
+                <a:spcPts val="1600"/>
+              </a:lnSpc>
+              <a:buNone/>
+            </a:pPr>
+            <a:r>
+              <a:rPr lang="en-US" sz="1250" dirty="0">
+                <a:solidFill>
+                  <a:srgbClr val="5B6B7A"/>
+                </a:solidFill>
+                <a:latin typeface="Calibri" pitchFamily="34" charset="0"/>
+                <a:ea typeface="Calibri" pitchFamily="34" charset="-122"/>
+                <a:cs typeface="Calibri" pitchFamily="34" charset="-120"/>
+              </a:rPr>
+              <a:t>Converts free-text reviews into a sentiment-based star rating</a:t>
+            </a:r>
+            <a:endParaRPr lang="en-US" sz="1250" dirty="0"/>
+          </a:p>
+        </p:txBody>
+      </p:sp>
+      <p:sp>
+        <p:nvSpPr>
+          <p:cNvPr id="22" name="Shape 17"/>
+          <p:cNvSpPr/>
+          <p:nvPr/>
+        </p:nvSpPr>
+        <p:spPr>
+          <a:xfrm>
+            <a:off x="640080" y="5065776"/>
+            <a:ext cx="10881360" cy="960120"/>
+          </a:xfrm>
+          <a:prstGeom prst="roundRect">
+            <a:avLst>
+              <a:gd name="adj" fmla="val 6667"/>
+            </a:avLst>
+          </a:prstGeom>
+          <a:solidFill>
+            <a:srgbClr val="FFFFFF"/>
+          </a:solidFill>
+          <a:ln w="12700">
+            <a:solidFill>
+              <a:srgbClr val="E3E8ED"/>
+            </a:solidFill>
+            <a:prstDash val="solid"/>
+          </a:ln>
+        </p:spPr>
+      </p:sp>
+      <p:sp>
+        <p:nvSpPr>
+          <p:cNvPr id="23" name="Shape 18"/>
+          <p:cNvSpPr/>
+          <p:nvPr/>
+        </p:nvSpPr>
+        <p:spPr>
+          <a:xfrm>
+            <a:off x="868680" y="5262372"/>
+            <a:ext cx="566928" cy="566928"/>
+          </a:xfrm>
+          <a:prstGeom prst="ellipse">
+            <a:avLst/>
+          </a:prstGeom>
+          <a:solidFill>
+            <a:srgbClr val="0F2A43"/>
+          </a:solidFill>
+          <a:ln/>
+        </p:spPr>
+      </p:sp>
+      <p:pic>
+        <p:nvPicPr>
+          <p:cNvPr id="24" name="Image 3" descr="C:\Users\liyon\AppData\Local\Temp\claude\C--Users-liyon-Personal-MCA-PROJECT-drug-project--2--drug-project-drugrecomendation\9da8fb70-ea4c-4cf2-953c-5bcd9131f7d4\scratchpad\pptgen\icons\database.png"/>
+          <p:cNvPicPr>
+            <a:picLocks noChangeAspect="1"/>
+          </p:cNvPicPr>
+          <p:nvPr/>
+        </p:nvPicPr>
+        <p:blipFill>
+          <a:blip r:embed="rId6"/>
+          <a:stretch>
+            <a:fillRect/>
+          </a:stretch>
+        </p:blipFill>
+        <p:spPr>
+          <a:xfrm>
+            <a:off x="942381" y="5336073"/>
+            <a:ext cx="419527" cy="419527"/>
+          </a:xfrm>
+          <a:prstGeom prst="rect">
+            <a:avLst/>
+          </a:prstGeom>
+        </p:spPr>
+      </p:pic>
+      <p:sp>
+        <p:nvSpPr>
+          <p:cNvPr id="25" name="Text 19"/>
+          <p:cNvSpPr/>
+          <p:nvPr/>
+        </p:nvSpPr>
+        <p:spPr>
+          <a:xfrm>
+            <a:off x="1691640" y="5184648"/>
+            <a:ext cx="3017520" cy="320040"/>
+          </a:xfrm>
+          <a:prstGeom prst="rect">
+            <a:avLst/>
+          </a:prstGeom>
+          <a:noFill/>
+          <a:ln/>
+        </p:spPr>
+        <p:txBody>
+          <a:bodyPr wrap="square" rtlCol="0" anchor="ctr"/>
+          <a:lstStyle/>
+          <a:p>
+            <a:pPr marL="0" indent="0">
+              <a:buNone/>
+            </a:pPr>
+            <a:r>
+              <a:rPr lang="en-US" sz="1450" b="1" dirty="0">
+                <a:solidFill>
+                  <a:srgbClr val="0F2A43"/>
+                </a:solidFill>
+                <a:latin typeface="Calibri" pitchFamily="34" charset="0"/>
+                <a:ea typeface="Calibri" pitchFamily="34" charset="-122"/>
+                <a:cs typeface="Calibri" pitchFamily="34" charset="-120"/>
+              </a:rPr>
+              <a:t>Data Layer</a:t>
+            </a:r>
+            <a:endParaRPr lang="en-US" sz="1450" dirty="0"/>
+          </a:p>
+        </p:txBody>
+      </p:sp>
+      <p:sp>
+        <p:nvSpPr>
+          <p:cNvPr id="26" name="Text 20"/>
+          <p:cNvSpPr/>
+          <p:nvPr/>
+        </p:nvSpPr>
+        <p:spPr>
+          <a:xfrm>
+            <a:off x="1691640" y="5522976"/>
+            <a:ext cx="3017520" cy="365760"/>
+          </a:xfrm>
+          <a:prstGeom prst="rect">
+            <a:avLst/>
+          </a:prstGeom>
+          <a:noFill/>
+          <a:ln/>
+        </p:spPr>
+        <p:txBody>
+          <a:bodyPr wrap="square" rtlCol="0" anchor="ctr"/>
+          <a:lstStyle/>
+          <a:p>
+            <a:pPr marL="0" indent="0">
+              <a:buNone/>
+            </a:pPr>
+            <a:r>
+              <a:rPr lang="en-US" sz="1100" b="1" dirty="0">
+                <a:solidFill>
+                  <a:srgbClr val="2F6E71"/>
+                </a:solidFill>
+                <a:latin typeface="Calibri" pitchFamily="34" charset="0"/>
+                <a:ea typeface="Calibri" pitchFamily="34" charset="-122"/>
+                <a:cs typeface="Calibri" pitchFamily="34" charset="-120"/>
+              </a:rPr>
+              <a:t>MySQL</a:t>
+            </a:r>
+            <a:endParaRPr lang="en-US" sz="1100" dirty="0"/>
+          </a:p>
+        </p:txBody>
+      </p:sp>
+      <p:sp>
+        <p:nvSpPr>
+          <p:cNvPr id="27" name="Text 21"/>
+          <p:cNvSpPr/>
+          <p:nvPr/>
+        </p:nvSpPr>
+        <p:spPr>
+          <a:xfrm>
+            <a:off x="4892040" y="5065776"/>
+            <a:ext cx="6446520" cy="960120"/>
+          </a:xfrm>
+          <a:prstGeom prst="rect">
+            <a:avLst/>
+          </a:prstGeom>
+          <a:noFill/>
+          <a:ln/>
+        </p:spPr>
+        <p:txBody>
+          <a:bodyPr wrap="square" rtlCol="0" anchor="ctr"/>
+          <a:lstStyle/>
+          <a:p>
+            <a:pPr marL="0" indent="0">
+              <a:lnSpc>
+                <a:spcPts val="1600"/>
+              </a:lnSpc>
+              <a:buNone/>
+            </a:pPr>
+            <a:r>
+              <a:rPr lang="en-US" sz="1250" dirty="0">
+                <a:solidFill>
+                  <a:srgbClr val="5B6B7A"/>
+                </a:solidFill>
+                <a:latin typeface="Calibri" pitchFamily="34" charset="0"/>
+                <a:ea typeface="Calibri" pitchFamily="34" charset="-122"/>
+                <a:cs typeface="Calibri" pitchFamily="34" charset="-120"/>
+              </a:rPr>
               <a:t>Patients, companies, doctors, medicines, reviews &amp; chat history</a:t>
             </a:r>
             <a:endParaRPr lang="en-US" sz="1250" dirty="0"/>
@@ -6387,7 +6046,7 @@
           <a:bodyPr wrap="square" rtlCol="0" anchor="ctr"/>
           <a:lstStyle/>
           <a:p>
-            <a:pPr algn="l" indent="0" marL="0">
+            <a:pPr marL="0" indent="0" algn="l">
               <a:buNone/>
             </a:pPr>
             <a:r>
@@ -6426,7 +6085,7 @@
           <a:bodyPr wrap="square" rtlCol="0" anchor="ctr"/>
           <a:lstStyle/>
           <a:p>
-            <a:pPr algn="r" indent="0" marL="0">
+            <a:pPr marL="0" indent="0" algn="r">
               <a:buNone/>
             </a:pPr>
             <a:r>
@@ -6490,11 +6149,11 @@
           <a:bodyPr wrap="square" rtlCol="0" anchor="ctr"/>
           <a:lstStyle/>
           <a:p>
-            <a:pPr indent="0" marL="0">
-              <a:buNone/>
-            </a:pPr>
-            <a:r>
-              <a:rPr lang="en-US" sz="1200" b="1" spc="200" kern="0" dirty="0">
+            <a:pPr marL="0" indent="0">
+              <a:buNone/>
+            </a:pPr>
+            <a:r>
+              <a:rPr lang="en-US" sz="1200" b="1" kern="0" spc="200" dirty="0">
                 <a:solidFill>
                   <a:srgbClr val="F44749"/>
                 </a:solidFill>
@@ -6529,7 +6188,7 @@
           <a:bodyPr wrap="square" rtlCol="0" anchor="ctr"/>
           <a:lstStyle/>
           <a:p>
-            <a:pPr indent="0" marL="0">
+            <a:pPr marL="0" indent="0">
               <a:buNone/>
             </a:pPr>
             <a:r>
@@ -6573,7 +6232,7 @@
             <a:prstDash val="solid"/>
           </a:ln>
           <a:effectLst>
-            <a:outerShdw sx="100000" sy="100000" kx="0" ky="0" algn="bl" rotWithShape="0" blurRad="127000" dist="38100" dir="5400000">
+            <a:outerShdw blurRad="127000" dist="38100" dir="5400000" algn="bl" rotWithShape="0">
               <a:srgbClr val="16324C">
                 <a:alpha val="12000"/>
               </a:srgbClr>
@@ -6645,14 +6304,14 @@
       </p:sp>
       <p:pic>
         <p:nvPicPr>
-          <p:cNvPr id="8" name="Image 0" descr="C:\Users\liyon\AppData\Local\Temp\claude\C--Users-liyon-Personal-MCA-PROJECT-drug-project--2--drug-project-drugrecomendation\9da8fb70-ea4c-4cf2-953c-5bcd9131f7d4\scratchpad\pptgen\icons\admin.png">    </p:cNvPr>
+          <p:cNvPr id="8" name="Image 0" descr="C:\Users\liyon\AppData\Local\Temp\claude\C--Users-liyon-Personal-MCA-PROJECT-drug-project--2--drug-project-drugrecomendation\9da8fb70-ea4c-4cf2-953c-5bcd9131f7d4\scratchpad\pptgen\icons\admin.png"/>
           <p:cNvPicPr>
             <a:picLocks noChangeAspect="1"/>
           </p:cNvPicPr>
           <p:nvPr/>
         </p:nvPicPr>
         <p:blipFill>
-          <a:blip r:embed="rId1"/>
+          <a:blip r:embed="rId3"/>
           <a:stretch>
             <a:fillRect/>
           </a:stretch>
@@ -6688,7 +6347,7 @@
           <a:bodyPr wrap="square" rtlCol="0" anchor="ctr"/>
           <a:lstStyle/>
           <a:p>
-            <a:pPr algn="ctr" indent="0" marL="0">
+            <a:pPr marL="0" indent="0" algn="ctr">
               <a:buNone/>
             </a:pPr>
             <a:r>
@@ -6747,7 +6406,7 @@
           <a:bodyPr wrap="square" rtlCol="0" anchor="ctr"/>
           <a:lstStyle/>
           <a:p>
-            <a:pPr indent="0" marL="0">
+            <a:pPr marL="0" indent="0">
               <a:lnSpc>
                 <a:spcPts val="1300"/>
               </a:lnSpc>
@@ -6809,7 +6468,7 @@
           <a:bodyPr wrap="square" rtlCol="0" anchor="ctr"/>
           <a:lstStyle/>
           <a:p>
-            <a:pPr indent="0" marL="0">
+            <a:pPr marL="0" indent="0">
               <a:lnSpc>
                 <a:spcPts val="1300"/>
               </a:lnSpc>
@@ -6871,7 +6530,7 @@
           <a:bodyPr wrap="square" rtlCol="0" anchor="ctr"/>
           <a:lstStyle/>
           <a:p>
-            <a:pPr indent="0" marL="0">
+            <a:pPr marL="0" indent="0">
               <a:lnSpc>
                 <a:spcPts val="1300"/>
               </a:lnSpc>
@@ -6918,7 +6577,7 @@
             <a:prstDash val="solid"/>
           </a:ln>
           <a:effectLst>
-            <a:outerShdw sx="100000" sy="100000" kx="0" ky="0" algn="bl" rotWithShape="0" blurRad="127000" dist="38100" dir="5400000">
+            <a:outerShdw blurRad="127000" dist="38100" dir="5400000" algn="bl" rotWithShape="0">
               <a:srgbClr val="16324C">
                 <a:alpha val="12000"/>
               </a:srgbClr>
@@ -6990,14 +6649,14 @@
       </p:sp>
       <p:pic>
         <p:nvPicPr>
-          <p:cNvPr id="20" name="Image 1" descr="C:\Users\liyon\AppData\Local\Temp\claude\C--Users-liyon-Personal-MCA-PROJECT-drug-project--2--drug-project-drugrecomendation\9da8fb70-ea4c-4cf2-953c-5bcd9131f7d4\scratchpad\pptgen\icons\patient.png">    </p:cNvPr>
+          <p:cNvPr id="20" name="Image 1" descr="C:\Users\liyon\AppData\Local\Temp\claude\C--Users-liyon-Personal-MCA-PROJECT-drug-project--2--drug-project-drugrecomendation\9da8fb70-ea4c-4cf2-953c-5bcd9131f7d4\scratchpad\pptgen\icons\patient.png"/>
           <p:cNvPicPr>
             <a:picLocks noChangeAspect="1"/>
           </p:cNvPicPr>
           <p:nvPr/>
         </p:nvPicPr>
         <p:blipFill>
-          <a:blip r:embed="rId2"/>
+          <a:blip r:embed="rId4"/>
           <a:stretch>
             <a:fillRect/>
           </a:stretch>
@@ -7033,7 +6692,7 @@
           <a:bodyPr wrap="square" rtlCol="0" anchor="ctr"/>
           <a:lstStyle/>
           <a:p>
-            <a:pPr algn="ctr" indent="0" marL="0">
+            <a:pPr marL="0" indent="0" algn="ctr">
               <a:buNone/>
             </a:pPr>
             <a:r>
@@ -7092,7 +6751,7 @@
           <a:bodyPr wrap="square" rtlCol="0" anchor="ctr"/>
           <a:lstStyle/>
           <a:p>
-            <a:pPr indent="0" marL="0">
+            <a:pPr marL="0" indent="0">
               <a:lnSpc>
                 <a:spcPts val="1300"/>
               </a:lnSpc>
@@ -7154,7 +6813,7 @@
           <a:bodyPr wrap="square" rtlCol="0" anchor="ctr"/>
           <a:lstStyle/>
           <a:p>
-            <a:pPr indent="0" marL="0">
+            <a:pPr marL="0" indent="0">
               <a:lnSpc>
                 <a:spcPts val="1300"/>
               </a:lnSpc>
@@ -7216,7 +6875,7 @@
           <a:bodyPr wrap="square" rtlCol="0" anchor="ctr"/>
           <a:lstStyle/>
           <a:p>
-            <a:pPr indent="0" marL="0">
+            <a:pPr marL="0" indent="0">
               <a:lnSpc>
                 <a:spcPts val="1300"/>
               </a:lnSpc>
@@ -7263,7 +6922,7 @@
             <a:prstDash val="solid"/>
           </a:ln>
           <a:effectLst>
-            <a:outerShdw sx="100000" sy="100000" kx="0" ky="0" algn="bl" rotWithShape="0" blurRad="127000" dist="38100" dir="5400000">
+            <a:outerShdw blurRad="127000" dist="38100" dir="5400000" algn="bl" rotWithShape="0">
               <a:srgbClr val="16324C">
                 <a:alpha val="12000"/>
               </a:srgbClr>
@@ -7335,14 +6994,14 @@
       </p:sp>
       <p:pic>
         <p:nvPicPr>
-          <p:cNvPr id="32" name="Image 2" descr="C:\Users\liyon\AppData\Local\Temp\claude\C--Users-liyon-Personal-MCA-PROJECT-drug-project--2--drug-project-drugrecomendation\9da8fb70-ea4c-4cf2-953c-5bcd9131f7d4\scratchpad\pptgen\icons\company.png">    </p:cNvPr>
+          <p:cNvPr id="32" name="Image 2" descr="C:\Users\liyon\AppData\Local\Temp\claude\C--Users-liyon-Personal-MCA-PROJECT-drug-project--2--drug-project-drugrecomendation\9da8fb70-ea4c-4cf2-953c-5bcd9131f7d4\scratchpad\pptgen\icons\company.png"/>
           <p:cNvPicPr>
             <a:picLocks noChangeAspect="1"/>
           </p:cNvPicPr>
           <p:nvPr/>
         </p:nvPicPr>
         <p:blipFill>
-          <a:blip r:embed="rId3"/>
+          <a:blip r:embed="rId5"/>
           <a:stretch>
             <a:fillRect/>
           </a:stretch>
@@ -7378,7 +7037,7 @@
           <a:bodyPr wrap="square" rtlCol="0" anchor="ctr"/>
           <a:lstStyle/>
           <a:p>
-            <a:pPr algn="ctr" indent="0" marL="0">
+            <a:pPr marL="0" indent="0" algn="ctr">
               <a:buNone/>
             </a:pPr>
             <a:r>
@@ -7437,7 +7096,7 @@
           <a:bodyPr wrap="square" rtlCol="0" anchor="ctr"/>
           <a:lstStyle/>
           <a:p>
-            <a:pPr indent="0" marL="0">
+            <a:pPr marL="0" indent="0">
               <a:lnSpc>
                 <a:spcPts val="1300"/>
               </a:lnSpc>
@@ -7499,7 +7158,7 @@
           <a:bodyPr wrap="square" rtlCol="0" anchor="ctr"/>
           <a:lstStyle/>
           <a:p>
-            <a:pPr indent="0" marL="0">
+            <a:pPr marL="0" indent="0">
               <a:lnSpc>
                 <a:spcPts val="1300"/>
               </a:lnSpc>
@@ -7561,7 +7220,7 @@
           <a:bodyPr wrap="square" rtlCol="0" anchor="ctr"/>
           <a:lstStyle/>
           <a:p>
-            <a:pPr indent="0" marL="0">
+            <a:pPr marL="0" indent="0">
               <a:lnSpc>
                 <a:spcPts val="1300"/>
               </a:lnSpc>
@@ -7608,7 +7267,7 @@
             <a:prstDash val="solid"/>
           </a:ln>
           <a:effectLst>
-            <a:outerShdw sx="100000" sy="100000" kx="0" ky="0" algn="bl" rotWithShape="0" blurRad="127000" dist="38100" dir="5400000">
+            <a:outerShdw blurRad="127000" dist="38100" dir="5400000" algn="bl" rotWithShape="0">
               <a:srgbClr val="16324C">
                 <a:alpha val="12000"/>
               </a:srgbClr>
@@ -7680,14 +7339,14 @@
       </p:sp>
       <p:pic>
         <p:nvPicPr>
-          <p:cNvPr id="44" name="Image 3" descr="C:\Users\liyon\AppData\Local\Temp\claude\C--Users-liyon-Personal-MCA-PROJECT-drug-project--2--drug-project-drugrecomendation\9da8fb70-ea4c-4cf2-953c-5bcd9131f7d4\scratchpad\pptgen\icons\doctor.png">    </p:cNvPr>
+          <p:cNvPr id="44" name="Image 3" descr="C:\Users\liyon\AppData\Local\Temp\claude\C--Users-liyon-Personal-MCA-PROJECT-drug-project--2--drug-project-drugrecomendation\9da8fb70-ea4c-4cf2-953c-5bcd9131f7d4\scratchpad\pptgen\icons\doctor.png"/>
           <p:cNvPicPr>
             <a:picLocks noChangeAspect="1"/>
           </p:cNvPicPr>
           <p:nvPr/>
         </p:nvPicPr>
         <p:blipFill>
-          <a:blip r:embed="rId4"/>
+          <a:blip r:embed="rId6"/>
           <a:stretch>
             <a:fillRect/>
           </a:stretch>
@@ -7723,7 +7382,7 @@
           <a:bodyPr wrap="square" rtlCol="0" anchor="ctr"/>
           <a:lstStyle/>
           <a:p>
-            <a:pPr algn="ctr" indent="0" marL="0">
+            <a:pPr marL="0" indent="0" algn="ctr">
               <a:buNone/>
             </a:pPr>
             <a:r>
@@ -7782,7 +7441,7 @@
           <a:bodyPr wrap="square" rtlCol="0" anchor="ctr"/>
           <a:lstStyle/>
           <a:p>
-            <a:pPr indent="0" marL="0">
+            <a:pPr marL="0" indent="0">
               <a:lnSpc>
                 <a:spcPts val="1300"/>
               </a:lnSpc>
@@ -7844,7 +7503,7 @@
           <a:bodyPr wrap="square" rtlCol="0" anchor="ctr"/>
           <a:lstStyle/>
           <a:p>
-            <a:pPr indent="0" marL="0">
+            <a:pPr marL="0" indent="0">
               <a:lnSpc>
                 <a:spcPts val="1300"/>
               </a:lnSpc>
@@ -7906,7 +7565,7 @@
           <a:bodyPr wrap="square" rtlCol="0" anchor="ctr"/>
           <a:lstStyle/>
           <a:p>
-            <a:pPr indent="0" marL="0">
+            <a:pPr marL="0" indent="0">
               <a:lnSpc>
                 <a:spcPts val="1300"/>
               </a:lnSpc>
@@ -7948,7 +7607,7 @@
           <a:bodyPr wrap="square" rtlCol="0" anchor="ctr"/>
           <a:lstStyle/>
           <a:p>
-            <a:pPr algn="l" indent="0" marL="0">
+            <a:pPr marL="0" indent="0" algn="l">
               <a:buNone/>
             </a:pPr>
             <a:r>
@@ -7987,7 +7646,7 @@
           <a:bodyPr wrap="square" rtlCol="0" anchor="ctr"/>
           <a:lstStyle/>
           <a:p>
-            <a:pPr algn="r" indent="0" marL="0">
+            <a:pPr marL="0" indent="0" algn="r">
               <a:buNone/>
             </a:pPr>
             <a:r>
@@ -8051,11 +7710,11 @@
           <a:bodyPr wrap="square" rtlCol="0" anchor="ctr"/>
           <a:lstStyle/>
           <a:p>
-            <a:pPr indent="0" marL="0">
-              <a:buNone/>
-            </a:pPr>
-            <a:r>
-              <a:rPr lang="en-US" sz="1200" b="1" spc="200" kern="0" dirty="0">
+            <a:pPr marL="0" indent="0">
+              <a:buNone/>
+            </a:pPr>
+            <a:r>
+              <a:rPr lang="en-US" sz="1200" b="1" kern="0" spc="200" dirty="0">
                 <a:solidFill>
                   <a:srgbClr val="F44749"/>
                 </a:solidFill>
@@ -8090,7 +7749,7 @@
           <a:bodyPr wrap="square" rtlCol="0" anchor="ctr"/>
           <a:lstStyle/>
           <a:p>
-            <a:pPr indent="0" marL="0">
+            <a:pPr marL="0" indent="0">
               <a:buNone/>
             </a:pPr>
             <a:r>
@@ -8149,7 +7808,7 @@
           <a:bodyPr wrap="square" rtlCol="0" anchor="ctr"/>
           <a:lstStyle/>
           <a:p>
-            <a:pPr algn="ctr" indent="0" marL="0">
+            <a:pPr marL="0" indent="0" algn="ctr">
               <a:buNone/>
             </a:pPr>
             <a:r>
@@ -8211,7 +7870,7 @@
           <a:bodyPr wrap="square" rtlCol="0" anchor="ctr"/>
           <a:lstStyle/>
           <a:p>
-            <a:pPr indent="0" marL="0">
+            <a:pPr marL="0" indent="0">
               <a:buNone/>
             </a:pPr>
             <a:r>
@@ -8250,7 +7909,7 @@
           <a:bodyPr wrap="square" rtlCol="0" anchor="ctr"/>
           <a:lstStyle/>
           <a:p>
-            <a:pPr indent="0" marL="0">
+            <a:pPr marL="0" indent="0">
               <a:buNone/>
             </a:pPr>
             <a:r>
@@ -8309,7 +7968,7 @@
           <a:bodyPr wrap="square" rtlCol="0" anchor="ctr"/>
           <a:lstStyle/>
           <a:p>
-            <a:pPr algn="ctr" indent="0" marL="0">
+            <a:pPr marL="0" indent="0" algn="ctr">
               <a:buNone/>
             </a:pPr>
             <a:r>
@@ -8371,7 +8030,7 @@
           <a:bodyPr wrap="square" rtlCol="0" anchor="ctr"/>
           <a:lstStyle/>
           <a:p>
-            <a:pPr indent="0" marL="0">
+            <a:pPr marL="0" indent="0">
               <a:buNone/>
             </a:pPr>
             <a:r>
@@ -8410,7 +8069,7 @@
           <a:bodyPr wrap="square" rtlCol="0" anchor="ctr"/>
           <a:lstStyle/>
           <a:p>
-            <a:pPr indent="0" marL="0">
+            <a:pPr marL="0" indent="0">
               <a:buNone/>
             </a:pPr>
             <a:r>
@@ -8469,7 +8128,7 @@
           <a:bodyPr wrap="square" rtlCol="0" anchor="ctr"/>
           <a:lstStyle/>
           <a:p>
-            <a:pPr algn="ctr" indent="0" marL="0">
+            <a:pPr marL="0" indent="0" algn="ctr">
               <a:buNone/>
             </a:pPr>
             <a:r>
@@ -8531,7 +8190,7 @@
           <a:bodyPr wrap="square" rtlCol="0" anchor="ctr"/>
           <a:lstStyle/>
           <a:p>
-            <a:pPr indent="0" marL="0">
+            <a:pPr marL="0" indent="0">
               <a:buNone/>
             </a:pPr>
             <a:r>
@@ -8570,7 +8229,7 @@
           <a:bodyPr wrap="square" rtlCol="0" anchor="ctr"/>
           <a:lstStyle/>
           <a:p>
-            <a:pPr indent="0" marL="0">
+            <a:pPr marL="0" indent="0">
               <a:buNone/>
             </a:pPr>
             <a:r>
@@ -8629,7 +8288,7 @@
           <a:bodyPr wrap="square" rtlCol="0" anchor="ctr"/>
           <a:lstStyle/>
           <a:p>
-            <a:pPr algn="ctr" indent="0" marL="0">
+            <a:pPr marL="0" indent="0" algn="ctr">
               <a:buNone/>
             </a:pPr>
             <a:r>
@@ -8691,7 +8350,7 @@
           <a:bodyPr wrap="square" rtlCol="0" anchor="ctr"/>
           <a:lstStyle/>
           <a:p>
-            <a:pPr indent="0" marL="0">
+            <a:pPr marL="0" indent="0">
               <a:buNone/>
             </a:pPr>
             <a:r>
@@ -8730,7 +8389,7 @@
           <a:bodyPr wrap="square" rtlCol="0" anchor="ctr"/>
           <a:lstStyle/>
           <a:p>
-            <a:pPr indent="0" marL="0">
+            <a:pPr marL="0" indent="0">
               <a:buNone/>
             </a:pPr>
             <a:r>
@@ -8789,7 +8448,7 @@
           <a:bodyPr wrap="square" rtlCol="0" anchor="ctr"/>
           <a:lstStyle/>
           <a:p>
-            <a:pPr algn="ctr" indent="0" marL="0">
+            <a:pPr marL="0" indent="0" algn="ctr">
               <a:buNone/>
             </a:pPr>
             <a:r>
@@ -8828,7 +8487,7 @@
           <a:bodyPr wrap="square" rtlCol="0" anchor="ctr"/>
           <a:lstStyle/>
           <a:p>
-            <a:pPr indent="0" marL="0">
+            <a:pPr marL="0" indent="0">
               <a:buNone/>
             </a:pPr>
             <a:r>
@@ -8867,7 +8526,7 @@
           <a:bodyPr wrap="square" rtlCol="0" anchor="ctr"/>
           <a:lstStyle/>
           <a:p>
-            <a:pPr indent="0" marL="0">
+            <a:pPr marL="0" indent="0">
               <a:buNone/>
             </a:pPr>
             <a:r>
@@ -8911,7 +8570,7 @@
             <a:prstDash val="solid"/>
           </a:ln>
           <a:effectLst>
-            <a:outerShdw sx="100000" sy="100000" kx="0" ky="0" algn="bl" rotWithShape="0" blurRad="228600" dist="76200" dir="5400000">
+            <a:outerShdw blurRad="228600" dist="76200" dir="5400000" algn="bl" rotWithShape="0">
               <a:srgbClr val="1B2733">
                 <a:alpha val="28000"/>
               </a:srgbClr>
@@ -9003,15 +8662,15 @@
       </p:sp>
       <p:pic>
         <p:nvPicPr>
-          <p:cNvPr id="33" name="Image 0" descr="C:\Users\liyon\AppData\Local\Temp\claude\C--Users-liyon-Personal-MCA-PROJECT-drug-project--2--drug-project-drugrecomendation\9da8fb70-ea4c-4cf2-953c-5bcd9131f7d4\scratchpad\pptgen\shots\02_login.png">    </p:cNvPr>
+          <p:cNvPr id="33" name="Image 0" descr="C:\Users\liyon\AppData\Local\Temp\claude\C--Users-liyon-Personal-MCA-PROJECT-drug-project--2--drug-project-drugrecomendation\9da8fb70-ea4c-4cf2-953c-5bcd9131f7d4\scratchpad\pptgen\shots\02_login.png"/>
           <p:cNvPicPr>
             <a:picLocks noChangeAspect="1"/>
           </p:cNvPicPr>
           <p:nvPr/>
         </p:nvPicPr>
         <p:blipFill>
-          <a:blip r:embed="rId1"/>
-          <a:srcRect l="0" r="0" t="0" b="0"/>
+          <a:blip r:embed="rId3"/>
+          <a:srcRect/>
           <a:stretch/>
         </p:blipFill>
         <p:spPr>
@@ -9050,7 +8709,7 @@
             <a:prstDash val="solid"/>
           </a:ln>
           <a:effectLst>
-            <a:outerShdw sx="100000" sy="100000" kx="0" ky="0" algn="bl" rotWithShape="0" blurRad="228600" dist="76200" dir="5400000">
+            <a:outerShdw blurRad="228600" dist="76200" dir="5400000" algn="bl" rotWithShape="0">
               <a:srgbClr val="1B2733">
                 <a:alpha val="28000"/>
               </a:srgbClr>
@@ -9142,15 +8801,15 @@
       </p:sp>
       <p:pic>
         <p:nvPicPr>
-          <p:cNvPr id="39" name="Image 1" descr="C:\Users\liyon\AppData\Local\Temp\claude\C--Users-liyon-Personal-MCA-PROJECT-drug-project--2--drug-project-drugrecomendation\9da8fb70-ea4c-4cf2-953c-5bcd9131f7d4\scratchpad\pptgen\shots\04_admin_companies.png">    </p:cNvPr>
+          <p:cNvPr id="39" name="Image 1" descr="C:\Users\liyon\AppData\Local\Temp\claude\C--Users-liyon-Personal-MCA-PROJECT-drug-project--2--drug-project-drugrecomendation\9da8fb70-ea4c-4cf2-953c-5bcd9131f7d4\scratchpad\pptgen\shots\04_admin_companies.png"/>
           <p:cNvPicPr>
             <a:picLocks noChangeAspect="1"/>
           </p:cNvPicPr>
           <p:nvPr/>
         </p:nvPicPr>
         <p:blipFill>
-          <a:blip r:embed="rId2"/>
-          <a:srcRect l="0" r="0" t="0" b="0"/>
+          <a:blip r:embed="rId4"/>
+          <a:srcRect/>
           <a:stretch/>
         </p:blipFill>
         <p:spPr>
@@ -9184,7 +8843,7 @@
           <a:bodyPr wrap="square" rtlCol="0" anchor="ctr"/>
           <a:lstStyle/>
           <a:p>
-            <a:pPr indent="0" marL="0">
+            <a:pPr marL="0" indent="0">
               <a:buNone/>
             </a:pPr>
             <a:r>
@@ -9223,7 +8882,7 @@
           <a:bodyPr wrap="square" rtlCol="0" anchor="ctr"/>
           <a:lstStyle/>
           <a:p>
-            <a:pPr algn="l" indent="0" marL="0">
+            <a:pPr marL="0" indent="0" algn="l">
               <a:buNone/>
             </a:pPr>
             <a:r>
@@ -9262,7 +8921,7 @@
           <a:bodyPr wrap="square" rtlCol="0" anchor="ctr"/>
           <a:lstStyle/>
           <a:p>
-            <a:pPr algn="r" indent="0" marL="0">
+            <a:pPr marL="0" indent="0" algn="r">
               <a:buNone/>
             </a:pPr>
             <a:r>
@@ -9296,6 +8955,7 @@
         <a:solidFill>
           <a:srgbClr val="0F2A43"/>
         </a:solidFill>
+        <a:effectLst/>
       </p:bgPr>
     </p:bg>
     <p:spTree>
@@ -9333,11 +8993,11 @@
           <a:bodyPr wrap="square" rtlCol="0" anchor="ctr"/>
           <a:lstStyle/>
           <a:p>
-            <a:pPr indent="0" marL="0">
-              <a:buNone/>
-            </a:pPr>
-            <a:r>
-              <a:rPr lang="en-US" sz="1200" b="1" spc="200" kern="0" dirty="0">
+            <a:pPr marL="0" indent="0">
+              <a:buNone/>
+            </a:pPr>
+            <a:r>
+              <a:rPr lang="en-US" sz="1200" b="1" kern="0" spc="200" dirty="0">
                 <a:solidFill>
                   <a:srgbClr val="F3AF24"/>
                 </a:solidFill>
@@ -9372,7 +9032,7 @@
           <a:bodyPr wrap="square" rtlCol="0" anchor="ctr"/>
           <a:lstStyle/>
           <a:p>
-            <a:pPr indent="0" marL="0">
+            <a:pPr marL="0" indent="0">
               <a:buNone/>
             </a:pPr>
             <a:r>
@@ -9439,311 +9099,7 @@
       </p:sp>
       <p:pic>
         <p:nvPicPr>
-          <p:cNvPr id="6" name="Image 0" descr="C:\Users\liyon\AppData\Local\Temp\claude\C--Users-liyon-Personal-MCA-PROJECT-drug-project--2--drug-project-drugrecomendation\9da8fb70-ea4c-4cf2-953c-5bcd9131f7d4\scratchpad\pptgen\icons\chat.png">    </p:cNvPr>
-          <p:cNvPicPr>
-            <a:picLocks noChangeAspect="1"/>
-          </p:cNvPicPr>
-          <p:nvPr/>
-        </p:nvPicPr>
-        <p:blipFill>
-          <a:blip r:embed="rId1"/>
-          <a:stretch>
-            <a:fillRect/>
-          </a:stretch>
-        </p:blipFill>
-        <p:spPr>
-          <a:xfrm>
-            <a:off x="1273576" y="2123968"/>
-            <a:ext cx="378927" cy="378927"/>
-          </a:xfrm>
-          <a:prstGeom prst="rect">
-            <a:avLst/>
-          </a:prstGeom>
-        </p:spPr>
-      </p:pic>
-      <p:sp>
-        <p:nvSpPr>
-          <p:cNvPr id="7" name="Text 4"/>
-          <p:cNvSpPr/>
-          <p:nvPr/>
-        </p:nvSpPr>
-        <p:spPr>
-          <a:xfrm>
-            <a:off x="694944" y="2715768"/>
-            <a:ext cx="1536192" cy="502920"/>
-          </a:xfrm>
-          <a:prstGeom prst="rect">
-            <a:avLst/>
-          </a:prstGeom>
-          <a:noFill/>
-          <a:ln/>
-        </p:spPr>
-        <p:txBody>
-          <a:bodyPr wrap="square" rtlCol="0" anchor="ctr"/>
-          <a:lstStyle/>
-          <a:p>
-            <a:pPr algn="ctr" indent="0" marL="0">
-              <a:lnSpc>
-                <a:spcPts val="1200"/>
-              </a:lnSpc>
-              <a:buNone/>
-            </a:pPr>
-            <a:r>
-              <a:rPr lang="en-US" sz="1050" b="1" dirty="0">
-                <a:solidFill>
-                  <a:srgbClr val="FFFFFF"/>
-                </a:solidFill>
-                <a:latin typeface="Calibri" pitchFamily="34" charset="0"/>
-                <a:ea typeface="Calibri" pitchFamily="34" charset="-122"/>
-                <a:cs typeface="Calibri" pitchFamily="34" charset="-120"/>
-              </a:rPr>
-              <a:t>Patient Review</a:t>
-            </a:r>
-            <a:endParaRPr lang="en-US" sz="1050" dirty="0"/>
-          </a:p>
-        </p:txBody>
-      </p:sp>
-      <p:sp>
-        <p:nvSpPr>
-          <p:cNvPr id="8" name="Text 5"/>
-          <p:cNvSpPr/>
-          <p:nvPr/>
-        </p:nvSpPr>
-        <p:spPr>
-          <a:xfrm>
-            <a:off x="2267712" y="2331720"/>
-            <a:ext cx="246888" cy="365760"/>
-          </a:xfrm>
-          <a:prstGeom prst="rect">
-            <a:avLst/>
-          </a:prstGeom>
-          <a:noFill/>
-          <a:ln/>
-        </p:spPr>
-        <p:txBody>
-          <a:bodyPr wrap="square" rtlCol="0" anchor="ctr"/>
-          <a:lstStyle/>
-          <a:p>
-            <a:pPr algn="ctr" indent="0" marL="0">
-              <a:buNone/>
-            </a:pPr>
-            <a:r>
-              <a:rPr lang="en-US" sz="1600" b="1" dirty="0">
-                <a:solidFill>
-                  <a:srgbClr val="F3AF24"/>
-                </a:solidFill>
-                <a:latin typeface="Calibri" pitchFamily="34" charset="0"/>
-                <a:ea typeface="Calibri" pitchFamily="34" charset="-122"/>
-                <a:cs typeface="Calibri" pitchFamily="34" charset="-120"/>
-              </a:rPr>
-              <a:t>→</a:t>
-            </a:r>
-            <a:endParaRPr lang="en-US" sz="1600" dirty="0"/>
-          </a:p>
-        </p:txBody>
-      </p:sp>
-      <p:sp>
-        <p:nvSpPr>
-          <p:cNvPr id="9" name="Shape 6"/>
-          <p:cNvSpPr/>
-          <p:nvPr/>
-        </p:nvSpPr>
-        <p:spPr>
-          <a:xfrm>
-            <a:off x="2487168" y="1874520"/>
-            <a:ext cx="1645920" cy="1417320"/>
-          </a:xfrm>
-          <a:prstGeom prst="roundRect">
-            <a:avLst>
-              <a:gd name="adj" fmla="val 5161"/>
-            </a:avLst>
-          </a:prstGeom>
-          <a:solidFill>
-            <a:srgbClr val="16324C"/>
-          </a:solidFill>
-          <a:ln w="12700">
-            <a:solidFill>
-              <a:srgbClr val="24486A"/>
-            </a:solidFill>
-            <a:prstDash val="solid"/>
-          </a:ln>
-        </p:spPr>
-      </p:sp>
-      <p:sp>
-        <p:nvSpPr>
-          <p:cNvPr id="10" name="Shape 7"/>
-          <p:cNvSpPr/>
-          <p:nvPr/>
-        </p:nvSpPr>
-        <p:spPr>
-          <a:xfrm>
-            <a:off x="3054096" y="2057400"/>
-            <a:ext cx="512064" cy="512064"/>
-          </a:xfrm>
-          <a:prstGeom prst="ellipse">
-            <a:avLst/>
-          </a:prstGeom>
-          <a:solidFill>
-            <a:srgbClr val="2F6E71"/>
-          </a:solidFill>
-          <a:ln/>
-        </p:spPr>
-      </p:sp>
-      <p:pic>
-        <p:nvPicPr>
-          <p:cNvPr id="11" name="Image 1" descr="C:\Users\liyon\AppData\Local\Temp\claude\C--Users-liyon-Personal-MCA-PROJECT-drug-project--2--drug-project-drugrecomendation\9da8fb70-ea4c-4cf2-953c-5bcd9131f7d4\scratchpad\pptgen\icons\search.png">    </p:cNvPr>
-          <p:cNvPicPr>
-            <a:picLocks noChangeAspect="1"/>
-          </p:cNvPicPr>
-          <p:nvPr/>
-        </p:nvPicPr>
-        <p:blipFill>
-          <a:blip r:embed="rId2"/>
-          <a:stretch>
-            <a:fillRect/>
-          </a:stretch>
-        </p:blipFill>
-        <p:spPr>
-          <a:xfrm>
-            <a:off x="3120664" y="2123968"/>
-            <a:ext cx="378927" cy="378927"/>
-          </a:xfrm>
-          <a:prstGeom prst="rect">
-            <a:avLst/>
-          </a:prstGeom>
-        </p:spPr>
-      </p:pic>
-      <p:sp>
-        <p:nvSpPr>
-          <p:cNvPr id="12" name="Text 8"/>
-          <p:cNvSpPr/>
-          <p:nvPr/>
-        </p:nvSpPr>
-        <p:spPr>
-          <a:xfrm>
-            <a:off x="2542032" y="2715768"/>
-            <a:ext cx="1536192" cy="502920"/>
-          </a:xfrm>
-          <a:prstGeom prst="rect">
-            <a:avLst/>
-          </a:prstGeom>
-          <a:noFill/>
-          <a:ln/>
-        </p:spPr>
-        <p:txBody>
-          <a:bodyPr wrap="square" rtlCol="0" anchor="ctr"/>
-          <a:lstStyle/>
-          <a:p>
-            <a:pPr algn="ctr" indent="0" marL="0">
-              <a:lnSpc>
-                <a:spcPts val="1200"/>
-              </a:lnSpc>
-              <a:buNone/>
-            </a:pPr>
-            <a:r>
-              <a:rPr lang="en-US" sz="1050" b="1" dirty="0">
-                <a:solidFill>
-                  <a:srgbClr val="FFFFFF"/>
-                </a:solidFill>
-                <a:latin typeface="Calibri" pitchFamily="34" charset="0"/>
-                <a:ea typeface="Calibri" pitchFamily="34" charset="-122"/>
-                <a:cs typeface="Calibri" pitchFamily="34" charset="-120"/>
-              </a:rPr>
-              <a:t>Tokenise &amp; POS-Tag</a:t>
-            </a:r>
-            <a:endParaRPr lang="en-US" sz="1050" dirty="0"/>
-          </a:p>
-        </p:txBody>
-      </p:sp>
-      <p:sp>
-        <p:nvSpPr>
-          <p:cNvPr id="13" name="Text 9"/>
-          <p:cNvSpPr/>
-          <p:nvPr/>
-        </p:nvSpPr>
-        <p:spPr>
-          <a:xfrm>
-            <a:off x="4114800" y="2331720"/>
-            <a:ext cx="246888" cy="365760"/>
-          </a:xfrm>
-          <a:prstGeom prst="rect">
-            <a:avLst/>
-          </a:prstGeom>
-          <a:noFill/>
-          <a:ln/>
-        </p:spPr>
-        <p:txBody>
-          <a:bodyPr wrap="square" rtlCol="0" anchor="ctr"/>
-          <a:lstStyle/>
-          <a:p>
-            <a:pPr algn="ctr" indent="0" marL="0">
-              <a:buNone/>
-            </a:pPr>
-            <a:r>
-              <a:rPr lang="en-US" sz="1600" b="1" dirty="0">
-                <a:solidFill>
-                  <a:srgbClr val="F3AF24"/>
-                </a:solidFill>
-                <a:latin typeface="Calibri" pitchFamily="34" charset="0"/>
-                <a:ea typeface="Calibri" pitchFamily="34" charset="-122"/>
-                <a:cs typeface="Calibri" pitchFamily="34" charset="-120"/>
-              </a:rPr>
-              <a:t>→</a:t>
-            </a:r>
-            <a:endParaRPr lang="en-US" sz="1600" dirty="0"/>
-          </a:p>
-        </p:txBody>
-      </p:sp>
-      <p:sp>
-        <p:nvSpPr>
-          <p:cNvPr id="14" name="Shape 10"/>
-          <p:cNvSpPr/>
-          <p:nvPr/>
-        </p:nvSpPr>
-        <p:spPr>
-          <a:xfrm>
-            <a:off x="4334256" y="1874520"/>
-            <a:ext cx="1645920" cy="1417320"/>
-          </a:xfrm>
-          <a:prstGeom prst="roundRect">
-            <a:avLst>
-              <a:gd name="adj" fmla="val 5161"/>
-            </a:avLst>
-          </a:prstGeom>
-          <a:solidFill>
-            <a:srgbClr val="16324C"/>
-          </a:solidFill>
-          <a:ln w="12700">
-            <a:solidFill>
-              <a:srgbClr val="24486A"/>
-            </a:solidFill>
-            <a:prstDash val="solid"/>
-          </a:ln>
-        </p:spPr>
-      </p:sp>
-      <p:sp>
-        <p:nvSpPr>
-          <p:cNvPr id="15" name="Shape 11"/>
-          <p:cNvSpPr/>
-          <p:nvPr/>
-        </p:nvSpPr>
-        <p:spPr>
-          <a:xfrm>
-            <a:off x="4901184" y="2057400"/>
-            <a:ext cx="512064" cy="512064"/>
-          </a:xfrm>
-          <a:prstGeom prst="ellipse">
-            <a:avLst/>
-          </a:prstGeom>
-          <a:solidFill>
-            <a:srgbClr val="2F6E71"/>
-          </a:solidFill>
-          <a:ln/>
-        </p:spPr>
-      </p:sp>
-      <p:pic>
-        <p:nvPicPr>
-          <p:cNvPr id="16" name="Image 2" descr="C:\Users\liyon\AppData\Local\Temp\claude\C--Users-liyon-Personal-MCA-PROJECT-drug-project--2--drug-project-drugrecomendation\9da8fb70-ea4c-4cf2-953c-5bcd9131f7d4\scratchpad\pptgen\icons\flask.png">    </p:cNvPr>
+          <p:cNvPr id="6" name="Image 0" descr="C:\Users\liyon\AppData\Local\Temp\claude\C--Users-liyon-Personal-MCA-PROJECT-drug-project--2--drug-project-drugrecomendation\9da8fb70-ea4c-4cf2-953c-5bcd9131f7d4\scratchpad\pptgen\icons\chat.png"/>
           <p:cNvPicPr>
             <a:picLocks noChangeAspect="1"/>
           </p:cNvPicPr>
@@ -9757,7 +9113,7 @@
         </p:blipFill>
         <p:spPr>
           <a:xfrm>
-            <a:off x="4967752" y="2123968"/>
+            <a:off x="1273576" y="2123968"/>
             <a:ext cx="378927" cy="378927"/>
           </a:xfrm>
           <a:prstGeom prst="rect">
@@ -9767,13 +9123,13 @@
       </p:pic>
       <p:sp>
         <p:nvSpPr>
-          <p:cNvPr id="17" name="Text 12"/>
-          <p:cNvSpPr/>
-          <p:nvPr/>
-        </p:nvSpPr>
-        <p:spPr>
-          <a:xfrm>
-            <a:off x="4389120" y="2715768"/>
+          <p:cNvPr id="7" name="Text 4"/>
+          <p:cNvSpPr/>
+          <p:nvPr/>
+        </p:nvSpPr>
+        <p:spPr>
+          <a:xfrm>
+            <a:off x="694944" y="2715768"/>
             <a:ext cx="1536192" cy="502920"/>
           </a:xfrm>
           <a:prstGeom prst="rect">
@@ -9786,7 +9142,7 @@
           <a:bodyPr wrap="square" rtlCol="0" anchor="ctr"/>
           <a:lstStyle/>
           <a:p>
-            <a:pPr algn="ctr" indent="0" marL="0">
+            <a:pPr marL="0" indent="0" algn="ctr">
               <a:lnSpc>
                 <a:spcPts val="1200"/>
               </a:lnSpc>
@@ -9801,7 +9157,7 @@
                 <a:ea typeface="Calibri" pitchFamily="34" charset="-122"/>
                 <a:cs typeface="Calibri" pitchFamily="34" charset="-120"/>
               </a:rPr>
-              <a:t>Stem (Porter Stemmer)</a:t>
+              <a:t>Patient Review</a:t>
             </a:r>
             <a:endParaRPr lang="en-US" sz="1050" dirty="0"/>
           </a:p>
@@ -9809,13 +9165,13 @@
       </p:sp>
       <p:sp>
         <p:nvSpPr>
-          <p:cNvPr id="18" name="Text 13"/>
-          <p:cNvSpPr/>
-          <p:nvPr/>
-        </p:nvSpPr>
-        <p:spPr>
-          <a:xfrm>
-            <a:off x="5961888" y="2331720"/>
+          <p:cNvPr id="8" name="Text 5"/>
+          <p:cNvSpPr/>
+          <p:nvPr/>
+        </p:nvSpPr>
+        <p:spPr>
+          <a:xfrm>
+            <a:off x="2267712" y="2331720"/>
             <a:ext cx="246888" cy="365760"/>
           </a:xfrm>
           <a:prstGeom prst="rect">
@@ -9828,7 +9184,7 @@
           <a:bodyPr wrap="square" rtlCol="0" anchor="ctr"/>
           <a:lstStyle/>
           <a:p>
-            <a:pPr algn="ctr" indent="0" marL="0">
+            <a:pPr marL="0" indent="0" algn="ctr">
               <a:buNone/>
             </a:pPr>
             <a:r>
@@ -9848,13 +9204,13 @@
       </p:sp>
       <p:sp>
         <p:nvSpPr>
-          <p:cNvPr id="19" name="Shape 14"/>
-          <p:cNvSpPr/>
-          <p:nvPr/>
-        </p:nvSpPr>
-        <p:spPr>
-          <a:xfrm>
-            <a:off x="6181344" y="1874520"/>
+          <p:cNvPr id="9" name="Shape 6"/>
+          <p:cNvSpPr/>
+          <p:nvPr/>
+        </p:nvSpPr>
+        <p:spPr>
+          <a:xfrm>
+            <a:off x="2487168" y="1874520"/>
             <a:ext cx="1645920" cy="1417320"/>
           </a:xfrm>
           <a:prstGeom prst="roundRect">
@@ -9875,13 +9231,13 @@
       </p:sp>
       <p:sp>
         <p:nvSpPr>
-          <p:cNvPr id="20" name="Shape 15"/>
-          <p:cNvSpPr/>
-          <p:nvPr/>
-        </p:nvSpPr>
-        <p:spPr>
-          <a:xfrm>
-            <a:off x="6748272" y="2057400"/>
+          <p:cNvPr id="10" name="Shape 7"/>
+          <p:cNvSpPr/>
+          <p:nvPr/>
+        </p:nvSpPr>
+        <p:spPr>
+          <a:xfrm>
+            <a:off x="3054096" y="2057400"/>
             <a:ext cx="512064" cy="512064"/>
           </a:xfrm>
           <a:prstGeom prst="ellipse">
@@ -9895,7 +9251,7 @@
       </p:sp>
       <p:pic>
         <p:nvPicPr>
-          <p:cNvPr id="21" name="Image 3" descr="C:\Users\liyon\AppData\Local\Temp\claude\C--Users-liyon-Personal-MCA-PROJECT-drug-project--2--drug-project-drugrecomendation\9da8fb70-ea4c-4cf2-953c-5bcd9131f7d4\scratchpad\pptgen\icons\exchange.png">    </p:cNvPr>
+          <p:cNvPr id="11" name="Image 1" descr="C:\Users\liyon\AppData\Local\Temp\claude\C--Users-liyon-Personal-MCA-PROJECT-drug-project--2--drug-project-drugrecomendation\9da8fb70-ea4c-4cf2-953c-5bcd9131f7d4\scratchpad\pptgen\icons\search.png"/>
           <p:cNvPicPr>
             <a:picLocks noChangeAspect="1"/>
           </p:cNvPicPr>
@@ -9909,7 +9265,7 @@
         </p:blipFill>
         <p:spPr>
           <a:xfrm>
-            <a:off x="6814840" y="2123968"/>
+            <a:off x="3120664" y="2123968"/>
             <a:ext cx="378927" cy="378927"/>
           </a:xfrm>
           <a:prstGeom prst="rect">
@@ -9919,13 +9275,13 @@
       </p:pic>
       <p:sp>
         <p:nvSpPr>
-          <p:cNvPr id="22" name="Text 16"/>
-          <p:cNvSpPr/>
-          <p:nvPr/>
-        </p:nvSpPr>
-        <p:spPr>
-          <a:xfrm>
-            <a:off x="6236208" y="2715768"/>
+          <p:cNvPr id="12" name="Text 8"/>
+          <p:cNvSpPr/>
+          <p:nvPr/>
+        </p:nvSpPr>
+        <p:spPr>
+          <a:xfrm>
+            <a:off x="2542032" y="2715768"/>
             <a:ext cx="1536192" cy="502920"/>
           </a:xfrm>
           <a:prstGeom prst="rect">
@@ -9938,7 +9294,7 @@
           <a:bodyPr wrap="square" rtlCol="0" anchor="ctr"/>
           <a:lstStyle/>
           <a:p>
-            <a:pPr algn="ctr" indent="0" marL="0">
+            <a:pPr marL="0" indent="0" algn="ctr">
               <a:lnSpc>
                 <a:spcPts val="1200"/>
               </a:lnSpc>
@@ -9953,7 +9309,7 @@
                 <a:ea typeface="Calibri" pitchFamily="34" charset="-122"/>
                 <a:cs typeface="Calibri" pitchFamily="34" charset="-120"/>
               </a:rPr>
-              <a:t>Match vs. Lexicon</a:t>
+              <a:t>Tokenise &amp; POS-Tag</a:t>
             </a:r>
             <a:endParaRPr lang="en-US" sz="1050" dirty="0"/>
           </a:p>
@@ -9961,13 +9317,13 @@
       </p:sp>
       <p:sp>
         <p:nvSpPr>
-          <p:cNvPr id="23" name="Text 17"/>
-          <p:cNvSpPr/>
-          <p:nvPr/>
-        </p:nvSpPr>
-        <p:spPr>
-          <a:xfrm>
-            <a:off x="7808976" y="2331720"/>
+          <p:cNvPr id="13" name="Text 9"/>
+          <p:cNvSpPr/>
+          <p:nvPr/>
+        </p:nvSpPr>
+        <p:spPr>
+          <a:xfrm>
+            <a:off x="4114800" y="2331720"/>
             <a:ext cx="246888" cy="365760"/>
           </a:xfrm>
           <a:prstGeom prst="rect">
@@ -9980,7 +9336,7 @@
           <a:bodyPr wrap="square" rtlCol="0" anchor="ctr"/>
           <a:lstStyle/>
           <a:p>
-            <a:pPr algn="ctr" indent="0" marL="0">
+            <a:pPr marL="0" indent="0" algn="ctr">
               <a:buNone/>
             </a:pPr>
             <a:r>
@@ -10000,13 +9356,13 @@
       </p:sp>
       <p:sp>
         <p:nvSpPr>
-          <p:cNvPr id="24" name="Shape 18"/>
-          <p:cNvSpPr/>
-          <p:nvPr/>
-        </p:nvSpPr>
-        <p:spPr>
-          <a:xfrm>
-            <a:off x="8028432" y="1874520"/>
+          <p:cNvPr id="14" name="Shape 10"/>
+          <p:cNvSpPr/>
+          <p:nvPr/>
+        </p:nvSpPr>
+        <p:spPr>
+          <a:xfrm>
+            <a:off x="4334256" y="1874520"/>
             <a:ext cx="1645920" cy="1417320"/>
           </a:xfrm>
           <a:prstGeom prst="roundRect">
@@ -10027,13 +9383,13 @@
       </p:sp>
       <p:sp>
         <p:nvSpPr>
-          <p:cNvPr id="25" name="Shape 19"/>
-          <p:cNvSpPr/>
-          <p:nvPr/>
-        </p:nvSpPr>
-        <p:spPr>
-          <a:xfrm>
-            <a:off x="8595360" y="2057400"/>
+          <p:cNvPr id="15" name="Shape 11"/>
+          <p:cNvSpPr/>
+          <p:nvPr/>
+        </p:nvSpPr>
+        <p:spPr>
+          <a:xfrm>
+            <a:off x="4901184" y="2057400"/>
             <a:ext cx="512064" cy="512064"/>
           </a:xfrm>
           <a:prstGeom prst="ellipse">
@@ -10047,7 +9403,7 @@
       </p:sp>
       <p:pic>
         <p:nvPicPr>
-          <p:cNvPr id="26" name="Image 4" descr="C:\Users\liyon\AppData\Local\Temp\claude\C--Users-liyon-Personal-MCA-PROJECT-drug-project--2--drug-project-drugrecomendation\9da8fb70-ea4c-4cf2-953c-5bcd9131f7d4\scratchpad\pptgen\icons\chart.png">    </p:cNvPr>
+          <p:cNvPr id="16" name="Image 2" descr="C:\Users\liyon\AppData\Local\Temp\claude\C--Users-liyon-Personal-MCA-PROJECT-drug-project--2--drug-project-drugrecomendation\9da8fb70-ea4c-4cf2-953c-5bcd9131f7d4\scratchpad\pptgen\icons\flask.png"/>
           <p:cNvPicPr>
             <a:picLocks noChangeAspect="1"/>
           </p:cNvPicPr>
@@ -10061,7 +9417,7 @@
         </p:blipFill>
         <p:spPr>
           <a:xfrm>
-            <a:off x="8661928" y="2123968"/>
+            <a:off x="4967752" y="2123968"/>
             <a:ext cx="378927" cy="378927"/>
           </a:xfrm>
           <a:prstGeom prst="rect">
@@ -10071,13 +9427,13 @@
       </p:pic>
       <p:sp>
         <p:nvSpPr>
-          <p:cNvPr id="27" name="Text 20"/>
-          <p:cNvSpPr/>
-          <p:nvPr/>
-        </p:nvSpPr>
-        <p:spPr>
-          <a:xfrm>
-            <a:off x="8083296" y="2715768"/>
+          <p:cNvPr id="17" name="Text 12"/>
+          <p:cNvSpPr/>
+          <p:nvPr/>
+        </p:nvSpPr>
+        <p:spPr>
+          <a:xfrm>
+            <a:off x="4389120" y="2715768"/>
             <a:ext cx="1536192" cy="502920"/>
           </a:xfrm>
           <a:prstGeom prst="rect">
@@ -10090,7 +9446,7 @@
           <a:bodyPr wrap="square" rtlCol="0" anchor="ctr"/>
           <a:lstStyle/>
           <a:p>
-            <a:pPr algn="ctr" indent="0" marL="0">
+            <a:pPr marL="0" indent="0" algn="ctr">
               <a:lnSpc>
                 <a:spcPts val="1200"/>
               </a:lnSpc>
@@ -10105,7 +9461,7 @@
                 <a:ea typeface="Calibri" pitchFamily="34" charset="-122"/>
                 <a:cs typeface="Calibri" pitchFamily="34" charset="-120"/>
               </a:rPr>
-              <a:t>Sentiment Score</a:t>
+              <a:t>Stem (Porter Stemmer)</a:t>
             </a:r>
             <a:endParaRPr lang="en-US" sz="1050" dirty="0"/>
           </a:p>
@@ -10113,13 +9469,13 @@
       </p:sp>
       <p:sp>
         <p:nvSpPr>
-          <p:cNvPr id="28" name="Text 21"/>
-          <p:cNvSpPr/>
-          <p:nvPr/>
-        </p:nvSpPr>
-        <p:spPr>
-          <a:xfrm>
-            <a:off x="9656064" y="2331720"/>
+          <p:cNvPr id="18" name="Text 13"/>
+          <p:cNvSpPr/>
+          <p:nvPr/>
+        </p:nvSpPr>
+        <p:spPr>
+          <a:xfrm>
+            <a:off x="5961888" y="2331720"/>
             <a:ext cx="246888" cy="365760"/>
           </a:xfrm>
           <a:prstGeom prst="rect">
@@ -10132,7 +9488,7 @@
           <a:bodyPr wrap="square" rtlCol="0" anchor="ctr"/>
           <a:lstStyle/>
           <a:p>
-            <a:pPr algn="ctr" indent="0" marL="0">
+            <a:pPr marL="0" indent="0" algn="ctr">
               <a:buNone/>
             </a:pPr>
             <a:r>
@@ -10152,13 +9508,13 @@
       </p:sp>
       <p:sp>
         <p:nvSpPr>
-          <p:cNvPr id="29" name="Shape 22"/>
-          <p:cNvSpPr/>
-          <p:nvPr/>
-        </p:nvSpPr>
-        <p:spPr>
-          <a:xfrm>
-            <a:off x="9875520" y="1874520"/>
+          <p:cNvPr id="19" name="Shape 14"/>
+          <p:cNvSpPr/>
+          <p:nvPr/>
+        </p:nvSpPr>
+        <p:spPr>
+          <a:xfrm>
+            <a:off x="6181344" y="1874520"/>
             <a:ext cx="1645920" cy="1417320"/>
           </a:xfrm>
           <a:prstGeom prst="roundRect">
@@ -10179,27 +9535,27 @@
       </p:sp>
       <p:sp>
         <p:nvSpPr>
-          <p:cNvPr id="30" name="Shape 23"/>
-          <p:cNvSpPr/>
-          <p:nvPr/>
-        </p:nvSpPr>
-        <p:spPr>
-          <a:xfrm>
-            <a:off x="10442448" y="2057400"/>
+          <p:cNvPr id="20" name="Shape 15"/>
+          <p:cNvSpPr/>
+          <p:nvPr/>
+        </p:nvSpPr>
+        <p:spPr>
+          <a:xfrm>
+            <a:off x="6748272" y="2057400"/>
             <a:ext cx="512064" cy="512064"/>
           </a:xfrm>
           <a:prstGeom prst="ellipse">
             <a:avLst/>
           </a:prstGeom>
           <a:solidFill>
-            <a:srgbClr val="F44749"/>
+            <a:srgbClr val="2F6E71"/>
           </a:solidFill>
           <a:ln/>
         </p:spPr>
       </p:sp>
       <p:pic>
         <p:nvPicPr>
-          <p:cNvPr id="31" name="Image 5" descr="C:\Users\liyon\AppData\Local\Temp\claude\C--Users-liyon-Personal-MCA-PROJECT-drug-project--2--drug-project-drugrecomendation\9da8fb70-ea4c-4cf2-953c-5bcd9131f7d4\scratchpad\pptgen\icons\star.png">    </p:cNvPr>
+          <p:cNvPr id="21" name="Image 3" descr="C:\Users\liyon\AppData\Local\Temp\claude\C--Users-liyon-Personal-MCA-PROJECT-drug-project--2--drug-project-drugrecomendation\9da8fb70-ea4c-4cf2-953c-5bcd9131f7d4\scratchpad\pptgen\icons\exchange.png"/>
           <p:cNvPicPr>
             <a:picLocks noChangeAspect="1"/>
           </p:cNvPicPr>
@@ -10213,7 +9569,7 @@
         </p:blipFill>
         <p:spPr>
           <a:xfrm>
-            <a:off x="10509016" y="2123968"/>
+            <a:off x="6814840" y="2123968"/>
             <a:ext cx="378927" cy="378927"/>
           </a:xfrm>
           <a:prstGeom prst="rect">
@@ -10223,13 +9579,13 @@
       </p:pic>
       <p:sp>
         <p:nvSpPr>
-          <p:cNvPr id="32" name="Text 24"/>
-          <p:cNvSpPr/>
-          <p:nvPr/>
-        </p:nvSpPr>
-        <p:spPr>
-          <a:xfrm>
-            <a:off x="9930384" y="2715768"/>
+          <p:cNvPr id="22" name="Text 16"/>
+          <p:cNvSpPr/>
+          <p:nvPr/>
+        </p:nvSpPr>
+        <p:spPr>
+          <a:xfrm>
+            <a:off x="6236208" y="2715768"/>
             <a:ext cx="1536192" cy="502920"/>
           </a:xfrm>
           <a:prstGeom prst="rect">
@@ -10242,7 +9598,7 @@
           <a:bodyPr wrap="square" rtlCol="0" anchor="ctr"/>
           <a:lstStyle/>
           <a:p>
-            <a:pPr algn="ctr" indent="0" marL="0">
+            <a:pPr marL="0" indent="0" algn="ctr">
               <a:lnSpc>
                 <a:spcPts val="1200"/>
               </a:lnSpc>
@@ -10257,7 +9613,7 @@
                 <a:ea typeface="Calibri" pitchFamily="34" charset="-122"/>
                 <a:cs typeface="Calibri" pitchFamily="34" charset="-120"/>
               </a:rPr>
-              <a:t>1–5 Star Rating</a:t>
+              <a:t>Match vs. Lexicon</a:t>
             </a:r>
             <a:endParaRPr lang="en-US" sz="1050" dirty="0"/>
           </a:p>
@@ -10265,64 +9621,61 @@
       </p:sp>
       <p:sp>
         <p:nvSpPr>
-          <p:cNvPr id="33" name="Text 25"/>
-          <p:cNvSpPr/>
-          <p:nvPr/>
-        </p:nvSpPr>
-        <p:spPr>
-          <a:xfrm>
-            <a:off x="640080" y="3611880"/>
-            <a:ext cx="6858000" cy="1417320"/>
-          </a:xfrm>
-          <a:prstGeom prst="rect">
-            <a:avLst/>
-          </a:prstGeom>
-          <a:noFill/>
-          <a:ln/>
-        </p:spPr>
-        <p:txBody>
-          <a:bodyPr wrap="square" rtlCol="0" anchor="ctr"/>
-          <a:lstStyle/>
-          <a:p>
-            <a:pPr indent="0" marL="0">
-              <a:lnSpc>
-                <a:spcPts val="1900"/>
-              </a:lnSpc>
-              <a:buNone/>
-            </a:pPr>
-            <a:r>
-              <a:rPr lang="en-US" sz="1300" dirty="0">
-                <a:solidFill>
-                  <a:srgbClr val="C9D6E3"/>
-                </a:solidFill>
-                <a:latin typeface="Calibri" pitchFamily="34" charset="0"/>
-                <a:ea typeface="Calibri" pitchFamily="34" charset="-122"/>
-                <a:cs typeface="Calibri" pitchFamily="34" charset="-120"/>
-              </a:rPr>
-              <a:t>Every review is tokenised and POS-tagged with NLTK, reduced to root words with a Porter Stemmer, then matched word-by-word against curated positive / negative lexicons. The resulting sentiment score is bucketed into a 1–5 star rating — stored automatically, without the patient ever picking a star themselves.</a:t>
-            </a:r>
-            <a:endParaRPr lang="en-US" sz="1300" dirty="0"/>
-          </a:p>
-        </p:txBody>
-      </p:sp>
-      <p:sp>
-        <p:nvSpPr>
-          <p:cNvPr id="34" name="Shape 26"/>
-          <p:cNvSpPr/>
-          <p:nvPr/>
-        </p:nvSpPr>
-        <p:spPr>
-          <a:xfrm>
-            <a:off x="640080" y="5166360"/>
-            <a:ext cx="6858000" cy="960120"/>
+          <p:cNvPr id="23" name="Text 17"/>
+          <p:cNvSpPr/>
+          <p:nvPr/>
+        </p:nvSpPr>
+        <p:spPr>
+          <a:xfrm>
+            <a:off x="7808976" y="2331720"/>
+            <a:ext cx="246888" cy="365760"/>
+          </a:xfrm>
+          <a:prstGeom prst="rect">
+            <a:avLst/>
+          </a:prstGeom>
+          <a:noFill/>
+          <a:ln/>
+        </p:spPr>
+        <p:txBody>
+          <a:bodyPr wrap="square" rtlCol="0" anchor="ctr"/>
+          <a:lstStyle/>
+          <a:p>
+            <a:pPr marL="0" indent="0" algn="ctr">
+              <a:buNone/>
+            </a:pPr>
+            <a:r>
+              <a:rPr lang="en-US" sz="1600" b="1" dirty="0">
+                <a:solidFill>
+                  <a:srgbClr val="F3AF24"/>
+                </a:solidFill>
+                <a:latin typeface="Calibri" pitchFamily="34" charset="0"/>
+                <a:ea typeface="Calibri" pitchFamily="34" charset="-122"/>
+                <a:cs typeface="Calibri" pitchFamily="34" charset="-120"/>
+              </a:rPr>
+              <a:t>→</a:t>
+            </a:r>
+            <a:endParaRPr lang="en-US" sz="1600" dirty="0"/>
+          </a:p>
+        </p:txBody>
+      </p:sp>
+      <p:sp>
+        <p:nvSpPr>
+          <p:cNvPr id="24" name="Shape 18"/>
+          <p:cNvSpPr/>
+          <p:nvPr/>
+        </p:nvSpPr>
+        <p:spPr>
+          <a:xfrm>
+            <a:off x="8028432" y="1874520"/>
+            <a:ext cx="1645920" cy="1417320"/>
           </a:xfrm>
           <a:prstGeom prst="roundRect">
             <a:avLst>
-              <a:gd name="adj" fmla="val 7619"/>
+              <a:gd name="adj" fmla="val 5161"/>
             </a:avLst>
           </a:prstGeom>
           <a:solidFill>
-            <a:srgbClr val="0A1D2E"/>
+            <a:srgbClr val="16324C"/>
           </a:solidFill>
           <a:ln w="12700">
             <a:solidFill>
@@ -10334,6 +9687,313 @@
       </p:sp>
       <p:sp>
         <p:nvSpPr>
+          <p:cNvPr id="25" name="Shape 19"/>
+          <p:cNvSpPr/>
+          <p:nvPr/>
+        </p:nvSpPr>
+        <p:spPr>
+          <a:xfrm>
+            <a:off x="8595360" y="2057400"/>
+            <a:ext cx="512064" cy="512064"/>
+          </a:xfrm>
+          <a:prstGeom prst="ellipse">
+            <a:avLst/>
+          </a:prstGeom>
+          <a:solidFill>
+            <a:srgbClr val="2F6E71"/>
+          </a:solidFill>
+          <a:ln/>
+        </p:spPr>
+      </p:sp>
+      <p:pic>
+        <p:nvPicPr>
+          <p:cNvPr id="26" name="Image 4" descr="C:\Users\liyon\AppData\Local\Temp\claude\C--Users-liyon-Personal-MCA-PROJECT-drug-project--2--drug-project-drugrecomendation\9da8fb70-ea4c-4cf2-953c-5bcd9131f7d4\scratchpad\pptgen\icons\chart.png"/>
+          <p:cNvPicPr>
+            <a:picLocks noChangeAspect="1"/>
+          </p:cNvPicPr>
+          <p:nvPr/>
+        </p:nvPicPr>
+        <p:blipFill>
+          <a:blip r:embed="rId7"/>
+          <a:stretch>
+            <a:fillRect/>
+          </a:stretch>
+        </p:blipFill>
+        <p:spPr>
+          <a:xfrm>
+            <a:off x="8661928" y="2123968"/>
+            <a:ext cx="378927" cy="378927"/>
+          </a:xfrm>
+          <a:prstGeom prst="rect">
+            <a:avLst/>
+          </a:prstGeom>
+        </p:spPr>
+      </p:pic>
+      <p:sp>
+        <p:nvSpPr>
+          <p:cNvPr id="27" name="Text 20"/>
+          <p:cNvSpPr/>
+          <p:nvPr/>
+        </p:nvSpPr>
+        <p:spPr>
+          <a:xfrm>
+            <a:off x="8083296" y="2715768"/>
+            <a:ext cx="1536192" cy="502920"/>
+          </a:xfrm>
+          <a:prstGeom prst="rect">
+            <a:avLst/>
+          </a:prstGeom>
+          <a:noFill/>
+          <a:ln/>
+        </p:spPr>
+        <p:txBody>
+          <a:bodyPr wrap="square" rtlCol="0" anchor="ctr"/>
+          <a:lstStyle/>
+          <a:p>
+            <a:pPr marL="0" indent="0" algn="ctr">
+              <a:lnSpc>
+                <a:spcPts val="1200"/>
+              </a:lnSpc>
+              <a:buNone/>
+            </a:pPr>
+            <a:r>
+              <a:rPr lang="en-US" sz="1050" b="1" dirty="0">
+                <a:solidFill>
+                  <a:srgbClr val="FFFFFF"/>
+                </a:solidFill>
+                <a:latin typeface="Calibri" pitchFamily="34" charset="0"/>
+                <a:ea typeface="Calibri" pitchFamily="34" charset="-122"/>
+                <a:cs typeface="Calibri" pitchFamily="34" charset="-120"/>
+              </a:rPr>
+              <a:t>Sentiment Score</a:t>
+            </a:r>
+            <a:endParaRPr lang="en-US" sz="1050" dirty="0"/>
+          </a:p>
+        </p:txBody>
+      </p:sp>
+      <p:sp>
+        <p:nvSpPr>
+          <p:cNvPr id="28" name="Text 21"/>
+          <p:cNvSpPr/>
+          <p:nvPr/>
+        </p:nvSpPr>
+        <p:spPr>
+          <a:xfrm>
+            <a:off x="9656064" y="2331720"/>
+            <a:ext cx="246888" cy="365760"/>
+          </a:xfrm>
+          <a:prstGeom prst="rect">
+            <a:avLst/>
+          </a:prstGeom>
+          <a:noFill/>
+          <a:ln/>
+        </p:spPr>
+        <p:txBody>
+          <a:bodyPr wrap="square" rtlCol="0" anchor="ctr"/>
+          <a:lstStyle/>
+          <a:p>
+            <a:pPr marL="0" indent="0" algn="ctr">
+              <a:buNone/>
+            </a:pPr>
+            <a:r>
+              <a:rPr lang="en-US" sz="1600" b="1" dirty="0">
+                <a:solidFill>
+                  <a:srgbClr val="F3AF24"/>
+                </a:solidFill>
+                <a:latin typeface="Calibri" pitchFamily="34" charset="0"/>
+                <a:ea typeface="Calibri" pitchFamily="34" charset="-122"/>
+                <a:cs typeface="Calibri" pitchFamily="34" charset="-120"/>
+              </a:rPr>
+              <a:t>→</a:t>
+            </a:r>
+            <a:endParaRPr lang="en-US" sz="1600" dirty="0"/>
+          </a:p>
+        </p:txBody>
+      </p:sp>
+      <p:sp>
+        <p:nvSpPr>
+          <p:cNvPr id="29" name="Shape 22"/>
+          <p:cNvSpPr/>
+          <p:nvPr/>
+        </p:nvSpPr>
+        <p:spPr>
+          <a:xfrm>
+            <a:off x="9875520" y="1874520"/>
+            <a:ext cx="1645920" cy="1417320"/>
+          </a:xfrm>
+          <a:prstGeom prst="roundRect">
+            <a:avLst>
+              <a:gd name="adj" fmla="val 5161"/>
+            </a:avLst>
+          </a:prstGeom>
+          <a:solidFill>
+            <a:srgbClr val="16324C"/>
+          </a:solidFill>
+          <a:ln w="12700">
+            <a:solidFill>
+              <a:srgbClr val="24486A"/>
+            </a:solidFill>
+            <a:prstDash val="solid"/>
+          </a:ln>
+        </p:spPr>
+      </p:sp>
+      <p:sp>
+        <p:nvSpPr>
+          <p:cNvPr id="30" name="Shape 23"/>
+          <p:cNvSpPr/>
+          <p:nvPr/>
+        </p:nvSpPr>
+        <p:spPr>
+          <a:xfrm>
+            <a:off x="10442448" y="2057400"/>
+            <a:ext cx="512064" cy="512064"/>
+          </a:xfrm>
+          <a:prstGeom prst="ellipse">
+            <a:avLst/>
+          </a:prstGeom>
+          <a:solidFill>
+            <a:srgbClr val="F44749"/>
+          </a:solidFill>
+          <a:ln/>
+        </p:spPr>
+      </p:sp>
+      <p:pic>
+        <p:nvPicPr>
+          <p:cNvPr id="31" name="Image 5" descr="C:\Users\liyon\AppData\Local\Temp\claude\C--Users-liyon-Personal-MCA-PROJECT-drug-project--2--drug-project-drugrecomendation\9da8fb70-ea4c-4cf2-953c-5bcd9131f7d4\scratchpad\pptgen\icons\star.png"/>
+          <p:cNvPicPr>
+            <a:picLocks noChangeAspect="1"/>
+          </p:cNvPicPr>
+          <p:nvPr/>
+        </p:nvPicPr>
+        <p:blipFill>
+          <a:blip r:embed="rId8"/>
+          <a:stretch>
+            <a:fillRect/>
+          </a:stretch>
+        </p:blipFill>
+        <p:spPr>
+          <a:xfrm>
+            <a:off x="10509016" y="2123968"/>
+            <a:ext cx="378927" cy="378927"/>
+          </a:xfrm>
+          <a:prstGeom prst="rect">
+            <a:avLst/>
+          </a:prstGeom>
+        </p:spPr>
+      </p:pic>
+      <p:sp>
+        <p:nvSpPr>
+          <p:cNvPr id="32" name="Text 24"/>
+          <p:cNvSpPr/>
+          <p:nvPr/>
+        </p:nvSpPr>
+        <p:spPr>
+          <a:xfrm>
+            <a:off x="9930384" y="2715768"/>
+            <a:ext cx="1536192" cy="502920"/>
+          </a:xfrm>
+          <a:prstGeom prst="rect">
+            <a:avLst/>
+          </a:prstGeom>
+          <a:noFill/>
+          <a:ln/>
+        </p:spPr>
+        <p:txBody>
+          <a:bodyPr wrap="square" rtlCol="0" anchor="ctr"/>
+          <a:lstStyle/>
+          <a:p>
+            <a:pPr marL="0" indent="0" algn="ctr">
+              <a:lnSpc>
+                <a:spcPts val="1200"/>
+              </a:lnSpc>
+              <a:buNone/>
+            </a:pPr>
+            <a:r>
+              <a:rPr lang="en-US" sz="1050" b="1" dirty="0">
+                <a:solidFill>
+                  <a:srgbClr val="FFFFFF"/>
+                </a:solidFill>
+                <a:latin typeface="Calibri" pitchFamily="34" charset="0"/>
+                <a:ea typeface="Calibri" pitchFamily="34" charset="-122"/>
+                <a:cs typeface="Calibri" pitchFamily="34" charset="-120"/>
+              </a:rPr>
+              <a:t>1–5 Star Rating</a:t>
+            </a:r>
+            <a:endParaRPr lang="en-US" sz="1050" dirty="0"/>
+          </a:p>
+        </p:txBody>
+      </p:sp>
+      <p:sp>
+        <p:nvSpPr>
+          <p:cNvPr id="33" name="Text 25"/>
+          <p:cNvSpPr/>
+          <p:nvPr/>
+        </p:nvSpPr>
+        <p:spPr>
+          <a:xfrm>
+            <a:off x="640080" y="3611880"/>
+            <a:ext cx="6858000" cy="1417320"/>
+          </a:xfrm>
+          <a:prstGeom prst="rect">
+            <a:avLst/>
+          </a:prstGeom>
+          <a:noFill/>
+          <a:ln/>
+        </p:spPr>
+        <p:txBody>
+          <a:bodyPr wrap="square" rtlCol="0" anchor="ctr"/>
+          <a:lstStyle/>
+          <a:p>
+            <a:pPr marL="0" indent="0">
+              <a:lnSpc>
+                <a:spcPts val="1900"/>
+              </a:lnSpc>
+              <a:buNone/>
+            </a:pPr>
+            <a:r>
+              <a:rPr lang="en-US" sz="1300" dirty="0">
+                <a:solidFill>
+                  <a:srgbClr val="C9D6E3"/>
+                </a:solidFill>
+                <a:latin typeface="Calibri" pitchFamily="34" charset="0"/>
+                <a:ea typeface="Calibri" pitchFamily="34" charset="-122"/>
+                <a:cs typeface="Calibri" pitchFamily="34" charset="-120"/>
+              </a:rPr>
+              <a:t>Every review is tokenised and POS-tagged with NLTK, reduced to root words with a Porter Stemmer, then matched word-by-word against curated positive / negative lexicons. The resulting sentiment score is bucketed into a 1–5 star rating — stored automatically, without the patient ever picking a star themselves.</a:t>
+            </a:r>
+            <a:endParaRPr lang="en-US" sz="1300" dirty="0"/>
+          </a:p>
+        </p:txBody>
+      </p:sp>
+      <p:sp>
+        <p:nvSpPr>
+          <p:cNvPr id="34" name="Shape 26"/>
+          <p:cNvSpPr/>
+          <p:nvPr/>
+        </p:nvSpPr>
+        <p:spPr>
+          <a:xfrm>
+            <a:off x="640080" y="5166360"/>
+            <a:ext cx="6858000" cy="960120"/>
+          </a:xfrm>
+          <a:prstGeom prst="roundRect">
+            <a:avLst>
+              <a:gd name="adj" fmla="val 7619"/>
+            </a:avLst>
+          </a:prstGeom>
+          <a:solidFill>
+            <a:srgbClr val="0A1D2E"/>
+          </a:solidFill>
+          <a:ln w="12700">
+            <a:solidFill>
+              <a:srgbClr val="24486A"/>
+            </a:solidFill>
+            <a:prstDash val="solid"/>
+          </a:ln>
+        </p:spPr>
+      </p:sp>
+      <p:sp>
+        <p:nvSpPr>
           <p:cNvPr id="35" name="Text 27"/>
           <p:cNvSpPr/>
           <p:nvPr/>
@@ -10353,7 +10013,7 @@
           <a:bodyPr wrap="square" rtlCol="0" anchor="ctr"/>
           <a:lstStyle/>
           <a:p>
-            <a:pPr indent="0" marL="0">
+            <a:pPr marL="0" indent="0">
               <a:lnSpc>
                 <a:spcPts val="1700"/>
               </a:lnSpc>
@@ -10370,12 +10030,6 @@
               </a:rPr>
               <a:t>Recommendation rule:  </a:t>
             </a:r>
-            <a:pPr indent="0" marL="0">
-              <a:lnSpc>
-                <a:spcPts val="1700"/>
-              </a:lnSpc>
-              <a:buNone/>
-            </a:pPr>
             <a:r>
               <a:rPr lang="en-US" sz="1250" b="1" dirty="0">
                 <a:solidFill>
@@ -10387,12 +10041,6 @@
               </a:rPr>
               <a:t>search results are ranked by AVG(rating) DESC</a:t>
             </a:r>
-            <a:pPr indent="0" marL="0">
-              <a:lnSpc>
-                <a:spcPts val="1700"/>
-              </a:lnSpc>
-              <a:buNone/>
-            </a:pPr>
             <a:r>
               <a:rPr lang="en-US" sz="1250" dirty="0">
                 <a:solidFill>
@@ -10434,7 +10082,7 @@
             <a:prstDash val="solid"/>
           </a:ln>
           <a:effectLst>
-            <a:outerShdw sx="100000" sy="100000" kx="0" ky="0" algn="bl" rotWithShape="0" blurRad="228600" dist="76200" dir="5400000">
+            <a:outerShdw blurRad="228600" dist="76200" dir="5400000" algn="bl" rotWithShape="0">
               <a:srgbClr val="1B2733">
                 <a:alpha val="28000"/>
               </a:srgbClr>
@@ -10526,15 +10174,15 @@
       </p:sp>
       <p:pic>
         <p:nvPicPr>
-          <p:cNvPr id="41" name="Image 6" descr="C:\Users\liyon\AppData\Local\Temp\claude\C--Users-liyon-Personal-MCA-PROJECT-drug-project--2--drug-project-drugrecomendation\9da8fb70-ea4c-4cf2-953c-5bcd9131f7d4\scratchpad\pptgen\shots\06_user_doctorlist.png">    </p:cNvPr>
+          <p:cNvPr id="41" name="Image 6" descr="C:\Users\liyon\AppData\Local\Temp\claude\C--Users-liyon-Personal-MCA-PROJECT-drug-project--2--drug-project-drugrecomendation\9da8fb70-ea4c-4cf2-953c-5bcd9131f7d4\scratchpad\pptgen\shots\06_user_doctorlist.png"/>
           <p:cNvPicPr>
             <a:picLocks noChangeAspect="1"/>
           </p:cNvPicPr>
           <p:nvPr/>
         </p:nvPicPr>
         <p:blipFill>
-          <a:blip r:embed="rId7"/>
-          <a:srcRect l="0" r="0" t="0" b="0"/>
+          <a:blip r:embed="rId9"/>
+          <a:srcRect/>
           <a:stretch/>
         </p:blipFill>
         <p:spPr>
@@ -10568,7 +10216,7 @@
           <a:bodyPr wrap="square" rtlCol="0" anchor="ctr"/>
           <a:lstStyle/>
           <a:p>
-            <a:pPr algn="l" indent="0" marL="0">
+            <a:pPr marL="0" indent="0" algn="l">
               <a:buNone/>
             </a:pPr>
             <a:r>
@@ -10607,7 +10255,7 @@
           <a:bodyPr wrap="square" rtlCol="0" anchor="ctr"/>
           <a:lstStyle/>
           <a:p>
-            <a:pPr algn="r" indent="0" marL="0">
+            <a:pPr marL="0" indent="0" algn="r">
               <a:buNone/>
             </a:pPr>
             <a:r>
@@ -10671,11 +10319,11 @@
           <a:bodyPr wrap="square" rtlCol="0" anchor="ctr"/>
           <a:lstStyle/>
           <a:p>
-            <a:pPr indent="0" marL="0">
-              <a:buNone/>
-            </a:pPr>
-            <a:r>
-              <a:rPr lang="en-US" sz="1200" b="1" spc="200" kern="0" dirty="0">
+            <a:pPr marL="0" indent="0">
+              <a:buNone/>
+            </a:pPr>
+            <a:r>
+              <a:rPr lang="en-US" sz="1200" b="1" kern="0" spc="200" dirty="0">
                 <a:solidFill>
                   <a:srgbClr val="F44749"/>
                 </a:solidFill>
@@ -10710,7 +10358,7 @@
           <a:bodyPr wrap="square" rtlCol="0" anchor="ctr"/>
           <a:lstStyle/>
           <a:p>
-            <a:pPr indent="0" marL="0">
+            <a:pPr marL="0" indent="0">
               <a:buNone/>
             </a:pPr>
             <a:r>
@@ -10777,251 +10425,7 @@
       </p:sp>
       <p:pic>
         <p:nvPicPr>
-          <p:cNvPr id="6" name="Image 0" descr="C:\Users\liyon\AppData\Local\Temp\claude\C--Users-liyon-Personal-MCA-PROJECT-drug-project--2--drug-project-drugrecomendation\9da8fb70-ea4c-4cf2-953c-5bcd9131f7d4\scratchpad\pptgen\icons\patient.png">    </p:cNvPr>
-          <p:cNvPicPr>
-            <a:picLocks noChangeAspect="1"/>
-          </p:cNvPicPr>
-          <p:nvPr/>
-        </p:nvPicPr>
-        <p:blipFill>
-          <a:blip r:embed="rId1"/>
-          <a:stretch>
-            <a:fillRect/>
-          </a:stretch>
-        </p:blipFill>
-        <p:spPr>
-          <a:xfrm>
-            <a:off x="1106881" y="2158441"/>
-            <a:ext cx="575158" cy="575158"/>
-          </a:xfrm>
-          <a:prstGeom prst="rect">
-            <a:avLst/>
-          </a:prstGeom>
-        </p:spPr>
-      </p:pic>
-      <p:sp>
-        <p:nvSpPr>
-          <p:cNvPr id="7" name="Text 4"/>
-          <p:cNvSpPr/>
-          <p:nvPr/>
-        </p:nvSpPr>
-        <p:spPr>
-          <a:xfrm>
-            <a:off x="1920240" y="2103120"/>
-            <a:ext cx="1737360" cy="365760"/>
-          </a:xfrm>
-          <a:prstGeom prst="rect">
-            <a:avLst/>
-          </a:prstGeom>
-          <a:noFill/>
-          <a:ln/>
-        </p:spPr>
-        <p:txBody>
-          <a:bodyPr wrap="square" rtlCol="0" anchor="ctr"/>
-          <a:lstStyle/>
-          <a:p>
-            <a:pPr indent="0" marL="0">
-              <a:buNone/>
-            </a:pPr>
-            <a:r>
-              <a:rPr lang="en-US" sz="1400" b="1" dirty="0">
-                <a:solidFill>
-                  <a:srgbClr val="0F2A43"/>
-                </a:solidFill>
-                <a:latin typeface="Calibri" pitchFamily="34" charset="0"/>
-                <a:ea typeface="Calibri" pitchFamily="34" charset="-122"/>
-                <a:cs typeface="Calibri" pitchFamily="34" charset="-120"/>
-              </a:rPr>
-              <a:t>Patient</a:t>
-            </a:r>
-            <a:endParaRPr lang="en-US" sz="1400" dirty="0"/>
-          </a:p>
-        </p:txBody>
-      </p:sp>
-      <p:sp>
-        <p:nvSpPr>
-          <p:cNvPr id="8" name="Text 5"/>
-          <p:cNvSpPr/>
-          <p:nvPr/>
-        </p:nvSpPr>
-        <p:spPr>
-          <a:xfrm>
-            <a:off x="1920240" y="2414016"/>
-            <a:ext cx="1737360" cy="274320"/>
-          </a:xfrm>
-          <a:prstGeom prst="rect">
-            <a:avLst/>
-          </a:prstGeom>
-          <a:noFill/>
-          <a:ln/>
-        </p:spPr>
-        <p:txBody>
-          <a:bodyPr wrap="square" rtlCol="0" anchor="ctr"/>
-          <a:lstStyle/>
-          <a:p>
-            <a:pPr indent="0" marL="0">
-              <a:buNone/>
-            </a:pPr>
-            <a:r>
-              <a:rPr lang="en-US" sz="1050" dirty="0">
-                <a:solidFill>
-                  <a:srgbClr val="5B6B7A"/>
-                </a:solidFill>
-                <a:latin typeface="Calibri" pitchFamily="34" charset="0"/>
-                <a:ea typeface="Calibri" pitchFamily="34" charset="-122"/>
-                <a:cs typeface="Calibri" pitchFamily="34" charset="-120"/>
-              </a:rPr>
-              <a:t>/doctorlist/</a:t>
-            </a:r>
-            <a:endParaRPr lang="en-US" sz="1050" dirty="0"/>
-          </a:p>
-        </p:txBody>
-      </p:sp>
-      <p:sp>
-        <p:nvSpPr>
-          <p:cNvPr id="9" name="Shape 6"/>
-          <p:cNvSpPr/>
-          <p:nvPr/>
-        </p:nvSpPr>
-        <p:spPr>
-          <a:xfrm>
-            <a:off x="4572000" y="2057400"/>
-            <a:ext cx="777240" cy="777240"/>
-          </a:xfrm>
-          <a:prstGeom prst="ellipse">
-            <a:avLst/>
-          </a:prstGeom>
-          <a:solidFill>
-            <a:srgbClr val="2F6E71"/>
-          </a:solidFill>
-          <a:ln/>
-        </p:spPr>
-      </p:sp>
-      <p:pic>
-        <p:nvPicPr>
-          <p:cNvPr id="10" name="Image 1" descr="C:\Users\liyon\AppData\Local\Temp\claude\C--Users-liyon-Personal-MCA-PROJECT-drug-project--2--drug-project-drugrecomendation\9da8fb70-ea4c-4cf2-953c-5bcd9131f7d4\scratchpad\pptgen\icons\doctor.png">    </p:cNvPr>
-          <p:cNvPicPr>
-            <a:picLocks noChangeAspect="1"/>
-          </p:cNvPicPr>
-          <p:nvPr/>
-        </p:nvPicPr>
-        <p:blipFill>
-          <a:blip r:embed="rId2"/>
-          <a:stretch>
-            <a:fillRect/>
-          </a:stretch>
-        </p:blipFill>
-        <p:spPr>
-          <a:xfrm>
-            <a:off x="4673041" y="2158441"/>
-            <a:ext cx="575158" cy="575158"/>
-          </a:xfrm>
-          <a:prstGeom prst="rect">
-            <a:avLst/>
-          </a:prstGeom>
-        </p:spPr>
-      </p:pic>
-      <p:sp>
-        <p:nvSpPr>
-          <p:cNvPr id="11" name="Text 7"/>
-          <p:cNvSpPr/>
-          <p:nvPr/>
-        </p:nvSpPr>
-        <p:spPr>
-          <a:xfrm>
-            <a:off x="4069080" y="2103120"/>
-            <a:ext cx="1920240" cy="365760"/>
-          </a:xfrm>
-          <a:prstGeom prst="rect">
-            <a:avLst/>
-          </a:prstGeom>
-          <a:noFill/>
-          <a:ln/>
-        </p:spPr>
-        <p:txBody>
-          <a:bodyPr wrap="square" rtlCol="0" anchor="ctr"/>
-          <a:lstStyle/>
-          <a:p>
-            <a:pPr algn="r" indent="0" marL="0">
-              <a:buNone/>
-            </a:pPr>
-            <a:r>
-              <a:rPr lang="en-US" sz="1400" b="1" dirty="0">
-                <a:solidFill>
-                  <a:srgbClr val="0F2A43"/>
-                </a:solidFill>
-                <a:latin typeface="Calibri" pitchFamily="34" charset="0"/>
-                <a:ea typeface="Calibri" pitchFamily="34" charset="-122"/>
-                <a:cs typeface="Calibri" pitchFamily="34" charset="-120"/>
-              </a:rPr>
-              <a:t>Doctor</a:t>
-            </a:r>
-            <a:endParaRPr lang="en-US" sz="1400" dirty="0"/>
-          </a:p>
-        </p:txBody>
-      </p:sp>
-      <p:sp>
-        <p:nvSpPr>
-          <p:cNvPr id="12" name="Text 8"/>
-          <p:cNvSpPr/>
-          <p:nvPr/>
-        </p:nvSpPr>
-        <p:spPr>
-          <a:xfrm>
-            <a:off x="4069080" y="2414016"/>
-            <a:ext cx="1920240" cy="274320"/>
-          </a:xfrm>
-          <a:prstGeom prst="rect">
-            <a:avLst/>
-          </a:prstGeom>
-          <a:noFill/>
-          <a:ln/>
-        </p:spPr>
-        <p:txBody>
-          <a:bodyPr wrap="square" rtlCol="0" anchor="ctr"/>
-          <a:lstStyle/>
-          <a:p>
-            <a:pPr algn="r" indent="0" marL="0">
-              <a:buNone/>
-            </a:pPr>
-            <a:r>
-              <a:rPr lang="en-US" sz="1050" dirty="0">
-                <a:solidFill>
-                  <a:srgbClr val="5B6B7A"/>
-                </a:solidFill>
-                <a:latin typeface="Calibri" pitchFamily="34" charset="0"/>
-                <a:ea typeface="Calibri" pitchFamily="34" charset="-122"/>
-                <a:cs typeface="Calibri" pitchFamily="34" charset="-120"/>
-              </a:rPr>
-              <a:t>/userlist/</a:t>
-            </a:r>
-            <a:endParaRPr lang="en-US" sz="1050" dirty="0"/>
-          </a:p>
-        </p:txBody>
-      </p:sp>
-      <p:sp>
-        <p:nvSpPr>
-          <p:cNvPr id="13" name="Shape 9"/>
-          <p:cNvSpPr/>
-          <p:nvPr/>
-        </p:nvSpPr>
-        <p:spPr>
-          <a:xfrm>
-            <a:off x="2880360" y="3063240"/>
-            <a:ext cx="640080" cy="640080"/>
-          </a:xfrm>
-          <a:prstGeom prst="ellipse">
-            <a:avLst/>
-          </a:prstGeom>
-          <a:solidFill>
-            <a:srgbClr val="0F2A43"/>
-          </a:solidFill>
-          <a:ln/>
-        </p:spPr>
-      </p:sp>
-      <p:pic>
-        <p:nvPicPr>
-          <p:cNvPr id="14" name="Image 2" descr="C:\Users\liyon\AppData\Local\Temp\claude\C--Users-liyon-Personal-MCA-PROJECT-drug-project--2--drug-project-drugrecomendation\9da8fb70-ea4c-4cf2-953c-5bcd9131f7d4\scratchpad\pptgen\icons\chat.png">    </p:cNvPr>
+          <p:cNvPr id="6" name="Image 0" descr="C:\Users\liyon\AppData\Local\Temp\claude\C--Users-liyon-Personal-MCA-PROJECT-drug-project--2--drug-project-drugrecomendation\9da8fb70-ea4c-4cf2-953c-5bcd9131f7d4\scratchpad\pptgen\icons\patient.png"/>
           <p:cNvPicPr>
             <a:picLocks noChangeAspect="1"/>
           </p:cNvPicPr>
@@ -11035,6 +10439,250 @@
         </p:blipFill>
         <p:spPr>
           <a:xfrm>
+            <a:off x="1106881" y="2158441"/>
+            <a:ext cx="575158" cy="575158"/>
+          </a:xfrm>
+          <a:prstGeom prst="rect">
+            <a:avLst/>
+          </a:prstGeom>
+        </p:spPr>
+      </p:pic>
+      <p:sp>
+        <p:nvSpPr>
+          <p:cNvPr id="7" name="Text 4"/>
+          <p:cNvSpPr/>
+          <p:nvPr/>
+        </p:nvSpPr>
+        <p:spPr>
+          <a:xfrm>
+            <a:off x="1920240" y="2103120"/>
+            <a:ext cx="1737360" cy="365760"/>
+          </a:xfrm>
+          <a:prstGeom prst="rect">
+            <a:avLst/>
+          </a:prstGeom>
+          <a:noFill/>
+          <a:ln/>
+        </p:spPr>
+        <p:txBody>
+          <a:bodyPr wrap="square" rtlCol="0" anchor="ctr"/>
+          <a:lstStyle/>
+          <a:p>
+            <a:pPr marL="0" indent="0">
+              <a:buNone/>
+            </a:pPr>
+            <a:r>
+              <a:rPr lang="en-US" sz="1400" b="1" dirty="0">
+                <a:solidFill>
+                  <a:srgbClr val="0F2A43"/>
+                </a:solidFill>
+                <a:latin typeface="Calibri" pitchFamily="34" charset="0"/>
+                <a:ea typeface="Calibri" pitchFamily="34" charset="-122"/>
+                <a:cs typeface="Calibri" pitchFamily="34" charset="-120"/>
+              </a:rPr>
+              <a:t>Patient</a:t>
+            </a:r>
+            <a:endParaRPr lang="en-US" sz="1400" dirty="0"/>
+          </a:p>
+        </p:txBody>
+      </p:sp>
+      <p:sp>
+        <p:nvSpPr>
+          <p:cNvPr id="8" name="Text 5"/>
+          <p:cNvSpPr/>
+          <p:nvPr/>
+        </p:nvSpPr>
+        <p:spPr>
+          <a:xfrm>
+            <a:off x="1920240" y="2414016"/>
+            <a:ext cx="1737360" cy="274320"/>
+          </a:xfrm>
+          <a:prstGeom prst="rect">
+            <a:avLst/>
+          </a:prstGeom>
+          <a:noFill/>
+          <a:ln/>
+        </p:spPr>
+        <p:txBody>
+          <a:bodyPr wrap="square" rtlCol="0" anchor="ctr"/>
+          <a:lstStyle/>
+          <a:p>
+            <a:pPr marL="0" indent="0">
+              <a:buNone/>
+            </a:pPr>
+            <a:r>
+              <a:rPr lang="en-US" sz="1050" dirty="0">
+                <a:solidFill>
+                  <a:srgbClr val="5B6B7A"/>
+                </a:solidFill>
+                <a:latin typeface="Calibri" pitchFamily="34" charset="0"/>
+                <a:ea typeface="Calibri" pitchFamily="34" charset="-122"/>
+                <a:cs typeface="Calibri" pitchFamily="34" charset="-120"/>
+              </a:rPr>
+              <a:t>/doctorlist/</a:t>
+            </a:r>
+            <a:endParaRPr lang="en-US" sz="1050" dirty="0"/>
+          </a:p>
+        </p:txBody>
+      </p:sp>
+      <p:sp>
+        <p:nvSpPr>
+          <p:cNvPr id="9" name="Shape 6"/>
+          <p:cNvSpPr/>
+          <p:nvPr/>
+        </p:nvSpPr>
+        <p:spPr>
+          <a:xfrm>
+            <a:off x="4572000" y="2057400"/>
+            <a:ext cx="777240" cy="777240"/>
+          </a:xfrm>
+          <a:prstGeom prst="ellipse">
+            <a:avLst/>
+          </a:prstGeom>
+          <a:solidFill>
+            <a:srgbClr val="2F6E71"/>
+          </a:solidFill>
+          <a:ln/>
+        </p:spPr>
+      </p:sp>
+      <p:pic>
+        <p:nvPicPr>
+          <p:cNvPr id="10" name="Image 1" descr="C:\Users\liyon\AppData\Local\Temp\claude\C--Users-liyon-Personal-MCA-PROJECT-drug-project--2--drug-project-drugrecomendation\9da8fb70-ea4c-4cf2-953c-5bcd9131f7d4\scratchpad\pptgen\icons\doctor.png"/>
+          <p:cNvPicPr>
+            <a:picLocks noChangeAspect="1"/>
+          </p:cNvPicPr>
+          <p:nvPr/>
+        </p:nvPicPr>
+        <p:blipFill>
+          <a:blip r:embed="rId4"/>
+          <a:stretch>
+            <a:fillRect/>
+          </a:stretch>
+        </p:blipFill>
+        <p:spPr>
+          <a:xfrm>
+            <a:off x="4673041" y="2158441"/>
+            <a:ext cx="575158" cy="575158"/>
+          </a:xfrm>
+          <a:prstGeom prst="rect">
+            <a:avLst/>
+          </a:prstGeom>
+        </p:spPr>
+      </p:pic>
+      <p:sp>
+        <p:nvSpPr>
+          <p:cNvPr id="11" name="Text 7"/>
+          <p:cNvSpPr/>
+          <p:nvPr/>
+        </p:nvSpPr>
+        <p:spPr>
+          <a:xfrm>
+            <a:off x="4069080" y="2103120"/>
+            <a:ext cx="1920240" cy="365760"/>
+          </a:xfrm>
+          <a:prstGeom prst="rect">
+            <a:avLst/>
+          </a:prstGeom>
+          <a:noFill/>
+          <a:ln/>
+        </p:spPr>
+        <p:txBody>
+          <a:bodyPr wrap="square" rtlCol="0" anchor="ctr"/>
+          <a:lstStyle/>
+          <a:p>
+            <a:pPr marL="0" indent="0" algn="r">
+              <a:buNone/>
+            </a:pPr>
+            <a:r>
+              <a:rPr lang="en-US" sz="1400" b="1" dirty="0">
+                <a:solidFill>
+                  <a:srgbClr val="0F2A43"/>
+                </a:solidFill>
+                <a:latin typeface="Calibri" pitchFamily="34" charset="0"/>
+                <a:ea typeface="Calibri" pitchFamily="34" charset="-122"/>
+                <a:cs typeface="Calibri" pitchFamily="34" charset="-120"/>
+              </a:rPr>
+              <a:t>Doctor</a:t>
+            </a:r>
+            <a:endParaRPr lang="en-US" sz="1400" dirty="0"/>
+          </a:p>
+        </p:txBody>
+      </p:sp>
+      <p:sp>
+        <p:nvSpPr>
+          <p:cNvPr id="12" name="Text 8"/>
+          <p:cNvSpPr/>
+          <p:nvPr/>
+        </p:nvSpPr>
+        <p:spPr>
+          <a:xfrm>
+            <a:off x="4069080" y="2414016"/>
+            <a:ext cx="1920240" cy="274320"/>
+          </a:xfrm>
+          <a:prstGeom prst="rect">
+            <a:avLst/>
+          </a:prstGeom>
+          <a:noFill/>
+          <a:ln/>
+        </p:spPr>
+        <p:txBody>
+          <a:bodyPr wrap="square" rtlCol="0" anchor="ctr"/>
+          <a:lstStyle/>
+          <a:p>
+            <a:pPr marL="0" indent="0" algn="r">
+              <a:buNone/>
+            </a:pPr>
+            <a:r>
+              <a:rPr lang="en-US" sz="1050" dirty="0">
+                <a:solidFill>
+                  <a:srgbClr val="5B6B7A"/>
+                </a:solidFill>
+                <a:latin typeface="Calibri" pitchFamily="34" charset="0"/>
+                <a:ea typeface="Calibri" pitchFamily="34" charset="-122"/>
+                <a:cs typeface="Calibri" pitchFamily="34" charset="-120"/>
+              </a:rPr>
+              <a:t>/userlist/</a:t>
+            </a:r>
+            <a:endParaRPr lang="en-US" sz="1050" dirty="0"/>
+          </a:p>
+        </p:txBody>
+      </p:sp>
+      <p:sp>
+        <p:nvSpPr>
+          <p:cNvPr id="13" name="Shape 9"/>
+          <p:cNvSpPr/>
+          <p:nvPr/>
+        </p:nvSpPr>
+        <p:spPr>
+          <a:xfrm>
+            <a:off x="2880360" y="3063240"/>
+            <a:ext cx="640080" cy="640080"/>
+          </a:xfrm>
+          <a:prstGeom prst="ellipse">
+            <a:avLst/>
+          </a:prstGeom>
+          <a:solidFill>
+            <a:srgbClr val="0F2A43"/>
+          </a:solidFill>
+          <a:ln/>
+        </p:spPr>
+      </p:sp>
+      <p:pic>
+        <p:nvPicPr>
+          <p:cNvPr id="14" name="Image 2" descr="C:\Users\liyon\AppData\Local\Temp\claude\C--Users-liyon-Personal-MCA-PROJECT-drug-project--2--drug-project-drugrecomendation\9da8fb70-ea4c-4cf2-953c-5bcd9131f7d4\scratchpad\pptgen\icons\chat.png"/>
+          <p:cNvPicPr>
+            <a:picLocks noChangeAspect="1"/>
+          </p:cNvPicPr>
+          <p:nvPr/>
+        </p:nvPicPr>
+        <p:blipFill>
+          <a:blip r:embed="rId5"/>
+          <a:stretch>
+            <a:fillRect/>
+          </a:stretch>
+        </p:blipFill>
+        <p:spPr>
+          <a:xfrm>
             <a:off x="2963570" y="3146450"/>
             <a:ext cx="473659" cy="473659"/>
           </a:xfrm>
@@ -11130,7 +10778,7 @@
           <a:bodyPr wrap="square" rtlCol="0" anchor="ctr"/>
           <a:lstStyle/>
           <a:p>
-            <a:pPr indent="0" marL="0">
+            <a:pPr marL="0" indent="0">
               <a:buNone/>
             </a:pPr>
             <a:r>
@@ -11169,7 +10817,7 @@
           <a:bodyPr wrap="square" rtlCol="0" anchor="ctr"/>
           <a:lstStyle/>
           <a:p>
-            <a:pPr indent="0" marL="0">
+            <a:pPr marL="0" indent="0">
               <a:lnSpc>
                 <a:spcPts val="1300"/>
               </a:lnSpc>
@@ -11231,7 +10879,7 @@
           <a:bodyPr wrap="square" rtlCol="0" anchor="ctr"/>
           <a:lstStyle/>
           <a:p>
-            <a:pPr indent="0" marL="0">
+            <a:pPr marL="0" indent="0">
               <a:buNone/>
             </a:pPr>
             <a:r>
@@ -11270,7 +10918,7 @@
           <a:bodyPr wrap="square" rtlCol="0" anchor="ctr"/>
           <a:lstStyle/>
           <a:p>
-            <a:pPr indent="0" marL="0">
+            <a:pPr marL="0" indent="0">
               <a:lnSpc>
                 <a:spcPts val="1300"/>
               </a:lnSpc>
@@ -11332,7 +10980,7 @@
           <a:bodyPr wrap="square" rtlCol="0" anchor="ctr"/>
           <a:lstStyle/>
           <a:p>
-            <a:pPr indent="0" marL="0">
+            <a:pPr marL="0" indent="0">
               <a:buNone/>
             </a:pPr>
             <a:r>
@@ -11371,7 +11019,7 @@
           <a:bodyPr wrap="square" rtlCol="0" anchor="ctr"/>
           <a:lstStyle/>
           <a:p>
-            <a:pPr indent="0" marL="0">
+            <a:pPr marL="0" indent="0">
               <a:lnSpc>
                 <a:spcPts val="1300"/>
               </a:lnSpc>
@@ -11418,7 +11066,7 @@
             <a:prstDash val="solid"/>
           </a:ln>
           <a:effectLst>
-            <a:outerShdw sx="100000" sy="100000" kx="0" ky="0" algn="bl" rotWithShape="0" blurRad="228600" dist="76200" dir="5400000">
+            <a:outerShdw blurRad="228600" dist="76200" dir="5400000" algn="bl" rotWithShape="0">
               <a:srgbClr val="1B2733">
                 <a:alpha val="28000"/>
               </a:srgbClr>
@@ -11510,15 +11158,15 @@
       </p:sp>
       <p:pic>
         <p:nvPicPr>
-          <p:cNvPr id="31" name="Image 3" descr="C:\Users\liyon\AppData\Local\Temp\claude\C--Users-liyon-Personal-MCA-PROJECT-drug-project--2--drug-project-drugrecomendation\9da8fb70-ea4c-4cf2-953c-5bcd9131f7d4\scratchpad\pptgen\shots\06_user_doctorlist.png">    </p:cNvPr>
+          <p:cNvPr id="31" name="Image 3" descr="C:\Users\liyon\AppData\Local\Temp\claude\C--Users-liyon-Personal-MCA-PROJECT-drug-project--2--drug-project-drugrecomendation\9da8fb70-ea4c-4cf2-953c-5bcd9131f7d4\scratchpad\pptgen\shots\06_user_doctorlist.png"/>
           <p:cNvPicPr>
             <a:picLocks noChangeAspect="1"/>
           </p:cNvPicPr>
           <p:nvPr/>
         </p:nvPicPr>
         <p:blipFill>
-          <a:blip r:embed="rId4"/>
-          <a:srcRect l="0" r="0" t="0" b="0"/>
+          <a:blip r:embed="rId6"/>
+          <a:srcRect/>
           <a:stretch/>
         </p:blipFill>
         <p:spPr>
@@ -11552,7 +11200,7 @@
           <a:bodyPr wrap="square" rtlCol="0" anchor="ctr"/>
           <a:lstStyle/>
           <a:p>
-            <a:pPr algn="l" indent="0" marL="0">
+            <a:pPr marL="0" indent="0" algn="l">
               <a:buNone/>
             </a:pPr>
             <a:r>
@@ -11591,7 +11239,7 @@
           <a:bodyPr wrap="square" rtlCol="0" anchor="ctr"/>
           <a:lstStyle/>
           <a:p>
-            <a:pPr algn="r" indent="0" marL="0">
+            <a:pPr marL="0" indent="0" algn="r">
               <a:buNone/>
             </a:pPr>
             <a:r>
@@ -11655,11 +11303,11 @@
           <a:bodyPr wrap="square" rtlCol="0" anchor="ctr"/>
           <a:lstStyle/>
           <a:p>
-            <a:pPr indent="0" marL="0">
-              <a:buNone/>
-            </a:pPr>
-            <a:r>
-              <a:rPr lang="en-US" sz="1200" b="1" spc="200" kern="0" dirty="0">
+            <a:pPr marL="0" indent="0">
+              <a:buNone/>
+            </a:pPr>
+            <a:r>
+              <a:rPr lang="en-US" sz="1200" b="1" kern="0" spc="200" dirty="0">
                 <a:solidFill>
                   <a:srgbClr val="F44749"/>
                 </a:solidFill>
@@ -11694,7 +11342,7 @@
           <a:bodyPr wrap="square" rtlCol="0" anchor="ctr"/>
           <a:lstStyle/>
           <a:p>
-            <a:pPr indent="0" marL="0">
+            <a:pPr marL="0" indent="0">
               <a:buNone/>
             </a:pPr>
             <a:r>
@@ -11733,7 +11381,7 @@
           <a:bodyPr wrap="square" rtlCol="0" anchor="ctr"/>
           <a:lstStyle/>
           <a:p>
-            <a:pPr indent="0" marL="0">
+            <a:pPr marL="0" indent="0">
               <a:lnSpc>
                 <a:spcPts val="1600"/>
               </a:lnSpc>
@@ -11797,7 +11445,7 @@
           <a:bodyPr wrap="square" rtlCol="0" anchor="ctr"/>
           <a:lstStyle/>
           <a:p>
-            <a:pPr algn="ctr" indent="0" marL="0">
+            <a:pPr marL="0" indent="0" algn="ctr">
               <a:buNone/>
             </a:pPr>
             <a:r>
@@ -11836,11 +11484,11 @@
           <a:bodyPr wrap="square" rtlCol="0" anchor="ctr"/>
           <a:lstStyle/>
           <a:p>
-            <a:pPr algn="ctr" indent="0" marL="0">
-              <a:buNone/>
-            </a:pPr>
-            <a:r>
-              <a:rPr lang="en-US" sz="1200" b="1" spc="100" kern="0" dirty="0">
+            <a:pPr marL="0" indent="0" algn="ctr">
+              <a:buNone/>
+            </a:pPr>
+            <a:r>
+              <a:rPr lang="en-US" sz="1200" b="1" kern="0" spc="100" dirty="0">
                 <a:solidFill>
                   <a:srgbClr val="F3AF24"/>
                 </a:solidFill>
@@ -11875,7 +11523,7 @@
           <a:bodyPr wrap="square" rtlCol="0" anchor="ctr"/>
           <a:lstStyle/>
           <a:p>
-            <a:pPr algn="ctr" indent="0" marL="0">
+            <a:pPr marL="0" indent="0" algn="ctr">
               <a:lnSpc>
                 <a:spcPts val="1200"/>
               </a:lnSpc>
@@ -11939,7 +11587,7 @@
           <a:bodyPr wrap="square" rtlCol="0" anchor="ctr"/>
           <a:lstStyle/>
           <a:p>
-            <a:pPr algn="ctr" indent="0" marL="0">
+            <a:pPr marL="0" indent="0" algn="ctr">
               <a:buNone/>
             </a:pPr>
             <a:r>
@@ -11978,11 +11626,11 @@
           <a:bodyPr wrap="square" rtlCol="0" anchor="ctr"/>
           <a:lstStyle/>
           <a:p>
-            <a:pPr algn="ctr" indent="0" marL="0">
-              <a:buNone/>
-            </a:pPr>
-            <a:r>
-              <a:rPr lang="en-US" sz="1200" b="1" spc="100" kern="0" dirty="0">
+            <a:pPr marL="0" indent="0" algn="ctr">
+              <a:buNone/>
+            </a:pPr>
+            <a:r>
+              <a:rPr lang="en-US" sz="1200" b="1" kern="0" spc="100" dirty="0">
                 <a:solidFill>
                   <a:srgbClr val="F3AF24"/>
                 </a:solidFill>
@@ -12017,7 +11665,7 @@
           <a:bodyPr wrap="square" rtlCol="0" anchor="ctr"/>
           <a:lstStyle/>
           <a:p>
-            <a:pPr algn="ctr" indent="0" marL="0">
+            <a:pPr marL="0" indent="0" algn="ctr">
               <a:lnSpc>
                 <a:spcPts val="1200"/>
               </a:lnSpc>
@@ -12081,7 +11729,7 @@
           <a:bodyPr wrap="square" rtlCol="0" anchor="ctr"/>
           <a:lstStyle/>
           <a:p>
-            <a:pPr algn="ctr" indent="0" marL="0">
+            <a:pPr marL="0" indent="0" algn="ctr">
               <a:buNone/>
             </a:pPr>
             <a:r>
@@ -12120,11 +11768,11 @@
           <a:bodyPr wrap="square" rtlCol="0" anchor="ctr"/>
           <a:lstStyle/>
           <a:p>
-            <a:pPr algn="ctr" indent="0" marL="0">
-              <a:buNone/>
-            </a:pPr>
-            <a:r>
-              <a:rPr lang="en-US" sz="1200" b="1" spc="100" kern="0" dirty="0">
+            <a:pPr marL="0" indent="0" algn="ctr">
+              <a:buNone/>
+            </a:pPr>
+            <a:r>
+              <a:rPr lang="en-US" sz="1200" b="1" kern="0" spc="100" dirty="0">
                 <a:solidFill>
                   <a:srgbClr val="F3AF24"/>
                 </a:solidFill>
@@ -12159,7 +11807,7 @@
           <a:bodyPr wrap="square" rtlCol="0" anchor="ctr"/>
           <a:lstStyle/>
           <a:p>
-            <a:pPr algn="ctr" indent="0" marL="0">
+            <a:pPr marL="0" indent="0" algn="ctr">
               <a:lnSpc>
                 <a:spcPts val="1200"/>
               </a:lnSpc>
@@ -12223,7 +11871,7 @@
           <a:bodyPr wrap="square" rtlCol="0" anchor="ctr"/>
           <a:lstStyle/>
           <a:p>
-            <a:pPr algn="ctr" indent="0" marL="0">
+            <a:pPr marL="0" indent="0" algn="ctr">
               <a:buNone/>
             </a:pPr>
             <a:r>
@@ -12262,11 +11910,11 @@
           <a:bodyPr wrap="square" rtlCol="0" anchor="ctr"/>
           <a:lstStyle/>
           <a:p>
-            <a:pPr algn="ctr" indent="0" marL="0">
-              <a:buNone/>
-            </a:pPr>
-            <a:r>
-              <a:rPr lang="en-US" sz="1200" b="1" spc="100" kern="0" dirty="0">
+            <a:pPr marL="0" indent="0" algn="ctr">
+              <a:buNone/>
+            </a:pPr>
+            <a:r>
+              <a:rPr lang="en-US" sz="1200" b="1" kern="0" spc="100" dirty="0">
                 <a:solidFill>
                   <a:srgbClr val="F3AF24"/>
                 </a:solidFill>
@@ -12301,7 +11949,7 @@
           <a:bodyPr wrap="square" rtlCol="0" anchor="ctr"/>
           <a:lstStyle/>
           <a:p>
-            <a:pPr algn="ctr" indent="0" marL="0">
+            <a:pPr marL="0" indent="0" algn="ctr">
               <a:lnSpc>
                 <a:spcPts val="1200"/>
               </a:lnSpc>
@@ -12371,14 +12019,14 @@
       </p:sp>
       <p:pic>
         <p:nvPicPr>
-          <p:cNvPr id="23" name="Image 0" descr="C:\Users\liyon\AppData\Local\Temp\claude\C--Users-liyon-Personal-MCA-PROJECT-drug-project--2--drug-project-drugrecomendation\9da8fb70-ea4c-4cf2-953c-5bcd9131f7d4\scratchpad\pptgen\icons\moneybill.png">    </p:cNvPr>
+          <p:cNvPr id="23" name="Image 0" descr="C:\Users\liyon\AppData\Local\Temp\claude\C--Users-liyon-Personal-MCA-PROJECT-drug-project--2--drug-project-drugrecomendation\9da8fb70-ea4c-4cf2-953c-5bcd9131f7d4\scratchpad\pptgen\icons\moneybill.png"/>
           <p:cNvPicPr>
             <a:picLocks noChangeAspect="1"/>
           </p:cNvPicPr>
           <p:nvPr/>
         </p:nvPicPr>
         <p:blipFill>
-          <a:blip r:embed="rId1"/>
+          <a:blip r:embed="rId3"/>
           <a:stretch>
             <a:fillRect/>
           </a:stretch>
@@ -12414,7 +12062,7 @@
           <a:bodyPr wrap="square" rtlCol="0" anchor="ctr"/>
           <a:lstStyle/>
           <a:p>
-            <a:pPr indent="0" marL="0">
+            <a:pPr marL="0" indent="0">
               <a:buNone/>
             </a:pPr>
             <a:r>
@@ -12453,7 +12101,7 @@
           <a:bodyPr wrap="square" rtlCol="0" anchor="ctr"/>
           <a:lstStyle/>
           <a:p>
-            <a:pPr indent="0" marL="0">
+            <a:pPr marL="0" indent="0">
               <a:lnSpc>
                 <a:spcPts val="1600"/>
               </a:lnSpc>
@@ -12495,7 +12143,7 @@
           <a:bodyPr wrap="square" rtlCol="0" anchor="ctr"/>
           <a:lstStyle/>
           <a:p>
-            <a:pPr algn="l" indent="0" marL="0">
+            <a:pPr marL="0" indent="0" algn="l">
               <a:buNone/>
             </a:pPr>
             <a:r>
@@ -12534,7 +12182,7 @@
           <a:bodyPr wrap="square" rtlCol="0" anchor="ctr"/>
           <a:lstStyle/>
           <a:p>
-            <a:pPr algn="r" indent="0" marL="0">
+            <a:pPr marL="0" indent="0" algn="r">
               <a:buNone/>
             </a:pPr>
             <a:r>
@@ -12853,4 +12501,299 @@
     </a:ext>
   </a:extLst>
 </a:theme>
+</file>
+
+<file path=ppt/theme/theme2.xml><?xml version="1.0" encoding="utf-8"?>
+<a:theme xmlns:a="http://schemas.openxmlformats.org/drawingml/2006/main" name="Office Theme">
+  <a:themeElements>
+    <a:clrScheme name="Office">
+      <a:dk1>
+        <a:sysClr val="windowText" lastClr="000000"/>
+      </a:dk1>
+      <a:lt1>
+        <a:sysClr val="window" lastClr="FFFFFF"/>
+      </a:lt1>
+      <a:dk2>
+        <a:srgbClr val="44546A"/>
+      </a:dk2>
+      <a:lt2>
+        <a:srgbClr val="E7E6E6"/>
+      </a:lt2>
+      <a:accent1>
+        <a:srgbClr val="4472C4"/>
+      </a:accent1>
+      <a:accent2>
+        <a:srgbClr val="ED7D31"/>
+      </a:accent2>
+      <a:accent3>
+        <a:srgbClr val="A5A5A5"/>
+      </a:accent3>
+      <a:accent4>
+        <a:srgbClr val="FFC000"/>
+      </a:accent4>
+      <a:accent5>
+        <a:srgbClr val="5B9BD5"/>
+      </a:accent5>
+      <a:accent6>
+        <a:srgbClr val="70AD47"/>
+      </a:accent6>
+      <a:hlink>
+        <a:srgbClr val="0563C1"/>
+      </a:hlink>
+      <a:folHlink>
+        <a:srgbClr val="954F72"/>
+      </a:folHlink>
+    </a:clrScheme>
+    <a:fontScheme name="Office">
+      <a:majorFont>
+        <a:latin typeface="Calibri Light" panose="020F0302020204030204"/>
+        <a:ea typeface=""/>
+        <a:cs typeface=""/>
+        <a:font script="Jpan" typeface="游ゴシック Light"/>
+        <a:font script="Hang" typeface="맑은 고딕"/>
+        <a:font script="Hans" typeface="等线 Light"/>
+        <a:font script="Hant" typeface="新細明體"/>
+        <a:font script="Arab" typeface="Times New Roman"/>
+        <a:font script="Hebr" typeface="Times New Roman"/>
+        <a:font script="Thai" typeface="Angsana New"/>
+        <a:font script="Ethi" typeface="Nyala"/>
+        <a:font script="Beng" typeface="Vrinda"/>
+        <a:font script="Gujr" typeface="Shruti"/>
+        <a:font script="Khmr" typeface="MoolBoran"/>
+        <a:font script="Knda" typeface="Tunga"/>
+        <a:font script="Guru" typeface="Raavi"/>
+        <a:font script="Cans" typeface="Euphemia"/>
+        <a:font script="Cher" typeface="Plantagenet Cherokee"/>
+        <a:font script="Yiii" typeface="Microsoft Yi Baiti"/>
+        <a:font script="Tibt" typeface="Microsoft Himalaya"/>
+        <a:font script="Thaa" typeface="MV Boli"/>
+        <a:font script="Deva" typeface="Mangal"/>
+        <a:font script="Telu" typeface="Gautami"/>
+        <a:font script="Taml" typeface="Latha"/>
+        <a:font script="Syrc" typeface="Estrangelo Edessa"/>
+        <a:font script="Orya" typeface="Kalinga"/>
+        <a:font script="Mlym" typeface="Kartika"/>
+        <a:font script="Laoo" typeface="DokChampa"/>
+        <a:font script="Sinh" typeface="Iskoola Pota"/>
+        <a:font script="Mong" typeface="Mongolian Baiti"/>
+        <a:font script="Viet" typeface="Times New Roman"/>
+        <a:font script="Uigh" typeface="Microsoft Uighur"/>
+        <a:font script="Geor" typeface="Sylfaen"/>
+        <a:font script="Armn" typeface="Arial"/>
+        <a:font script="Bugi" typeface="Leelawadee UI"/>
+        <a:font script="Bopo" typeface="Microsoft JhengHei"/>
+        <a:font script="Java" typeface="Javanese Text"/>
+        <a:font script="Lisu" typeface="Segoe UI"/>
+        <a:font script="Mymr" typeface="Myanmar Text"/>
+        <a:font script="Nkoo" typeface="Ebrima"/>
+        <a:font script="Olck" typeface="Nirmala UI"/>
+        <a:font script="Osma" typeface="Ebrima"/>
+        <a:font script="Phag" typeface="Phagspa"/>
+        <a:font script="Syrn" typeface="Estrangelo Edessa"/>
+        <a:font script="Syrj" typeface="Estrangelo Edessa"/>
+        <a:font script="Syre" typeface="Estrangelo Edessa"/>
+        <a:font script="Sora" typeface="Nirmala UI"/>
+        <a:font script="Tale" typeface="Microsoft Tai Le"/>
+        <a:font script="Talu" typeface="Microsoft New Tai Lue"/>
+        <a:font script="Tfng" typeface="Ebrima"/>
+      </a:majorFont>
+      <a:minorFont>
+        <a:latin typeface="Calibri" panose="020F0502020204030204"/>
+        <a:ea typeface=""/>
+        <a:cs typeface=""/>
+        <a:font script="Jpan" typeface="游ゴシック"/>
+        <a:font script="Hang" typeface="맑은 고딕"/>
+        <a:font script="Hans" typeface="等线"/>
+        <a:font script="Hant" typeface="新細明體"/>
+        <a:font script="Arab" typeface="Arial"/>
+        <a:font script="Hebr" typeface="Arial"/>
+        <a:font script="Thai" typeface="Cordia New"/>
+        <a:font script="Ethi" typeface="Nyala"/>
+        <a:font script="Beng" typeface="Vrinda"/>
+        <a:font script="Gujr" typeface="Shruti"/>
+        <a:font script="Khmr" typeface="DaunPenh"/>
+        <a:font script="Knda" typeface="Tunga"/>
+        <a:font script="Guru" typeface="Raavi"/>
+        <a:font script="Cans" typeface="Euphemia"/>
+        <a:font script="Cher" typeface="Plantagenet Cherokee"/>
+        <a:font script="Yiii" typeface="Microsoft Yi Baiti"/>
+        <a:font script="Tibt" typeface="Microsoft Himalaya"/>
+        <a:font script="Thaa" typeface="MV Boli"/>
+        <a:font script="Deva" typeface="Mangal"/>
+        <a:font script="Telu" typeface="Gautami"/>
+        <a:font script="Taml" typeface="Latha"/>
+        <a:font script="Syrc" typeface="Estrangelo Edessa"/>
+        <a:font script="Orya" typeface="Kalinga"/>
+        <a:font script="Mlym" typeface="Kartika"/>
+        <a:font script="Laoo" typeface="DokChampa"/>
+        <a:font script="Sinh" typeface="Iskoola Pota"/>
+        <a:font script="Mong" typeface="Mongolian Baiti"/>
+        <a:font script="Viet" typeface="Arial"/>
+        <a:font script="Uigh" typeface="Microsoft Uighur"/>
+        <a:font script="Geor" typeface="Sylfaen"/>
+        <a:font script="Armn" typeface="Arial"/>
+        <a:font script="Bugi" typeface="Leelawadee UI"/>
+        <a:font script="Bopo" typeface="Microsoft JhengHei"/>
+        <a:font script="Java" typeface="Javanese Text"/>
+        <a:font script="Lisu" typeface="Segoe UI"/>
+        <a:font script="Mymr" typeface="Myanmar Text"/>
+        <a:font script="Nkoo" typeface="Ebrima"/>
+        <a:font script="Olck" typeface="Nirmala UI"/>
+        <a:font script="Osma" typeface="Ebrima"/>
+        <a:font script="Phag" typeface="Phagspa"/>
+        <a:font script="Syrn" typeface="Estrangelo Edessa"/>
+        <a:font script="Syrj" typeface="Estrangelo Edessa"/>
+        <a:font script="Syre" typeface="Estrangelo Edessa"/>
+        <a:font script="Sora" typeface="Nirmala UI"/>
+        <a:font script="Tale" typeface="Microsoft Tai Le"/>
+        <a:font script="Talu" typeface="Microsoft New Tai Lue"/>
+        <a:font script="Tfng" typeface="Ebrima"/>
+      </a:minorFont>
+    </a:fontScheme>
+    <a:fmtScheme name="Office">
+      <a:fillStyleLst>
+        <a:solidFill>
+          <a:schemeClr val="phClr"/>
+        </a:solidFill>
+        <a:gradFill rotWithShape="1">
+          <a:gsLst>
+            <a:gs pos="0">
+              <a:schemeClr val="phClr">
+                <a:lumMod val="110000"/>
+                <a:satMod val="105000"/>
+                <a:tint val="67000"/>
+              </a:schemeClr>
+            </a:gs>
+            <a:gs pos="50000">
+              <a:schemeClr val="phClr">
+                <a:lumMod val="105000"/>
+                <a:satMod val="103000"/>
+                <a:tint val="73000"/>
+              </a:schemeClr>
+            </a:gs>
+            <a:gs pos="100000">
+              <a:schemeClr val="phClr">
+                <a:lumMod val="105000"/>
+                <a:satMod val="109000"/>
+                <a:tint val="81000"/>
+              </a:schemeClr>
+            </a:gs>
+          </a:gsLst>
+          <a:lin ang="5400000" scaled="0"/>
+        </a:gradFill>
+        <a:gradFill rotWithShape="1">
+          <a:gsLst>
+            <a:gs pos="0">
+              <a:schemeClr val="phClr">
+                <a:satMod val="103000"/>
+                <a:lumMod val="102000"/>
+                <a:tint val="94000"/>
+              </a:schemeClr>
+            </a:gs>
+            <a:gs pos="50000">
+              <a:schemeClr val="phClr">
+                <a:satMod val="110000"/>
+                <a:lumMod val="100000"/>
+                <a:shade val="100000"/>
+              </a:schemeClr>
+            </a:gs>
+            <a:gs pos="100000">
+              <a:schemeClr val="phClr">
+                <a:lumMod val="99000"/>
+                <a:satMod val="120000"/>
+                <a:shade val="78000"/>
+              </a:schemeClr>
+            </a:gs>
+          </a:gsLst>
+          <a:lin ang="5400000" scaled="0"/>
+        </a:gradFill>
+      </a:fillStyleLst>
+      <a:lnStyleLst>
+        <a:ln w="6350" cap="flat" cmpd="sng" algn="ctr">
+          <a:solidFill>
+            <a:schemeClr val="phClr"/>
+          </a:solidFill>
+          <a:prstDash val="solid"/>
+          <a:miter lim="800000"/>
+        </a:ln>
+        <a:ln w="12700" cap="flat" cmpd="sng" algn="ctr">
+          <a:solidFill>
+            <a:schemeClr val="phClr"/>
+          </a:solidFill>
+          <a:prstDash val="solid"/>
+          <a:miter lim="800000"/>
+        </a:ln>
+        <a:ln w="19050" cap="flat" cmpd="sng" algn="ctr">
+          <a:solidFill>
+            <a:schemeClr val="phClr"/>
+          </a:solidFill>
+          <a:prstDash val="solid"/>
+          <a:miter lim="800000"/>
+        </a:ln>
+      </a:lnStyleLst>
+      <a:effectStyleLst>
+        <a:effectStyle>
+          <a:effectLst/>
+        </a:effectStyle>
+        <a:effectStyle>
+          <a:effectLst/>
+        </a:effectStyle>
+        <a:effectStyle>
+          <a:effectLst>
+            <a:outerShdw blurRad="57150" dist="19050" dir="5400000" algn="ctr" rotWithShape="0">
+              <a:srgbClr val="000000">
+                <a:alpha val="63000"/>
+              </a:srgbClr>
+            </a:outerShdw>
+          </a:effectLst>
+        </a:effectStyle>
+      </a:effectStyleLst>
+      <a:bgFillStyleLst>
+        <a:solidFill>
+          <a:schemeClr val="phClr"/>
+        </a:solidFill>
+        <a:solidFill>
+          <a:schemeClr val="phClr">
+            <a:tint val="95000"/>
+            <a:satMod val="170000"/>
+          </a:schemeClr>
+        </a:solidFill>
+        <a:gradFill rotWithShape="1">
+          <a:gsLst>
+            <a:gs pos="0">
+              <a:schemeClr val="phClr">
+                <a:tint val="93000"/>
+                <a:satMod val="150000"/>
+                <a:shade val="98000"/>
+                <a:lumMod val="102000"/>
+              </a:schemeClr>
+            </a:gs>
+            <a:gs pos="50000">
+              <a:schemeClr val="phClr">
+                <a:tint val="98000"/>
+                <a:satMod val="130000"/>
+                <a:shade val="90000"/>
+                <a:lumMod val="103000"/>
+              </a:schemeClr>
+            </a:gs>
+            <a:gs pos="100000">
+              <a:schemeClr val="phClr">
+                <a:shade val="63000"/>
+                <a:satMod val="120000"/>
+              </a:schemeClr>
+            </a:gs>
+          </a:gsLst>
+          <a:lin ang="5400000" scaled="0"/>
+        </a:gradFill>
+      </a:bgFillStyleLst>
+    </a:fmtScheme>
+  </a:themeElements>
+  <a:objectDefaults/>
+  <a:extraClrSchemeLst/>
+  <a:extLst>
+    <a:ext uri="{05A4C25C-085E-4340-85A3-A5531E510DB2}">
+      <thm15:themeFamily xmlns:thm15="http://schemas.microsoft.com/office/thememl/2012/main" name="Office Theme" id="{62F939B6-93AF-4DB8-9C6B-D6C7DFDC589F}" vid="{4A3C46E8-61CC-4603-A589-7422A47A8E4A}"/>
+    </a:ext>
+  </a:extLst>
+</a:theme>
 </file>